--- a/skills/dsh-academic-ppt/references/templates/plan.pptx
+++ b/skills/dsh-academic-ppt/references/templates/plan.pptx
@@ -512,7 +512,7 @@
 内容职责：已有证据；尚存缺口；研究假设；实验对照；评价与反证。
 建议讲述时间只是排练起点，按实际内容调整。
 参考文献（完整题名）
-T1 · Full article title: connecting decision models, experimental evidence and independent validation in crop cultivation · 期刊与卷页（替换） · 2026 · 待替换 · 书目占位，非真实文献</a:t>
+T1 · Full article title: connecting decision models, experimental evidence and independent validation in crop cultivation · 期刊与卷页（替换） · 2026 · 书目占位；图表均为合成示例 · 书目占位，非真实文献</a:t>
             </a:r>
             <a:endParaRPr lang="en-US" dirty="0"/>
           </a:p>
@@ -605,7 +605,7 @@
 内容职责：共同预算与信息；主要终点与反证。
 建议讲述时间只是排练起点，按实际内容调整。
 参考文献（完整题名）
-T1 · Full article title: connecting decision models, experimental evidence and independent validation in crop cultivation · 期刊与卷页（替换） · 2026 · 待替换 · 书目占位，非真实文献</a:t>
+T1 · Full article title: connecting decision models, experimental evidence and independent validation in crop cultivation · 期刊与卷页（替换） · 2026 · 书目占位；图表均为合成示例 · 书目占位，非真实文献</a:t>
             </a:r>
             <a:endParaRPr lang="en-US" dirty="0"/>
           </a:p>
@@ -698,7 +698,7 @@
 内容职责：样本量与采集计划；留出与分析计划。
 建议讲述时间只是排练起点，按实际内容调整。
 参考文献（完整题名）
-T1 · Full article title: connecting decision models, experimental evidence and independent validation in crop cultivation · 期刊与卷页（替换） · 2026 · 待替换 · 书目占位，非真实文献</a:t>
+T1 · Full article title: connecting decision models, experimental evidence and independent validation in crop cultivation · 期刊与卷页（替换） · 2026 · 书目占位；图表均为合成示例 · 书目占位，非真实文献</a:t>
             </a:r>
             <a:endParaRPr lang="en-US" dirty="0"/>
           </a:p>
@@ -791,7 +791,7 @@
 内容职责：阶段一：材料与基线；阶段二：机制与验证；阶段三：边界与复现；阶段依赖；停止与调整条件。
 建议讲述时间只是排练起点，按实际内容调整。
 参考文献（完整题名）
-T1 · Full article title: connecting decision models, experimental evidence and independent validation in crop cultivation · 期刊与卷页（替换） · 2026 · 待替换 · 书目占位，非真实文献</a:t>
+T1 · Full article title: connecting decision models, experimental evidence and independent validation in crop cultivation · 期刊与卷页（替换） · 2026 · 书目占位；图表均为合成示例 · 书目占位，非真实文献</a:t>
             </a:r>
             <a:endParaRPr lang="en-US" dirty="0"/>
           </a:p>
@@ -884,7 +884,7 @@
 内容职责：结论一及证据；结论二及证据；结论三及证据；尚未验证；优先研究问题。
 建议讲述时间只是排练起点，按实际内容调整。
 参考文献（完整题名）
-T1 · Full article title: connecting decision models, experimental evidence and independent validation in crop cultivation · 期刊与卷页（替换） · 2026 · 待替换 · 书目占位，非真实文献</a:t>
+T1 · Full article title: connecting decision models, experimental evidence and independent validation in crop cultivation · 期刊与卷页（替换） · 2026 · 书目占位；图表均为合成示例 · 书目占位，非真实文献</a:t>
             </a:r>
             <a:endParaRPr lang="en-US" dirty="0"/>
           </a:p>
@@ -977,9 +977,9 @@
 内容职责：版本与补充材料；图像与数据来源。
 建议讲述时间只是排练起点，按实际内容调整。
 参考文献（完整题名）
-T1 · Full article title: connecting decision models, experimental evidence and independent validation in crop cultivation · 期刊与卷页（替换） · 2026 · 待替换 · 书目占位，非真实文献
-T2 · Full title of a related methods or validation study · 期刊与卷页（替换） · 2026 · 待替换 · 书目占位，非真实文献
-T3 · Full title of the source for the supplementary evidence · 期刊与卷页（替换） · 2026 · 待替换 · 书目占位，非真实文献</a:t>
+T1 · Full article title: connecting decision models, experimental evidence and independent validation in crop cultivation · 期刊与卷页（替换） · 2026 · 书目占位；图表均为合成示例 · 书目占位，非真实文献
+T2 · Full title of a related methods or validation study · 期刊与卷页（替换） · 2026 · 书目占位；图表均为合成示例 · 书目占位，非真实文献
+T3 · Full title of the source for the supplementary evidence · 期刊与卷页（替换） · 2026 · 书目占位；图表均为合成示例 · 书目占位，非真实文献</a:t>
             </a:r>
             <a:endParaRPr lang="en-US" dirty="0"/>
           </a:p>
@@ -1423,14 +1423,14 @@
       </p:sp>
       <p:sp>
         <p:nvSpPr>
-          <p:cNvPr id="4" name="T43/kicker"/>
-          <p:cNvSpPr/>
-          <p:nvPr/>
-        </p:nvSpPr>
-        <p:spPr>
-          <a:xfrm>
-            <a:off x="457200" y="152400"/>
-            <a:ext cx="11277600" cy="190500"/>
+          <p:cNvPr id="4" name="T43/title"/>
+          <p:cNvSpPr/>
+          <p:nvPr/>
+        </p:nvSpPr>
+        <p:spPr>
+          <a:xfrm>
+            <a:off x="457200" y="209550"/>
+            <a:ext cx="11277600" cy="438150"/>
           </a:xfrm>
           <a:prstGeom prst="rect">
             <a:avLst/>
@@ -1444,54 +1444,12 @@
           <a:p>
             <a:pPr algn="l" indent="0" marL="0">
               <a:lnSpc>
-                <a:spcPts val="1320"/>
-              </a:lnSpc>
-              <a:buNone/>
-            </a:pPr>
-            <a:r>
-              <a:rPr lang="zh-CN" altLang="en-US" sz="1200" dirty="0">
-                <a:solidFill>
-                  <a:srgbClr val="515B68"/>
-                </a:solidFill>
-                <a:latin typeface="Noto Sans CJK SC" pitchFamily="34" charset="0"/>
-                <a:ea typeface="Noto Sans CJK SC" pitchFamily="34" charset="-122"/>
-                <a:cs typeface="Noto Sans CJK SC" pitchFamily="34" charset="-120"/>
-              </a:rPr>
-              <a:t>结构模板 / 占位说明与合成数据</a:t>
-            </a:r>
-            <a:endParaRPr lang="zh-CN" sz="1200" dirty="0"/>
-          </a:p>
-        </p:txBody>
-      </p:sp>
-      <p:sp>
-        <p:nvSpPr>
-          <p:cNvPr id="5" name="T43/title"/>
-          <p:cNvSpPr/>
-          <p:nvPr/>
-        </p:nvSpPr>
-        <p:spPr>
-          <a:xfrm>
-            <a:off x="457200" y="381000"/>
-            <a:ext cx="11277600" cy="400050"/>
-          </a:xfrm>
-          <a:prstGeom prst="rect">
-            <a:avLst/>
-          </a:prstGeom>
-          <a:noFill/>
-          <a:ln/>
-        </p:spPr>
-        <p:txBody>
-          <a:bodyPr wrap="none" lIns="0" tIns="0" rIns="0" bIns="0" rtlCol="0" anchor="t"/>
-          <a:lstStyle/>
-          <a:p>
-            <a:pPr algn="l" indent="0" marL="0">
-              <a:lnSpc>
-                <a:spcPts val="2856"/>
-              </a:lnSpc>
-              <a:buNone/>
-            </a:pPr>
-            <a:r>
-              <a:rPr lang="zh-CN" altLang="en-US" sz="2550" b="1" dirty="0">
+                <a:spcPts val="3360"/>
+              </a:lnSpc>
+              <a:buNone/>
+            </a:pPr>
+            <a:r>
+              <a:rPr lang="zh-CN" altLang="en-US" sz="3000" b="1" dirty="0">
                 <a:solidFill>
                   <a:srgbClr val="1C2430"/>
                 </a:solidFill>
@@ -1501,26 +1459,49 @@
               </a:rPr>
               <a:t>从证据缺口到可检验假设</a:t>
             </a:r>
-            <a:endParaRPr lang="zh-CN" sz="2550" dirty="0"/>
-          </a:p>
-        </p:txBody>
-      </p:sp>
-      <p:sp>
-        <p:nvSpPr>
-          <p:cNvPr id="6" name="T43/header-rule"/>
-          <p:cNvSpPr/>
-          <p:nvPr/>
-        </p:nvSpPr>
-        <p:spPr>
-          <a:xfrm>
-            <a:off x="457200" y="876300"/>
+            <a:endParaRPr lang="zh-CN" sz="3000" dirty="0"/>
+          </a:p>
+        </p:txBody>
+      </p:sp>
+      <p:sp>
+        <p:nvSpPr>
+          <p:cNvPr id="5" name="T43/header-rule"/>
+          <p:cNvSpPr/>
+          <p:nvPr/>
+        </p:nvSpPr>
+        <p:spPr>
+          <a:xfrm>
+            <a:off x="457200" y="752475"/>
             <a:ext cx="11277600" cy="0"/>
           </a:xfrm>
           <a:prstGeom prst="line">
             <a:avLst/>
           </a:prstGeom>
           <a:noFill/>
-          <a:ln w="11430">
+          <a:ln w="10478">
+            <a:solidFill>
+              <a:srgbClr val="BEC8D4"/>
+            </a:solidFill>
+            <a:prstDash val="solid"/>
+          </a:ln>
+        </p:spPr>
+      </p:sp>
+      <p:sp>
+        <p:nvSpPr>
+          <p:cNvPr id="6" name="T43/header-accent"/>
+          <p:cNvSpPr/>
+          <p:nvPr/>
+        </p:nvSpPr>
+        <p:spPr>
+          <a:xfrm>
+            <a:off x="457200" y="752475"/>
+            <a:ext cx="704850" cy="0"/>
+          </a:xfrm>
+          <a:prstGeom prst="line">
+            <a:avLst/>
+          </a:prstGeom>
+          <a:noFill/>
+          <a:ln w="28575">
             <a:solidFill>
               <a:srgbClr val="173C70"/>
             </a:solidFill>
@@ -1536,8 +1517,8 @@
         </p:nvSpPr>
         <p:spPr>
           <a:xfrm>
-            <a:off x="457200" y="1390650"/>
-            <a:ext cx="5486400" cy="1676400"/>
+            <a:off x="457200" y="1206722"/>
+            <a:ext cx="5486400" cy="1740884"/>
           </a:xfrm>
           <a:prstGeom prst="rect">
             <a:avLst/>
@@ -1561,14 +1542,14 @@
         </p:nvSpPr>
         <p:spPr>
           <a:xfrm>
-            <a:off x="466725" y="1400175"/>
+            <a:off x="466725" y="1216247"/>
             <a:ext cx="5467350" cy="371475"/>
           </a:xfrm>
           <a:prstGeom prst="rect">
             <a:avLst/>
           </a:prstGeom>
           <a:solidFill>
-            <a:srgbClr val="EEF3F8"/>
+            <a:srgbClr val="E9F4F0"/>
           </a:solidFill>
           <a:ln w="12700">
             <a:solidFill>
@@ -1588,7 +1569,7 @@
         </p:nvSpPr>
         <p:spPr>
           <a:xfrm>
-            <a:off x="457200" y="1771650"/>
+            <a:off x="457200" y="1587722"/>
             <a:ext cx="5486400" cy="0"/>
           </a:xfrm>
           <a:prstGeom prst="line">
@@ -1611,8 +1592,8 @@
         </p:nvSpPr>
         <p:spPr>
           <a:xfrm>
-            <a:off x="581025" y="1447800"/>
-            <a:ext cx="5238750" cy="276225"/>
+            <a:off x="581025" y="1254347"/>
+            <a:ext cx="5238750" cy="295275"/>
           </a:xfrm>
           <a:prstGeom prst="rect">
             <a:avLst/>
@@ -1626,14 +1607,14 @@
           <a:p>
             <a:pPr algn="l" indent="0" marL="0">
               <a:lnSpc>
-                <a:spcPts val="2070"/>
-              </a:lnSpc>
-              <a:buNone/>
-            </a:pPr>
-            <a:r>
-              <a:rPr lang="zh-CN" altLang="en-US" sz="1800" b="1" dirty="0">
-                <a:solidFill>
-                  <a:srgbClr val="173C70"/>
+                <a:spcPts val="2242"/>
+              </a:lnSpc>
+              <a:buNone/>
+            </a:pPr>
+            <a:r>
+              <a:rPr lang="zh-CN" altLang="en-US" sz="1950" b="1" dirty="0">
+                <a:solidFill>
+                  <a:srgbClr val="146C63"/>
                 </a:solidFill>
                 <a:latin typeface="Noto Sans CJK SC" pitchFamily="34" charset="0"/>
                 <a:ea typeface="Noto Sans CJK SC" pitchFamily="34" charset="-122"/>
@@ -1641,39 +1622,59 @@
               </a:rPr>
               <a:t>已有证据</a:t>
             </a:r>
+            <a:endParaRPr lang="zh-CN" sz="1950" dirty="0"/>
+          </a:p>
+        </p:txBody>
+      </p:sp>
+      <p:sp>
+        <p:nvSpPr>
+          <p:cNvPr id="11" name="T43/card/region-1/body"/>
+          <p:cNvSpPr/>
+          <p:nvPr/>
+        </p:nvSpPr>
+        <p:spPr>
+          <a:xfrm>
+            <a:off x="590550" y="1692497"/>
+            <a:ext cx="5219700" cy="1159859"/>
+          </a:xfrm>
+          <a:prstGeom prst="rect">
+            <a:avLst/>
+          </a:prstGeom>
+          <a:noFill/>
+          <a:ln/>
+        </p:spPr>
+        <p:txBody>
+          <a:bodyPr wrap="none" lIns="0" tIns="0" rIns="0" bIns="0" rtlCol="0" anchor="t"/>
+          <a:lstStyle/>
+          <a:p>
+            <a:pPr algn="l" indent="0" marL="0">
+              <a:lnSpc>
+                <a:spcPts val="2232"/>
+              </a:lnSpc>
+              <a:buNone/>
+            </a:pPr>
+            <a:r>
+              <a:rPr lang="zh-CN" altLang="en-US" sz="1800" dirty="0">
+                <a:solidFill>
+                  <a:srgbClr val="1C2430"/>
+                </a:solidFill>
+                <a:latin typeface="Noto Sans CJK SC" pitchFamily="34" charset="0"/>
+                <a:ea typeface="Noto Sans CJK SC" pitchFamily="34" charset="-122"/>
+                <a:cs typeface="Noto Sans CJK SC" pitchFamily="34" charset="-120"/>
+              </a:rPr>
+              <a:t>填写可追溯的已有发现</a:t>
+            </a:r>
             <a:endParaRPr lang="zh-CN" sz="1800" dirty="0"/>
           </a:p>
-        </p:txBody>
-      </p:sp>
-      <p:sp>
-        <p:nvSpPr>
-          <p:cNvPr id="11" name="T43/card/region-1/body"/>
-          <p:cNvSpPr/>
-          <p:nvPr/>
-        </p:nvSpPr>
-        <p:spPr>
-          <a:xfrm>
-            <a:off x="590550" y="1885950"/>
-            <a:ext cx="5219700" cy="1085850"/>
-          </a:xfrm>
-          <a:prstGeom prst="rect">
-            <a:avLst/>
-          </a:prstGeom>
-          <a:noFill/>
-          <a:ln/>
-        </p:spPr>
-        <p:txBody>
-          <a:bodyPr wrap="none" lIns="0" tIns="0" rIns="0" bIns="0" rtlCol="0" anchor="t"/>
-          <a:lstStyle/>
-          <a:p>
-            <a:pPr algn="l" indent="0" marL="0">
-              <a:lnSpc>
-                <a:spcPts val="2139"/>
-              </a:lnSpc>
-              <a:buNone/>
-            </a:pPr>
-            <a:r>
-              <a:rPr lang="zh-CN" altLang="en-US" sz="1725" dirty="0">
+          <a:p>
+            <a:pPr algn="l" indent="0" marL="0">
+              <a:lnSpc>
+                <a:spcPts val="2232"/>
+              </a:lnSpc>
+              <a:buNone/>
+            </a:pPr>
+            <a:r>
+              <a:rPr lang="zh-CN" altLang="en-US" sz="1800" dirty="0">
                 <a:solidFill>
                   <a:srgbClr val="1C2430"/>
                 </a:solidFill>
@@ -1681,29 +1682,9 @@
                 <a:ea typeface="Noto Sans CJK SC" pitchFamily="34" charset="-122"/>
                 <a:cs typeface="Noto Sans CJK SC" pitchFamily="34" charset="-120"/>
               </a:rPr>
-              <a:t>填写可追溯的已有发现</a:t>
-            </a:r>
-            <a:endParaRPr lang="zh-CN" sz="1725" dirty="0"/>
-          </a:p>
-          <a:p>
-            <a:pPr algn="l" indent="0" marL="0">
-              <a:lnSpc>
-                <a:spcPts val="2139"/>
-              </a:lnSpc>
-              <a:buNone/>
-            </a:pPr>
-            <a:r>
-              <a:rPr lang="zh-CN" altLang="en-US" sz="1725" dirty="0">
-                <a:solidFill>
-                  <a:srgbClr val="1C2430"/>
-                </a:solidFill>
-                <a:latin typeface="Noto Sans CJK SC" pitchFamily="34" charset="0"/>
-                <a:ea typeface="Noto Sans CJK SC" pitchFamily="34" charset="-122"/>
-                <a:cs typeface="Noto Sans CJK SC" pitchFamily="34" charset="-120"/>
-              </a:rPr>
               <a:t>指出效应与验证范围</a:t>
             </a:r>
-            <a:endParaRPr lang="zh-CN" sz="1725" dirty="0"/>
+            <a:endParaRPr lang="zh-CN" sz="1800" dirty="0"/>
           </a:p>
         </p:txBody>
       </p:sp>
@@ -1715,8 +1696,8 @@
         </p:nvSpPr>
         <p:spPr>
           <a:xfrm>
-            <a:off x="6248400" y="1504950"/>
-            <a:ext cx="5486400" cy="1562100"/>
+            <a:off x="6248400" y="1321022"/>
+            <a:ext cx="5486400" cy="1626584"/>
           </a:xfrm>
           <a:prstGeom prst="rect">
             <a:avLst/>
@@ -1740,8 +1721,8 @@
         </p:nvSpPr>
         <p:spPr>
           <a:xfrm>
-            <a:off x="6362700" y="1390650"/>
-            <a:ext cx="1181100" cy="320040"/>
+            <a:off x="6362700" y="1206722"/>
+            <a:ext cx="1257300" cy="342900"/>
           </a:xfrm>
           <a:prstGeom prst="rect">
             <a:avLst/>
@@ -1767,8 +1748,8 @@
         </p:nvSpPr>
         <p:spPr>
           <a:xfrm>
-            <a:off x="6467475" y="1419225"/>
-            <a:ext cx="971550" cy="262890"/>
+            <a:off x="6467475" y="1235297"/>
+            <a:ext cx="1047750" cy="285750"/>
           </a:xfrm>
           <a:prstGeom prst="rect">
             <a:avLst/>
@@ -1782,12 +1763,12 @@
           <a:p>
             <a:pPr algn="l" indent="0" marL="0">
               <a:lnSpc>
-                <a:spcPts val="2070"/>
-              </a:lnSpc>
-              <a:buNone/>
-            </a:pPr>
-            <a:r>
-              <a:rPr lang="zh-CN" altLang="en-US" sz="1800" b="1" dirty="0">
+                <a:spcPts val="2242"/>
+              </a:lnSpc>
+              <a:buNone/>
+            </a:pPr>
+            <a:r>
+              <a:rPr lang="zh-CN" altLang="en-US" sz="1950" b="1" dirty="0">
                 <a:solidFill>
                   <a:srgbClr val="FFFFFF"/>
                 </a:solidFill>
@@ -1797,20 +1778,203 @@
               </a:rPr>
               <a:t>尚存缺口</a:t>
             </a:r>
+            <a:endParaRPr lang="zh-CN" sz="1950" dirty="0"/>
+          </a:p>
+        </p:txBody>
+      </p:sp>
+      <p:sp>
+        <p:nvSpPr>
+          <p:cNvPr id="15" name="T43/card/region-2/body"/>
+          <p:cNvSpPr/>
+          <p:nvPr/>
+        </p:nvSpPr>
+        <p:spPr>
+          <a:xfrm>
+            <a:off x="6381750" y="1692497"/>
+            <a:ext cx="5219700" cy="1159859"/>
+          </a:xfrm>
+          <a:prstGeom prst="rect">
+            <a:avLst/>
+          </a:prstGeom>
+          <a:noFill/>
+          <a:ln/>
+        </p:spPr>
+        <p:txBody>
+          <a:bodyPr wrap="none" lIns="0" tIns="0" rIns="0" bIns="0" rtlCol="0" anchor="t"/>
+          <a:lstStyle/>
+          <a:p>
+            <a:pPr algn="l" indent="0" marL="0">
+              <a:lnSpc>
+                <a:spcPts val="2232"/>
+              </a:lnSpc>
+              <a:buNone/>
+            </a:pPr>
+            <a:r>
+              <a:rPr lang="zh-CN" altLang="en-US" sz="1800" dirty="0">
+                <a:solidFill>
+                  <a:srgbClr val="1C2430"/>
+                </a:solidFill>
+                <a:latin typeface="Noto Sans CJK SC" pitchFamily="34" charset="0"/>
+                <a:ea typeface="Noto Sans CJK SC" pitchFamily="34" charset="-122"/>
+                <a:cs typeface="Noto Sans CJK SC" pitchFamily="34" charset="-120"/>
+              </a:rPr>
+              <a:t>将缺少的证据写成具体问题</a:t>
+            </a:r>
             <a:endParaRPr lang="zh-CN" sz="1800" dirty="0"/>
           </a:p>
-        </p:txBody>
-      </p:sp>
-      <p:sp>
-        <p:nvSpPr>
-          <p:cNvPr id="15" name="T43/card/region-2/body"/>
-          <p:cNvSpPr/>
-          <p:nvPr/>
-        </p:nvSpPr>
-        <p:spPr>
-          <a:xfrm>
-            <a:off x="6381750" y="1853565"/>
-            <a:ext cx="5219700" cy="1118235"/>
+          <a:p>
+            <a:pPr algn="l" indent="0" marL="0">
+              <a:lnSpc>
+                <a:spcPts val="2232"/>
+              </a:lnSpc>
+              <a:buNone/>
+            </a:pPr>
+            <a:r>
+              <a:rPr lang="zh-CN" altLang="en-US" sz="1800" dirty="0">
+                <a:solidFill>
+                  <a:srgbClr val="1C2430"/>
+                </a:solidFill>
+                <a:latin typeface="Noto Sans CJK SC" pitchFamily="34" charset="0"/>
+                <a:ea typeface="Noto Sans CJK SC" pitchFamily="34" charset="-122"/>
+                <a:cs typeface="Noto Sans CJK SC" pitchFamily="34" charset="-120"/>
+              </a:rPr>
+              <a:t>区分未知机制与未测环境</a:t>
+            </a:r>
+            <a:endParaRPr lang="zh-CN" sz="1800" dirty="0"/>
+          </a:p>
+        </p:txBody>
+      </p:sp>
+      <p:sp>
+        <p:nvSpPr>
+          <p:cNvPr id="16" name="T43/card/region-3/frame"/>
+          <p:cNvSpPr/>
+          <p:nvPr/>
+        </p:nvSpPr>
+        <p:spPr>
+          <a:xfrm>
+            <a:off x="457200" y="3283934"/>
+            <a:ext cx="3467100" cy="2730056"/>
+          </a:xfrm>
+          <a:prstGeom prst="rect">
+            <a:avLst/>
+          </a:prstGeom>
+          <a:solidFill>
+            <a:srgbClr val="F2EDF7"/>
+          </a:solidFill>
+          <a:ln w="12383">
+            <a:solidFill>
+              <a:srgbClr val="6C528E"/>
+            </a:solidFill>
+            <a:prstDash val="dash"/>
+          </a:ln>
+        </p:spPr>
+      </p:sp>
+      <p:sp>
+        <p:nvSpPr>
+          <p:cNvPr id="17" name="T43/card/region-3/corner-white"/>
+          <p:cNvSpPr/>
+          <p:nvPr/>
+        </p:nvSpPr>
+        <p:spPr>
+          <a:xfrm>
+            <a:off x="3657600" y="3283934"/>
+            <a:ext cx="266700" cy="266700"/>
+          </a:xfrm>
+          <a:prstGeom prst="rect">
+            <a:avLst/>
+          </a:prstGeom>
+          <a:solidFill>
+            <a:srgbClr val="FFFFFF"/>
+          </a:solidFill>
+          <a:ln w="12700">
+            <a:solidFill>
+              <a:srgbClr val="FFFFFF">
+                <a:alpha val="0"/>
+              </a:srgbClr>
+            </a:solidFill>
+            <a:prstDash val="solid"/>
+          </a:ln>
+        </p:spPr>
+      </p:sp>
+      <p:sp>
+        <p:nvSpPr>
+          <p:cNvPr id="18" name="T43/card/region-3/fold-diagonal"/>
+          <p:cNvSpPr/>
+          <p:nvPr/>
+        </p:nvSpPr>
+        <p:spPr>
+          <a:xfrm>
+            <a:off x="3657600" y="3283934"/>
+            <a:ext cx="266700" cy="266700"/>
+          </a:xfrm>
+          <a:prstGeom prst="line">
+            <a:avLst/>
+          </a:prstGeom>
+          <a:noFill/>
+          <a:ln w="13335">
+            <a:solidFill>
+              <a:srgbClr val="6C528E"/>
+            </a:solidFill>
+            <a:prstDash val="solid"/>
+          </a:ln>
+        </p:spPr>
+      </p:sp>
+      <p:sp>
+        <p:nvSpPr>
+          <p:cNvPr id="19" name="T43/card/region-3/fold-left"/>
+          <p:cNvSpPr/>
+          <p:nvPr/>
+        </p:nvSpPr>
+        <p:spPr>
+          <a:xfrm>
+            <a:off x="3657600" y="3283934"/>
+            <a:ext cx="0" cy="266700"/>
+          </a:xfrm>
+          <a:prstGeom prst="line">
+            <a:avLst/>
+          </a:prstGeom>
+          <a:noFill/>
+          <a:ln w="13335">
+            <a:solidFill>
+              <a:srgbClr val="6C528E"/>
+            </a:solidFill>
+            <a:prstDash val="solid"/>
+          </a:ln>
+        </p:spPr>
+      </p:sp>
+      <p:sp>
+        <p:nvSpPr>
+          <p:cNvPr id="20" name="T43/card/region-3/fold-bottom"/>
+          <p:cNvSpPr/>
+          <p:nvPr/>
+        </p:nvSpPr>
+        <p:spPr>
+          <a:xfrm>
+            <a:off x="3657600" y="3550634"/>
+            <a:ext cx="266700" cy="0"/>
+          </a:xfrm>
+          <a:prstGeom prst="line">
+            <a:avLst/>
+          </a:prstGeom>
+          <a:noFill/>
+          <a:ln w="13335">
+            <a:solidFill>
+              <a:srgbClr val="6C528E"/>
+            </a:solidFill>
+            <a:prstDash val="solid"/>
+          </a:ln>
+        </p:spPr>
+      </p:sp>
+      <p:sp>
+        <p:nvSpPr>
+          <p:cNvPr id="21" name="T43/card/region-3/title"/>
+          <p:cNvSpPr/>
+          <p:nvPr/>
+        </p:nvSpPr>
+        <p:spPr>
+          <a:xfrm>
+            <a:off x="647700" y="3445859"/>
+            <a:ext cx="2895600" cy="361950"/>
           </a:xfrm>
           <a:prstGeom prst="rect">
             <a:avLst/>
@@ -1824,12 +1988,54 @@
           <a:p>
             <a:pPr algn="l" indent="0" marL="0">
               <a:lnSpc>
-                <a:spcPts val="2139"/>
-              </a:lnSpc>
-              <a:buNone/>
-            </a:pPr>
-            <a:r>
-              <a:rPr lang="zh-CN" altLang="en-US" sz="1725" dirty="0">
+                <a:spcPts val="2242"/>
+              </a:lnSpc>
+              <a:buNone/>
+            </a:pPr>
+            <a:r>
+              <a:rPr lang="zh-CN" altLang="en-US" sz="1950" b="1" dirty="0">
+                <a:solidFill>
+                  <a:srgbClr val="6C528E"/>
+                </a:solidFill>
+                <a:latin typeface="Noto Sans CJK SC" pitchFamily="34" charset="0"/>
+                <a:ea typeface="Noto Sans CJK SC" pitchFamily="34" charset="-122"/>
+                <a:cs typeface="Noto Sans CJK SC" pitchFamily="34" charset="-120"/>
+              </a:rPr>
+              <a:t>研究假设</a:t>
+            </a:r>
+            <a:endParaRPr lang="zh-CN" sz="1950" dirty="0"/>
+          </a:p>
+        </p:txBody>
+      </p:sp>
+      <p:sp>
+        <p:nvSpPr>
+          <p:cNvPr id="22" name="T43/card/region-3/body"/>
+          <p:cNvSpPr/>
+          <p:nvPr/>
+        </p:nvSpPr>
+        <p:spPr>
+          <a:xfrm>
+            <a:off x="647700" y="3903059"/>
+            <a:ext cx="3086100" cy="1920431"/>
+          </a:xfrm>
+          <a:prstGeom prst="rect">
+            <a:avLst/>
+          </a:prstGeom>
+          <a:noFill/>
+          <a:ln/>
+        </p:spPr>
+        <p:txBody>
+          <a:bodyPr wrap="none" lIns="0" tIns="0" rIns="0" bIns="0" rtlCol="0" anchor="t"/>
+          <a:lstStyle/>
+          <a:p>
+            <a:pPr algn="l" indent="0" marL="0">
+              <a:lnSpc>
+                <a:spcPts val="2232"/>
+              </a:lnSpc>
+              <a:buNone/>
+            </a:pPr>
+            <a:r>
+              <a:rPr lang="zh-CN" altLang="en-US" sz="1800" dirty="0">
                 <a:solidFill>
                   <a:srgbClr val="1C2430"/>
                 </a:solidFill>
@@ -1837,19 +2043,19 @@
                 <a:ea typeface="Noto Sans CJK SC" pitchFamily="34" charset="-122"/>
                 <a:cs typeface="Noto Sans CJK SC" pitchFamily="34" charset="-120"/>
               </a:rPr>
-              <a:t>将缺少的证据写成具体问题</a:t>
-            </a:r>
-            <a:endParaRPr lang="zh-CN" sz="1725" dirty="0"/>
-          </a:p>
-          <a:p>
-            <a:pPr algn="l" indent="0" marL="0">
-              <a:lnSpc>
-                <a:spcPts val="2139"/>
-              </a:lnSpc>
-              <a:buNone/>
-            </a:pPr>
-            <a:r>
-              <a:rPr lang="zh-CN" altLang="en-US" sz="1725" dirty="0">
+              <a:t>改变一个明确的机制或接口</a:t>
+            </a:r>
+            <a:endParaRPr lang="zh-CN" sz="1800" dirty="0"/>
+          </a:p>
+          <a:p>
+            <a:pPr algn="l" indent="0" marL="0">
+              <a:lnSpc>
+                <a:spcPts val="2232"/>
+              </a:lnSpc>
+              <a:buNone/>
+            </a:pPr>
+            <a:r>
+              <a:rPr lang="zh-CN" altLang="en-US" sz="1800" dirty="0">
                 <a:solidFill>
                   <a:srgbClr val="1C2430"/>
                 </a:solidFill>
@@ -1857,22 +2063,42 @@
                 <a:ea typeface="Noto Sans CJK SC" pitchFamily="34" charset="-122"/>
                 <a:cs typeface="Noto Sans CJK SC" pitchFamily="34" charset="-120"/>
               </a:rPr>
-              <a:t>区分未知机制与未测环境</a:t>
-            </a:r>
-            <a:endParaRPr lang="zh-CN" sz="1725" dirty="0"/>
-          </a:p>
-        </p:txBody>
-      </p:sp>
-      <p:sp>
-        <p:nvSpPr>
-          <p:cNvPr id="16" name="T43/card/region-3/frame"/>
-          <p:cNvSpPr/>
-          <p:nvPr/>
-        </p:nvSpPr>
-        <p:spPr>
-          <a:xfrm>
-            <a:off x="457200" y="3552825"/>
-            <a:ext cx="3467100" cy="2466975"/>
+              <a:t>预期哪个指标发生什么变化</a:t>
+            </a:r>
+            <a:endParaRPr lang="zh-CN" sz="1800" dirty="0"/>
+          </a:p>
+          <a:p>
+            <a:pPr algn="l" indent="0" marL="0">
+              <a:lnSpc>
+                <a:spcPts val="2232"/>
+              </a:lnSpc>
+              <a:buNone/>
+            </a:pPr>
+            <a:r>
+              <a:rPr lang="zh-CN" altLang="en-US" sz="1800" dirty="0">
+                <a:solidFill>
+                  <a:srgbClr val="1C2430"/>
+                </a:solidFill>
+                <a:latin typeface="Noto Sans CJK SC" pitchFamily="34" charset="0"/>
+                <a:ea typeface="Noto Sans CJK SC" pitchFamily="34" charset="-122"/>
+                <a:cs typeface="Noto Sans CJK SC" pitchFamily="34" charset="-120"/>
+              </a:rPr>
+              <a:t>哪种观察会使假说不获支持</a:t>
+            </a:r>
+            <a:endParaRPr lang="zh-CN" sz="1800" dirty="0"/>
+          </a:p>
+        </p:txBody>
+      </p:sp>
+      <p:sp>
+        <p:nvSpPr>
+          <p:cNvPr id="23" name="T43/card/region-4/frame"/>
+          <p:cNvSpPr/>
+          <p:nvPr/>
+        </p:nvSpPr>
+        <p:spPr>
+          <a:xfrm>
+            <a:off x="4210050" y="3445859"/>
+            <a:ext cx="3467100" cy="2568131"/>
           </a:xfrm>
           <a:prstGeom prst="rect">
             <a:avLst/>
@@ -1882,21 +2108,21 @@
           </a:solidFill>
           <a:ln w="14288">
             <a:solidFill>
-              <a:srgbClr val="355D88"/>
-            </a:solidFill>
-            <a:prstDash val="solid"/>
-          </a:ln>
-        </p:spPr>
-      </p:sp>
-      <p:sp>
-        <p:nvSpPr>
-          <p:cNvPr id="17" name="T43/card/region-3/title-cutout"/>
-          <p:cNvSpPr/>
-          <p:nvPr/>
-        </p:nvSpPr>
-        <p:spPr>
-          <a:xfrm>
-            <a:off x="590550" y="3400425"/>
+              <a:srgbClr val="235E96"/>
+            </a:solidFill>
+            <a:prstDash val="solid"/>
+          </a:ln>
+        </p:spPr>
+      </p:sp>
+      <p:sp>
+        <p:nvSpPr>
+          <p:cNvPr id="24" name="T43/card/region-4/title-cutout"/>
+          <p:cNvSpPr/>
+          <p:nvPr/>
+        </p:nvSpPr>
+        <p:spPr>
+          <a:xfrm>
+            <a:off x="4343400" y="3293459"/>
             <a:ext cx="1085850" cy="323850"/>
           </a:xfrm>
           <a:prstGeom prst="rect">
@@ -1917,13 +2143,13 @@
       </p:sp>
       <p:sp>
         <p:nvSpPr>
-          <p:cNvPr id="18" name="T43/card/region-3/base-rule"/>
-          <p:cNvSpPr/>
-          <p:nvPr/>
-        </p:nvSpPr>
-        <p:spPr>
-          <a:xfrm>
-            <a:off x="647700" y="5867400"/>
+          <p:cNvPr id="25" name="T43/card/region-4/base-rule"/>
+          <p:cNvSpPr/>
+          <p:nvPr/>
+        </p:nvSpPr>
+        <p:spPr>
+          <a:xfrm>
+            <a:off x="4400550" y="5861590"/>
             <a:ext cx="333375" cy="0"/>
           </a:xfrm>
           <a:prstGeom prst="line">
@@ -1932,21 +2158,21 @@
           <a:noFill/>
           <a:ln w="28575">
             <a:solidFill>
-              <a:srgbClr val="355D88"/>
-            </a:solidFill>
-            <a:prstDash val="solid"/>
-          </a:ln>
-        </p:spPr>
-      </p:sp>
-      <p:sp>
-        <p:nvSpPr>
-          <p:cNvPr id="19" name="T43/card/region-3/title"/>
-          <p:cNvSpPr/>
-          <p:nvPr/>
-        </p:nvSpPr>
-        <p:spPr>
-          <a:xfrm>
-            <a:off x="647700" y="3409950"/>
+              <a:srgbClr val="235E96"/>
+            </a:solidFill>
+            <a:prstDash val="solid"/>
+          </a:ln>
+        </p:spPr>
+      </p:sp>
+      <p:sp>
+        <p:nvSpPr>
+          <p:cNvPr id="26" name="T43/card/region-4/title"/>
+          <p:cNvSpPr/>
+          <p:nvPr/>
+        </p:nvSpPr>
+        <p:spPr>
+          <a:xfrm>
+            <a:off x="4400550" y="3302984"/>
             <a:ext cx="3086100" cy="361950"/>
           </a:xfrm>
           <a:prstGeom prst="rect">
@@ -1961,20 +2187,136 @@
           <a:p>
             <a:pPr algn="l" indent="0" marL="0">
               <a:lnSpc>
-                <a:spcPts val="2070"/>
+                <a:spcPts val="2242"/>
+              </a:lnSpc>
+              <a:buNone/>
+            </a:pPr>
+            <a:r>
+              <a:rPr lang="zh-CN" altLang="en-US" sz="1950" b="1" dirty="0">
+                <a:solidFill>
+                  <a:srgbClr val="235E96"/>
+                </a:solidFill>
+                <a:latin typeface="Noto Sans CJK SC" pitchFamily="34" charset="0"/>
+                <a:ea typeface="Noto Sans CJK SC" pitchFamily="34" charset="-122"/>
+                <a:cs typeface="Noto Sans CJK SC" pitchFamily="34" charset="-120"/>
+              </a:rPr>
+              <a:t>实验对照</a:t>
+            </a:r>
+            <a:endParaRPr lang="zh-CN" sz="1950" dirty="0"/>
+          </a:p>
+        </p:txBody>
+      </p:sp>
+      <p:sp>
+        <p:nvSpPr>
+          <p:cNvPr id="27" name="T43/card/region-4/body"/>
+          <p:cNvSpPr/>
+          <p:nvPr/>
+        </p:nvSpPr>
+        <p:spPr>
+          <a:xfrm>
+            <a:off x="4400550" y="3836384"/>
+            <a:ext cx="3086100" cy="1987106"/>
+          </a:xfrm>
+          <a:prstGeom prst="rect">
+            <a:avLst/>
+          </a:prstGeom>
+          <a:noFill/>
+          <a:ln/>
+        </p:spPr>
+        <p:txBody>
+          <a:bodyPr wrap="none" lIns="0" tIns="0" rIns="0" bIns="0" rtlCol="0" anchor="t"/>
+          <a:lstStyle/>
+          <a:p>
+            <a:pPr algn="l" indent="0" marL="0">
+              <a:lnSpc>
+                <a:spcPts val="2232"/>
+              </a:lnSpc>
+              <a:buNone/>
+            </a:pPr>
+            <a:r>
+              <a:rPr lang="zh-CN" altLang="en-US" sz="1800" dirty="0">
+                <a:solidFill>
+                  <a:srgbClr val="1C2430"/>
+                </a:solidFill>
+                <a:latin typeface="Noto Sans CJK SC" pitchFamily="34" charset="0"/>
+                <a:ea typeface="Noto Sans CJK SC" pitchFamily="34" charset="-122"/>
+                <a:cs typeface="Noto Sans CJK SC" pitchFamily="34" charset="-120"/>
+              </a:rPr>
+              <a:t>冻结其余信息与工具预算</a:t>
+            </a:r>
+            <a:endParaRPr lang="zh-CN" sz="1800" dirty="0"/>
+          </a:p>
+          <a:p>
+            <a:pPr algn="l" indent="0" marL="0">
+              <a:lnSpc>
+                <a:spcPts val="2232"/>
+              </a:lnSpc>
+              <a:buNone/>
+            </a:pPr>
+            <a:r>
+              <a:rPr lang="zh-CN" altLang="en-US" sz="1800" dirty="0">
+                <a:solidFill>
+                  <a:srgbClr val="1C2430"/>
+                </a:solidFill>
+                <a:latin typeface="Noto Sans CJK SC" pitchFamily="34" charset="0"/>
+                <a:ea typeface="Noto Sans CJK SC" pitchFamily="34" charset="-122"/>
+                <a:cs typeface="Noto Sans CJK SC" pitchFamily="34" charset="-120"/>
+              </a:rPr>
+              <a:t>设置基线、干预和必要消融</a:t>
+            </a:r>
+            <a:endParaRPr lang="zh-CN" sz="1800" dirty="0"/>
+          </a:p>
+          <a:p>
+            <a:pPr algn="l" indent="0" marL="0">
+              <a:lnSpc>
+                <a:spcPts val="2232"/>
+              </a:lnSpc>
+              <a:buNone/>
+            </a:pPr>
+            <a:r>
+              <a:rPr lang="zh-CN" altLang="en-US" sz="1800" dirty="0">
+                <a:solidFill>
+                  <a:srgbClr val="1C2430"/>
+                </a:solidFill>
+                <a:latin typeface="Noto Sans CJK SC" pitchFamily="34" charset="0"/>
+                <a:ea typeface="Noto Sans CJK SC" pitchFamily="34" charset="-122"/>
+                <a:cs typeface="Noto Sans CJK SC" pitchFamily="34" charset="-120"/>
+              </a:rPr>
+              <a:t>保证</a:t>
+            </a:r>
+            <a:pPr algn="l" indent="0" marL="0">
+              <a:lnSpc>
+                <a:spcPts val="2232"/>
               </a:lnSpc>
               <a:buNone/>
             </a:pPr>
             <a:r>
               <a:rPr lang="zh-CN" altLang="en-US" sz="1800" b="1" dirty="0">
                 <a:solidFill>
-                  <a:srgbClr val="355D88"/>
-                </a:solidFill>
-                <a:latin typeface="Noto Sans CJK SC" pitchFamily="34" charset="0"/>
-                <a:ea typeface="Noto Sans CJK SC" pitchFamily="34" charset="-122"/>
-                <a:cs typeface="Noto Sans CJK SC" pitchFamily="34" charset="-120"/>
-              </a:rPr>
-              <a:t>研究假设</a:t>
+                  <a:srgbClr val="235E96"/>
+                </a:solidFill>
+                <a:latin typeface="Noto Sans CJK SC" pitchFamily="34" charset="0"/>
+                <a:ea typeface="Noto Sans CJK SC" pitchFamily="34" charset="-122"/>
+                <a:cs typeface="Noto Sans CJK SC" pitchFamily="34" charset="-120"/>
+              </a:rPr>
+              <a:t>同一评价</a:t>
+            </a:r>
+            <a:pPr algn="l" indent="0" marL="0">
+              <a:lnSpc>
+                <a:spcPts val="2232"/>
+              </a:lnSpc>
+              <a:buNone/>
+            </a:pPr>
+            <a:r>
+              <a:rPr lang="zh-CN" altLang="en-US" sz="1800" dirty="0">
+                <a:solidFill>
+                  <a:srgbClr val="1C2430"/>
+                </a:solidFill>
+                <a:latin typeface="Noto Sans CJK SC" pitchFamily="34" charset="0"/>
+                <a:ea typeface="Noto Sans CJK SC" pitchFamily="34" charset="-122"/>
+                <a:cs typeface="Noto Sans CJK SC" pitchFamily="34" charset="-120"/>
+              </a:rPr>
+              <a:t>和留出条件</a:t>
             </a:r>
             <a:endParaRPr lang="zh-CN" sz="1800" dirty="0"/>
           </a:p>
@@ -1982,14 +2324,89 @@
       </p:sp>
       <p:sp>
         <p:nvSpPr>
-          <p:cNvPr id="20" name="T43/card/region-3/body"/>
-          <p:cNvSpPr/>
-          <p:nvPr/>
-        </p:nvSpPr>
-        <p:spPr>
-          <a:xfrm>
-            <a:off x="647700" y="3943350"/>
-            <a:ext cx="3086100" cy="1885950"/>
+          <p:cNvPr id="28" name="T43/card/region-5/frame"/>
+          <p:cNvSpPr/>
+          <p:nvPr/>
+        </p:nvSpPr>
+        <p:spPr>
+          <a:xfrm>
+            <a:off x="7962900" y="3283934"/>
+            <a:ext cx="3771900" cy="2730056"/>
+          </a:xfrm>
+          <a:prstGeom prst="rect">
+            <a:avLst/>
+          </a:prstGeom>
+          <a:solidFill>
+            <a:srgbClr val="FFFFFF"/>
+          </a:solidFill>
+          <a:ln w="9525">
+            <a:solidFill>
+              <a:srgbClr val="BEC8D4"/>
+            </a:solidFill>
+            <a:prstDash val="solid"/>
+          </a:ln>
+        </p:spPr>
+      </p:sp>
+      <p:sp>
+        <p:nvSpPr>
+          <p:cNvPr id="29" name="T43/card/region-5/ledger-accent"/>
+          <p:cNvSpPr/>
+          <p:nvPr/>
+        </p:nvSpPr>
+        <p:spPr>
+          <a:xfrm>
+            <a:off x="7962900" y="3283934"/>
+            <a:ext cx="57150" cy="2730056"/>
+          </a:xfrm>
+          <a:prstGeom prst="rect">
+            <a:avLst/>
+          </a:prstGeom>
+          <a:solidFill>
+            <a:srgbClr val="A24736"/>
+          </a:solidFill>
+          <a:ln w="12700">
+            <a:solidFill>
+              <a:srgbClr val="FFFFFF">
+                <a:alpha val="0"/>
+              </a:srgbClr>
+            </a:solidFill>
+            <a:prstDash val="solid"/>
+          </a:ln>
+        </p:spPr>
+      </p:sp>
+      <p:sp>
+        <p:nvSpPr>
+          <p:cNvPr id="30" name="T43/card/region-5/ledger-rule"/>
+          <p:cNvSpPr/>
+          <p:nvPr/>
+        </p:nvSpPr>
+        <p:spPr>
+          <a:xfrm>
+            <a:off x="8153400" y="3826859"/>
+            <a:ext cx="3390900" cy="0"/>
+          </a:xfrm>
+          <a:prstGeom prst="line">
+            <a:avLst/>
+          </a:prstGeom>
+          <a:noFill/>
+          <a:ln w="13335">
+            <a:solidFill>
+              <a:srgbClr val="BEC8D4"/>
+            </a:solidFill>
+            <a:prstDash val="solid"/>
+          </a:ln>
+        </p:spPr>
+      </p:sp>
+      <p:sp>
+        <p:nvSpPr>
+          <p:cNvPr id="31" name="T43/card/region-5/title"/>
+          <p:cNvSpPr/>
+          <p:nvPr/>
+        </p:nvSpPr>
+        <p:spPr>
+          <a:xfrm>
+            <a:off x="8153400" y="3445859"/>
+            <a:ext cx="3390900" cy="361950"/>
           </a:xfrm>
           <a:prstGeom prst="rect">
             <a:avLst/>
@@ -2003,12 +2420,54 @@
           <a:p>
             <a:pPr algn="l" indent="0" marL="0">
               <a:lnSpc>
-                <a:spcPts val="2178"/>
-              </a:lnSpc>
-              <a:buNone/>
-            </a:pPr>
-            <a:r>
-              <a:rPr lang="zh-CN" altLang="en-US" sz="1650" dirty="0">
+                <a:spcPts val="2242"/>
+              </a:lnSpc>
+              <a:buNone/>
+            </a:pPr>
+            <a:r>
+              <a:rPr lang="zh-CN" altLang="en-US" sz="1950" b="1" dirty="0">
+                <a:solidFill>
+                  <a:srgbClr val="A24736"/>
+                </a:solidFill>
+                <a:latin typeface="Noto Sans CJK SC" pitchFamily="34" charset="0"/>
+                <a:ea typeface="Noto Sans CJK SC" pitchFamily="34" charset="-122"/>
+                <a:cs typeface="Noto Sans CJK SC" pitchFamily="34" charset="-120"/>
+              </a:rPr>
+              <a:t>评价与反证</a:t>
+            </a:r>
+            <a:endParaRPr lang="zh-CN" sz="1950" dirty="0"/>
+          </a:p>
+        </p:txBody>
+      </p:sp>
+      <p:sp>
+        <p:nvSpPr>
+          <p:cNvPr id="32" name="T43/card/region-5/body"/>
+          <p:cNvSpPr/>
+          <p:nvPr/>
+        </p:nvSpPr>
+        <p:spPr>
+          <a:xfrm>
+            <a:off x="8153400" y="3969734"/>
+            <a:ext cx="3390900" cy="1853756"/>
+          </a:xfrm>
+          <a:prstGeom prst="rect">
+            <a:avLst/>
+          </a:prstGeom>
+          <a:noFill/>
+          <a:ln/>
+        </p:spPr>
+        <p:txBody>
+          <a:bodyPr wrap="none" lIns="0" tIns="0" rIns="0" bIns="0" rtlCol="0" anchor="t"/>
+          <a:lstStyle/>
+          <a:p>
+            <a:pPr algn="l" indent="0" marL="0">
+              <a:lnSpc>
+                <a:spcPts val="2232"/>
+              </a:lnSpc>
+              <a:buNone/>
+            </a:pPr>
+            <a:r>
+              <a:rPr lang="zh-CN" altLang="en-US" sz="1800" dirty="0">
                 <a:solidFill>
                   <a:srgbClr val="1C2430"/>
                 </a:solidFill>
@@ -2016,19 +2475,33 @@
                 <a:ea typeface="Noto Sans CJK SC" pitchFamily="34" charset="-122"/>
                 <a:cs typeface="Noto Sans CJK SC" pitchFamily="34" charset="-120"/>
               </a:rPr>
-              <a:t>改变一个明确的机制或接口</a:t>
-            </a:r>
-            <a:endParaRPr lang="zh-CN" sz="1650" dirty="0"/>
-          </a:p>
-          <a:p>
-            <a:pPr algn="l" indent="0" marL="0">
-              <a:lnSpc>
-                <a:spcPts val="2178"/>
-              </a:lnSpc>
-              <a:buNone/>
-            </a:pPr>
-            <a:r>
-              <a:rPr lang="zh-CN" altLang="en-US" sz="1650" dirty="0">
+              <a:t>预先定义</a:t>
+            </a:r>
+            <a:pPr algn="l" indent="0" marL="0">
+              <a:lnSpc>
+                <a:spcPts val="2232"/>
+              </a:lnSpc>
+              <a:buNone/>
+            </a:pPr>
+            <a:r>
+              <a:rPr lang="zh-CN" altLang="en-US" sz="1800" b="1" dirty="0">
+                <a:solidFill>
+                  <a:srgbClr val="A24736"/>
+                </a:solidFill>
+                <a:latin typeface="Noto Sans CJK SC" pitchFamily="34" charset="0"/>
+                <a:ea typeface="Noto Sans CJK SC" pitchFamily="34" charset="-122"/>
+                <a:cs typeface="Noto Sans CJK SC" pitchFamily="34" charset="-120"/>
+              </a:rPr>
+              <a:t>主要终点</a:t>
+            </a:r>
+            <a:pPr algn="l" indent="0" marL="0">
+              <a:lnSpc>
+                <a:spcPts val="2232"/>
+              </a:lnSpc>
+              <a:buNone/>
+            </a:pPr>
+            <a:r>
+              <a:rPr lang="zh-CN" altLang="en-US" sz="1800" dirty="0">
                 <a:solidFill>
                   <a:srgbClr val="1C2430"/>
                 </a:solidFill>
@@ -2036,19 +2509,36 @@
                 <a:ea typeface="Noto Sans CJK SC" pitchFamily="34" charset="-122"/>
                 <a:cs typeface="Noto Sans CJK SC" pitchFamily="34" charset="-120"/>
               </a:rPr>
-              <a:t>预期哪个指标发生什么变化</a:t>
-            </a:r>
-            <a:endParaRPr lang="zh-CN" sz="1650" dirty="0"/>
-          </a:p>
-          <a:p>
-            <a:pPr algn="l" indent="0" marL="0">
-              <a:lnSpc>
-                <a:spcPts val="2178"/>
-              </a:lnSpc>
-              <a:buNone/>
-            </a:pPr>
-            <a:r>
-              <a:rPr lang="zh-CN" altLang="en-US" sz="1650" dirty="0">
+              <a:t>与</a:t>
+            </a:r>
+            <a:pPr algn="l" indent="0" marL="0">
+              <a:lnSpc>
+                <a:spcPts val="2232"/>
+              </a:lnSpc>
+              <a:buNone/>
+            </a:pPr>
+            <a:r>
+              <a:rPr lang="zh-CN" altLang="en-US" sz="1800" b="1" dirty="0">
+                <a:solidFill>
+                  <a:srgbClr val="A24736"/>
+                </a:solidFill>
+                <a:latin typeface="Noto Sans CJK SC" pitchFamily="34" charset="0"/>
+                <a:ea typeface="Noto Sans CJK SC" pitchFamily="34" charset="-122"/>
+                <a:cs typeface="Noto Sans CJK SC" pitchFamily="34" charset="-120"/>
+              </a:rPr>
+              <a:t>不确定性</a:t>
+            </a:r>
+            <a:endParaRPr lang="zh-CN" sz="1800" dirty="0"/>
+          </a:p>
+          <a:p>
+            <a:pPr algn="l" indent="0" marL="0">
+              <a:lnSpc>
+                <a:spcPts val="2232"/>
+              </a:lnSpc>
+              <a:buNone/>
+            </a:pPr>
+            <a:r>
+              <a:rPr lang="zh-CN" altLang="en-US" sz="1800" dirty="0">
                 <a:solidFill>
                   <a:srgbClr val="1C2430"/>
                 </a:solidFill>
@@ -2056,74 +2546,10 @@
                 <a:ea typeface="Noto Sans CJK SC" pitchFamily="34" charset="-122"/>
                 <a:cs typeface="Noto Sans CJK SC" pitchFamily="34" charset="-120"/>
               </a:rPr>
-              <a:t>哪种观察会使假说不获支持</a:t>
-            </a:r>
-            <a:endParaRPr lang="zh-CN" sz="1650" dirty="0"/>
-          </a:p>
-        </p:txBody>
-      </p:sp>
-      <p:sp>
-        <p:nvSpPr>
-          <p:cNvPr id="21" name="T43/card/region-4/title"/>
-          <p:cNvSpPr/>
-          <p:nvPr/>
-        </p:nvSpPr>
-        <p:spPr>
-          <a:xfrm>
-            <a:off x="4210050" y="3409950"/>
-            <a:ext cx="3467100" cy="323850"/>
-          </a:xfrm>
-          <a:prstGeom prst="rect">
-            <a:avLst/>
-          </a:prstGeom>
-          <a:noFill/>
-          <a:ln/>
-        </p:spPr>
-        <p:txBody>
-          <a:bodyPr wrap="none" lIns="0" tIns="0" rIns="0" bIns="0" rtlCol="0" anchor="t"/>
-          <a:lstStyle/>
-          <a:p>
-            <a:pPr algn="l" indent="0" marL="0">
-              <a:lnSpc>
-                <a:spcPts val="2156"/>
-              </a:lnSpc>
-              <a:buNone/>
-            </a:pPr>
-            <a:r>
-              <a:rPr lang="zh-CN" altLang="en-US" sz="1875" b="1" dirty="0">
-                <a:solidFill>
-                  <a:srgbClr val="173C70"/>
-                </a:solidFill>
-                <a:latin typeface="Noto Sans CJK SC" pitchFamily="34" charset="0"/>
-                <a:ea typeface="Noto Sans CJK SC" pitchFamily="34" charset="-122"/>
-                <a:cs typeface="Noto Sans CJK SC" pitchFamily="34" charset="-120"/>
-              </a:rPr>
-              <a:t>实验对照</a:t>
-            </a:r>
-            <a:endParaRPr lang="zh-CN" sz="1875" dirty="0"/>
-          </a:p>
-        </p:txBody>
-      </p:sp>
-      <p:sp>
-        <p:nvSpPr>
-          <p:cNvPr id="22" name="T43/card/region-4/body"/>
-          <p:cNvSpPr/>
-          <p:nvPr/>
-        </p:nvSpPr>
-        <p:spPr>
-          <a:xfrm>
-            <a:off x="4210050" y="3857625"/>
-            <a:ext cx="3467100" cy="2124075"/>
-          </a:xfrm>
-          <a:prstGeom prst="rect">
-            <a:avLst/>
-          </a:prstGeom>
-          <a:noFill/>
-          <a:ln/>
-        </p:spPr>
-        <p:txBody>
-          <a:bodyPr wrap="none" lIns="0" tIns="0" rIns="0" bIns="0" rtlCol="0" anchor="t"/>
-          <a:lstStyle/>
+              <a:t>同时报告失败、成本和风险</a:t>
+            </a:r>
+            <a:endParaRPr lang="zh-CN" sz="1800" dirty="0"/>
+          </a:p>
           <a:p>
             <a:pPr algn="l" indent="0" marL="0">
               <a:lnSpc>
@@ -2140,225 +2566,15 @@
                 <a:ea typeface="Noto Sans CJK SC" pitchFamily="34" charset="-122"/>
                 <a:cs typeface="Noto Sans CJK SC" pitchFamily="34" charset="-120"/>
               </a:rPr>
-              <a:t>冻结其余信息与工具预算</a:t>
+              <a:t>无效或负效应也应完整保留</a:t>
             </a:r>
             <a:endParaRPr lang="zh-CN" sz="1800" dirty="0"/>
           </a:p>
-          <a:p>
-            <a:pPr algn="l" indent="0" marL="0">
-              <a:lnSpc>
-                <a:spcPts val="2232"/>
-              </a:lnSpc>
-              <a:buNone/>
-            </a:pPr>
-            <a:r>
-              <a:rPr lang="zh-CN" altLang="en-US" sz="1800" dirty="0">
-                <a:solidFill>
-                  <a:srgbClr val="1C2430"/>
-                </a:solidFill>
-                <a:latin typeface="Noto Sans CJK SC" pitchFamily="34" charset="0"/>
-                <a:ea typeface="Noto Sans CJK SC" pitchFamily="34" charset="-122"/>
-                <a:cs typeface="Noto Sans CJK SC" pitchFamily="34" charset="-120"/>
-              </a:rPr>
-              <a:t>设置基线、干预和必要消融</a:t>
-            </a:r>
-            <a:endParaRPr lang="zh-CN" sz="1800" dirty="0"/>
-          </a:p>
-          <a:p>
-            <a:pPr algn="l" indent="0" marL="0">
-              <a:lnSpc>
-                <a:spcPts val="2232"/>
-              </a:lnSpc>
-              <a:buNone/>
-            </a:pPr>
-            <a:r>
-              <a:rPr lang="zh-CN" altLang="en-US" sz="1800" dirty="0">
-                <a:solidFill>
-                  <a:srgbClr val="1C2430"/>
-                </a:solidFill>
-                <a:latin typeface="Noto Sans CJK SC" pitchFamily="34" charset="0"/>
-                <a:ea typeface="Noto Sans CJK SC" pitchFamily="34" charset="-122"/>
-                <a:cs typeface="Noto Sans CJK SC" pitchFamily="34" charset="-120"/>
-              </a:rPr>
-              <a:t>保证同一评价和留出条件</a:t>
-            </a:r>
-            <a:endParaRPr lang="zh-CN" sz="1800" dirty="0"/>
-          </a:p>
-        </p:txBody>
-      </p:sp>
-      <p:sp>
-        <p:nvSpPr>
-          <p:cNvPr id="23" name="T43/card/region-5/heading-rule"/>
-          <p:cNvSpPr/>
-          <p:nvPr/>
-        </p:nvSpPr>
-        <p:spPr>
-          <a:xfrm>
-            <a:off x="7962900" y="3752850"/>
-            <a:ext cx="3771900" cy="0"/>
-          </a:xfrm>
-          <a:prstGeom prst="line">
-            <a:avLst/>
-          </a:prstGeom>
-          <a:noFill/>
-          <a:ln w="9525">
-            <a:solidFill>
-              <a:srgbClr val="BEC8D4"/>
-            </a:solidFill>
-            <a:prstDash val="solid"/>
-          </a:ln>
-        </p:spPr>
-      </p:sp>
-      <p:sp>
-        <p:nvSpPr>
-          <p:cNvPr id="24" name="T43/card/region-5/heading-mark"/>
-          <p:cNvSpPr/>
-          <p:nvPr/>
-        </p:nvSpPr>
-        <p:spPr>
-          <a:xfrm>
-            <a:off x="7962900" y="3752850"/>
-            <a:ext cx="342900" cy="0"/>
-          </a:xfrm>
-          <a:prstGeom prst="line">
-            <a:avLst/>
-          </a:prstGeom>
-          <a:noFill/>
-          <a:ln w="17145">
-            <a:solidFill>
-              <a:srgbClr val="903543"/>
-            </a:solidFill>
-            <a:prstDash val="solid"/>
-          </a:ln>
-        </p:spPr>
-      </p:sp>
-      <p:sp>
-        <p:nvSpPr>
-          <p:cNvPr id="25" name="T43/card/region-5/title"/>
-          <p:cNvSpPr/>
-          <p:nvPr/>
-        </p:nvSpPr>
-        <p:spPr>
-          <a:xfrm>
-            <a:off x="7962900" y="3409950"/>
-            <a:ext cx="3771900" cy="323850"/>
-          </a:xfrm>
-          <a:prstGeom prst="rect">
-            <a:avLst/>
-          </a:prstGeom>
-          <a:noFill/>
-          <a:ln/>
-        </p:spPr>
-        <p:txBody>
-          <a:bodyPr wrap="none" lIns="0" tIns="0" rIns="0" bIns="0" rtlCol="0" anchor="t"/>
-          <a:lstStyle/>
-          <a:p>
-            <a:pPr algn="l" indent="0" marL="0">
-              <a:lnSpc>
-                <a:spcPts val="2156"/>
-              </a:lnSpc>
-              <a:buNone/>
-            </a:pPr>
-            <a:r>
-              <a:rPr lang="zh-CN" altLang="en-US" sz="1875" b="1" dirty="0">
-                <a:solidFill>
-                  <a:srgbClr val="903543"/>
-                </a:solidFill>
-                <a:latin typeface="Noto Sans CJK SC" pitchFamily="34" charset="0"/>
-                <a:ea typeface="Noto Sans CJK SC" pitchFamily="34" charset="-122"/>
-                <a:cs typeface="Noto Sans CJK SC" pitchFamily="34" charset="-120"/>
-              </a:rPr>
-              <a:t>评价与反证</a:t>
-            </a:r>
-            <a:endParaRPr lang="zh-CN" sz="1875" dirty="0"/>
-          </a:p>
-        </p:txBody>
-      </p:sp>
-      <p:sp>
-        <p:nvSpPr>
-          <p:cNvPr id="26" name="T43/card/region-5/body"/>
-          <p:cNvSpPr/>
-          <p:nvPr/>
-        </p:nvSpPr>
-        <p:spPr>
-          <a:xfrm>
-            <a:off x="7962900" y="3886200"/>
-            <a:ext cx="3771900" cy="2095500"/>
-          </a:xfrm>
-          <a:prstGeom prst="rect">
-            <a:avLst/>
-          </a:prstGeom>
-          <a:noFill/>
-          <a:ln/>
-        </p:spPr>
-        <p:txBody>
-          <a:bodyPr wrap="none" lIns="0" tIns="0" rIns="0" bIns="0" rtlCol="0" anchor="t"/>
-          <a:lstStyle/>
-          <a:p>
-            <a:pPr algn="l" indent="0" marL="0">
-              <a:lnSpc>
-                <a:spcPts val="2232"/>
-              </a:lnSpc>
-              <a:buNone/>
-            </a:pPr>
-            <a:r>
-              <a:rPr lang="zh-CN" altLang="en-US" sz="1800" dirty="0">
-                <a:solidFill>
-                  <a:srgbClr val="1C2430"/>
-                </a:solidFill>
-                <a:latin typeface="Noto Sans CJK SC" pitchFamily="34" charset="0"/>
-                <a:ea typeface="Noto Sans CJK SC" pitchFamily="34" charset="-122"/>
-                <a:cs typeface="Noto Sans CJK SC" pitchFamily="34" charset="-120"/>
-              </a:rPr>
-              <a:t>预先定义主要终点与不确定性</a:t>
-            </a:r>
-            <a:endParaRPr lang="zh-CN" sz="1800" dirty="0"/>
-          </a:p>
-          <a:p>
-            <a:pPr algn="l" indent="0" marL="0">
-              <a:lnSpc>
-                <a:spcPts val="2232"/>
-              </a:lnSpc>
-              <a:buNone/>
-            </a:pPr>
-            <a:r>
-              <a:rPr lang="zh-CN" altLang="en-US" sz="1800" dirty="0">
-                <a:solidFill>
-                  <a:srgbClr val="1C2430"/>
-                </a:solidFill>
-                <a:latin typeface="Noto Sans CJK SC" pitchFamily="34" charset="0"/>
-                <a:ea typeface="Noto Sans CJK SC" pitchFamily="34" charset="-122"/>
-                <a:cs typeface="Noto Sans CJK SC" pitchFamily="34" charset="-120"/>
-              </a:rPr>
-              <a:t>同时报告失败、成本和风险</a:t>
-            </a:r>
-            <a:endParaRPr lang="zh-CN" sz="1800" dirty="0"/>
-          </a:p>
-          <a:p>
-            <a:pPr algn="l" indent="0" marL="0">
-              <a:lnSpc>
-                <a:spcPts val="2232"/>
-              </a:lnSpc>
-              <a:buNone/>
-            </a:pPr>
-            <a:r>
-              <a:rPr lang="zh-CN" altLang="en-US" sz="1800" dirty="0">
-                <a:solidFill>
-                  <a:srgbClr val="1C2430"/>
-                </a:solidFill>
-                <a:latin typeface="Noto Sans CJK SC" pitchFamily="34" charset="0"/>
-                <a:ea typeface="Noto Sans CJK SC" pitchFamily="34" charset="-122"/>
-                <a:cs typeface="Noto Sans CJK SC" pitchFamily="34" charset="-120"/>
-              </a:rPr>
-              <a:t>无效或负效应也应完整保留</a:t>
-            </a:r>
-            <a:endParaRPr lang="zh-CN" sz="1800" dirty="0"/>
-          </a:p>
-        </p:txBody>
-      </p:sp>
-      <p:sp>
-        <p:nvSpPr>
-          <p:cNvPr id="27" name="T43/sources"/>
+        </p:txBody>
+      </p:sp>
+      <p:sp>
+        <p:nvSpPr>
+          <p:cNvPr id="33" name="T43/sources"/>
           <p:cNvSpPr/>
           <p:nvPr/>
         </p:nvSpPr>
@@ -2392,7 +2608,7 @@
                 <a:ea typeface="Noto Sans CJK SC" pitchFamily="34" charset="-122"/>
                 <a:cs typeface="Noto Sans CJK SC" pitchFamily="34" charset="-120"/>
               </a:rPr>
-              <a:t>T1 · 2026 · 待替换</a:t>
+              <a:t>T1 · 2026 · 书目占位；图表均为合成示例</a:t>
             </a:r>
             <a:endParaRPr lang="zh-CN" sz="1125" dirty="0"/>
           </a:p>
@@ -2501,14 +2717,14 @@
       </p:sp>
       <p:sp>
         <p:nvSpPr>
-          <p:cNvPr id="4" name="T44/kicker"/>
-          <p:cNvSpPr/>
-          <p:nvPr/>
-        </p:nvSpPr>
-        <p:spPr>
-          <a:xfrm>
-            <a:off x="457200" y="152400"/>
-            <a:ext cx="11277600" cy="190500"/>
+          <p:cNvPr id="4" name="T44/title"/>
+          <p:cNvSpPr/>
+          <p:nvPr/>
+        </p:nvSpPr>
+        <p:spPr>
+          <a:xfrm>
+            <a:off x="457200" y="209550"/>
+            <a:ext cx="11277600" cy="438150"/>
           </a:xfrm>
           <a:prstGeom prst="rect">
             <a:avLst/>
@@ -2522,54 +2738,12 @@
           <a:p>
             <a:pPr algn="l" indent="0" marL="0">
               <a:lnSpc>
-                <a:spcPts val="1320"/>
-              </a:lnSpc>
-              <a:buNone/>
-            </a:pPr>
-            <a:r>
-              <a:rPr lang="zh-CN" altLang="en-US" sz="1200" dirty="0">
-                <a:solidFill>
-                  <a:srgbClr val="515B68"/>
-                </a:solidFill>
-                <a:latin typeface="Noto Sans CJK SC" pitchFamily="34" charset="0"/>
-                <a:ea typeface="Noto Sans CJK SC" pitchFamily="34" charset="-122"/>
-                <a:cs typeface="Noto Sans CJK SC" pitchFamily="34" charset="-120"/>
-              </a:rPr>
-              <a:t>结构模板 / 占位说明与合成数据</a:t>
-            </a:r>
-            <a:endParaRPr lang="zh-CN" sz="1200" dirty="0"/>
-          </a:p>
-        </p:txBody>
-      </p:sp>
-      <p:sp>
-        <p:nvSpPr>
-          <p:cNvPr id="5" name="T44/title"/>
-          <p:cNvSpPr/>
-          <p:nvPr/>
-        </p:nvSpPr>
-        <p:spPr>
-          <a:xfrm>
-            <a:off x="457200" y="381000"/>
-            <a:ext cx="11277600" cy="400050"/>
-          </a:xfrm>
-          <a:prstGeom prst="rect">
-            <a:avLst/>
-          </a:prstGeom>
-          <a:noFill/>
-          <a:ln/>
-        </p:spPr>
-        <p:txBody>
-          <a:bodyPr wrap="none" lIns="0" tIns="0" rIns="0" bIns="0" rtlCol="0" anchor="t"/>
-          <a:lstStyle/>
-          <a:p>
-            <a:pPr algn="l" indent="0" marL="0">
-              <a:lnSpc>
-                <a:spcPts val="2856"/>
-              </a:lnSpc>
-              <a:buNone/>
-            </a:pPr>
-            <a:r>
-              <a:rPr lang="zh-CN" altLang="en-US" sz="2550" b="1" dirty="0">
+                <a:spcPts val="3360"/>
+              </a:lnSpc>
+              <a:buNone/>
+            </a:pPr>
+            <a:r>
+              <a:rPr lang="zh-CN" altLang="en-US" sz="3000" b="1" dirty="0">
                 <a:solidFill>
                   <a:srgbClr val="1C2430"/>
                 </a:solidFill>
@@ -2579,26 +2753,49 @@
               </a:rPr>
               <a:t>公平比较的实验结构</a:t>
             </a:r>
-            <a:endParaRPr lang="zh-CN" sz="2550" dirty="0"/>
-          </a:p>
-        </p:txBody>
-      </p:sp>
-      <p:sp>
-        <p:nvSpPr>
-          <p:cNvPr id="6" name="T44/header-rule"/>
-          <p:cNvSpPr/>
-          <p:nvPr/>
-        </p:nvSpPr>
-        <p:spPr>
-          <a:xfrm>
-            <a:off x="457200" y="876300"/>
+            <a:endParaRPr lang="zh-CN" sz="3000" dirty="0"/>
+          </a:p>
+        </p:txBody>
+      </p:sp>
+      <p:sp>
+        <p:nvSpPr>
+          <p:cNvPr id="5" name="T44/header-rule"/>
+          <p:cNvSpPr/>
+          <p:nvPr/>
+        </p:nvSpPr>
+        <p:spPr>
+          <a:xfrm>
+            <a:off x="457200" y="752475"/>
             <a:ext cx="11277600" cy="0"/>
           </a:xfrm>
           <a:prstGeom prst="line">
             <a:avLst/>
           </a:prstGeom>
           <a:noFill/>
-          <a:ln w="11430">
+          <a:ln w="10478">
+            <a:solidFill>
+              <a:srgbClr val="BEC8D4"/>
+            </a:solidFill>
+            <a:prstDash val="solid"/>
+          </a:ln>
+        </p:spPr>
+      </p:sp>
+      <p:sp>
+        <p:nvSpPr>
+          <p:cNvPr id="6" name="T44/header-accent"/>
+          <p:cNvSpPr/>
+          <p:nvPr/>
+        </p:nvSpPr>
+        <p:spPr>
+          <a:xfrm>
+            <a:off x="457200" y="752475"/>
+            <a:ext cx="704850" cy="0"/>
+          </a:xfrm>
+          <a:prstGeom prst="line">
+            <a:avLst/>
+          </a:prstGeom>
+          <a:noFill/>
+          <a:ln w="28575">
             <a:solidFill>
               <a:srgbClr val="173C70"/>
             </a:solidFill>
@@ -2614,8 +2811,8 @@
         </p:nvSpPr>
         <p:spPr>
           <a:xfrm>
-            <a:off x="4362450" y="2305050"/>
-            <a:ext cx="0" cy="419100"/>
+            <a:off x="4362450" y="2156365"/>
+            <a:ext cx="0" cy="435197"/>
           </a:xfrm>
           <a:prstGeom prst="line">
             <a:avLst/>
@@ -2637,7 +2834,7 @@
         </p:nvSpPr>
         <p:spPr>
           <a:xfrm flipH="1">
-            <a:off x="1876425" y="2724150"/>
+            <a:off x="1876425" y="2591562"/>
             <a:ext cx="2486025" cy="0"/>
           </a:xfrm>
           <a:prstGeom prst="line">
@@ -2660,8 +2857,8 @@
         </p:nvSpPr>
         <p:spPr>
           <a:xfrm>
-            <a:off x="1876425" y="2724150"/>
-            <a:ext cx="0" cy="419100"/>
+            <a:off x="1876425" y="2591562"/>
+            <a:ext cx="0" cy="435197"/>
           </a:xfrm>
           <a:prstGeom prst="line">
             <a:avLst/>
@@ -2684,8 +2881,8 @@
         </p:nvSpPr>
         <p:spPr>
           <a:xfrm>
-            <a:off x="4362450" y="2305050"/>
-            <a:ext cx="0" cy="419100"/>
+            <a:off x="4362450" y="2156365"/>
+            <a:ext cx="0" cy="435197"/>
           </a:xfrm>
           <a:prstGeom prst="line">
             <a:avLst/>
@@ -2707,7 +2904,7 @@
         </p:nvSpPr>
         <p:spPr>
           <a:xfrm>
-            <a:off x="4362450" y="2724150"/>
+            <a:off x="4362450" y="2591562"/>
             <a:ext cx="2181225" cy="0"/>
           </a:xfrm>
           <a:prstGeom prst="line">
@@ -2730,8 +2927,8 @@
         </p:nvSpPr>
         <p:spPr>
           <a:xfrm>
-            <a:off x="6543675" y="2724150"/>
-            <a:ext cx="0" cy="419100"/>
+            <a:off x="6543675" y="2591562"/>
+            <a:ext cx="0" cy="435197"/>
           </a:xfrm>
           <a:prstGeom prst="line">
             <a:avLst/>
@@ -2754,7 +2951,7 @@
         </p:nvSpPr>
         <p:spPr>
           <a:xfrm>
-            <a:off x="3086100" y="3752850"/>
+            <a:off x="3086100" y="3659791"/>
             <a:ext cx="47625" cy="0"/>
           </a:xfrm>
           <a:prstGeom prst="line">
@@ -2777,8 +2974,8 @@
         </p:nvSpPr>
         <p:spPr>
           <a:xfrm>
-            <a:off x="3133725" y="3752850"/>
-            <a:ext cx="0" cy="1762125"/>
+            <a:off x="3133725" y="3659791"/>
+            <a:ext cx="0" cy="1829895"/>
           </a:xfrm>
           <a:prstGeom prst="line">
             <a:avLst/>
@@ -2800,7 +2997,7 @@
         </p:nvSpPr>
         <p:spPr>
           <a:xfrm>
-            <a:off x="3133725" y="5514975"/>
+            <a:off x="3133725" y="5489686"/>
             <a:ext cx="47625" cy="0"/>
           </a:xfrm>
           <a:prstGeom prst="line">
@@ -2824,8 +3021,8 @@
         </p:nvSpPr>
         <p:spPr>
           <a:xfrm>
-            <a:off x="6543675" y="4362450"/>
-            <a:ext cx="0" cy="342900"/>
+            <a:off x="6543675" y="4292822"/>
+            <a:ext cx="0" cy="356092"/>
           </a:xfrm>
           <a:prstGeom prst="line">
             <a:avLst/>
@@ -2847,7 +3044,7 @@
         </p:nvSpPr>
         <p:spPr>
           <a:xfrm flipH="1">
-            <a:off x="4362450" y="4705350"/>
+            <a:off x="4362450" y="4648914"/>
             <a:ext cx="2181225" cy="0"/>
           </a:xfrm>
           <a:prstGeom prst="line">
@@ -2870,8 +3067,8 @@
         </p:nvSpPr>
         <p:spPr>
           <a:xfrm>
-            <a:off x="4362450" y="4705350"/>
-            <a:ext cx="0" cy="342900"/>
+            <a:off x="4362450" y="4648914"/>
+            <a:ext cx="0" cy="356092"/>
           </a:xfrm>
           <a:prstGeom prst="line">
             <a:avLst/>
@@ -2894,14 +3091,14 @@
         </p:nvSpPr>
         <p:spPr>
           <a:xfrm>
-            <a:off x="3181350" y="1409700"/>
-            <a:ext cx="2362200" cy="895350"/>
+            <a:off x="3181350" y="1226534"/>
+            <a:ext cx="2362200" cy="929831"/>
           </a:xfrm>
           <a:prstGeom prst="rect">
             <a:avLst/>
           </a:prstGeom>
           <a:solidFill>
-            <a:srgbClr val="FFFFFF"/>
+            <a:srgbClr val="F0F3F6"/>
           </a:solidFill>
           <a:ln w="11430">
             <a:solidFill>
@@ -2919,7 +3116,7 @@
         </p:nvSpPr>
         <p:spPr>
           <a:xfrm>
-            <a:off x="3181350" y="1409700"/>
+            <a:off x="3181350" y="1226534"/>
             <a:ext cx="2362200" cy="0"/>
           </a:xfrm>
           <a:prstGeom prst="line">
@@ -2928,7 +3125,7 @@
           <a:noFill/>
           <a:ln w="19050">
             <a:solidFill>
-              <a:srgbClr val="173C70"/>
+              <a:srgbClr val="536A7A"/>
             </a:solidFill>
             <a:prstDash val="solid"/>
           </a:ln>
@@ -2942,7 +3139,7 @@
         </p:nvSpPr>
         <p:spPr>
           <a:xfrm>
-            <a:off x="3295650" y="1724025"/>
+            <a:off x="3295650" y="1558100"/>
             <a:ext cx="2133600" cy="266700"/>
           </a:xfrm>
           <a:prstGeom prst="rect">
@@ -2964,7 +3161,7 @@
             <a:r>
               <a:rPr lang="zh-CN" altLang="en-US" sz="1800" b="1" dirty="0">
                 <a:solidFill>
-                  <a:srgbClr val="173C70"/>
+                  <a:srgbClr val="536A7A"/>
                 </a:solidFill>
                 <a:latin typeface="Noto Sans CJK SC" pitchFamily="34" charset="0"/>
                 <a:ea typeface="Noto Sans CJK SC" pitchFamily="34" charset="-122"/>
@@ -2984,14 +3181,14 @@
         </p:nvSpPr>
         <p:spPr>
           <a:xfrm>
-            <a:off x="666750" y="3143250"/>
-            <a:ext cx="2419350" cy="1219200"/>
+            <a:off x="666750" y="3026759"/>
+            <a:ext cx="2419350" cy="1266063"/>
           </a:xfrm>
           <a:prstGeom prst="rect">
             <a:avLst/>
           </a:prstGeom>
           <a:solidFill>
-            <a:srgbClr val="FFFFFF"/>
+            <a:srgbClr val="EAF2FA"/>
           </a:solidFill>
           <a:ln w="11430">
             <a:solidFill>
@@ -3009,7 +3206,7 @@
         </p:nvSpPr>
         <p:spPr>
           <a:xfrm>
-            <a:off x="666750" y="3143250"/>
+            <a:off x="666750" y="3026759"/>
             <a:ext cx="2419350" cy="0"/>
           </a:xfrm>
           <a:prstGeom prst="line">
@@ -3018,7 +3215,7 @@
           <a:noFill/>
           <a:ln w="19050">
             <a:solidFill>
-              <a:srgbClr val="173C70"/>
+              <a:srgbClr val="235E96"/>
             </a:solidFill>
             <a:prstDash val="solid"/>
           </a:ln>
@@ -3032,7 +3229,7 @@
         </p:nvSpPr>
         <p:spPr>
           <a:xfrm>
-            <a:off x="781050" y="3238500"/>
+            <a:off x="781050" y="3122009"/>
             <a:ext cx="2190750" cy="266700"/>
           </a:xfrm>
           <a:prstGeom prst="rect">
@@ -3054,7 +3251,7 @@
             <a:r>
               <a:rPr lang="zh-CN" altLang="en-US" sz="1800" b="1" dirty="0">
                 <a:solidFill>
-                  <a:srgbClr val="173C70"/>
+                  <a:srgbClr val="235E96"/>
                 </a:solidFill>
                 <a:latin typeface="Noto Sans CJK SC" pitchFamily="34" charset="0"/>
                 <a:ea typeface="Noto Sans CJK SC" pitchFamily="34" charset="-122"/>
@@ -3074,8 +3271,8 @@
         </p:nvSpPr>
         <p:spPr>
           <a:xfrm>
-            <a:off x="781050" y="3552825"/>
-            <a:ext cx="2190750" cy="723900"/>
+            <a:off x="781050" y="3436334"/>
+            <a:ext cx="2190750" cy="770763"/>
           </a:xfrm>
           <a:prstGeom prst="rect">
             <a:avLst/>
@@ -3102,7 +3299,7 @@
                 <a:ea typeface="Noto Sans CJK SC" pitchFamily="34" charset="-122"/>
                 <a:cs typeface="Noto Sans CJK SC" pitchFamily="34" charset="-120"/>
               </a:rPr>
-              <a:t>填写接口与条件</a:t>
+              <a:t>原有处理机制</a:t>
             </a:r>
             <a:endParaRPr lang="zh-CN" sz="1650" dirty="0"/>
           </a:p>
@@ -3116,14 +3313,14 @@
         </p:nvSpPr>
         <p:spPr>
           <a:xfrm>
-            <a:off x="5334000" y="3143250"/>
-            <a:ext cx="2419350" cy="1219200"/>
+            <a:off x="5334000" y="3026759"/>
+            <a:ext cx="2419350" cy="1266063"/>
           </a:xfrm>
           <a:prstGeom prst="rect">
             <a:avLst/>
           </a:prstGeom>
           <a:solidFill>
-            <a:srgbClr val="FFFFFF"/>
+            <a:srgbClr val="EAF2FA"/>
           </a:solidFill>
           <a:ln w="11430">
             <a:solidFill>
@@ -3141,7 +3338,7 @@
         </p:nvSpPr>
         <p:spPr>
           <a:xfrm>
-            <a:off x="5334000" y="3143250"/>
+            <a:off x="5334000" y="3026759"/>
             <a:ext cx="2419350" cy="0"/>
           </a:xfrm>
           <a:prstGeom prst="line">
@@ -3150,7 +3347,7 @@
           <a:noFill/>
           <a:ln w="19050">
             <a:solidFill>
-              <a:srgbClr val="173C70"/>
+              <a:srgbClr val="235E96"/>
             </a:solidFill>
             <a:prstDash val="solid"/>
           </a:ln>
@@ -3164,7 +3361,7 @@
         </p:nvSpPr>
         <p:spPr>
           <a:xfrm>
-            <a:off x="5448300" y="3238500"/>
+            <a:off x="5448300" y="3122009"/>
             <a:ext cx="2190750" cy="266700"/>
           </a:xfrm>
           <a:prstGeom prst="rect">
@@ -3186,7 +3383,7 @@
             <a:r>
               <a:rPr lang="zh-CN" altLang="en-US" sz="1800" b="1" dirty="0">
                 <a:solidFill>
-                  <a:srgbClr val="173C70"/>
+                  <a:srgbClr val="235E96"/>
                 </a:solidFill>
                 <a:latin typeface="Noto Sans CJK SC" pitchFamily="34" charset="0"/>
                 <a:ea typeface="Noto Sans CJK SC" pitchFamily="34" charset="-122"/>
@@ -3206,8 +3403,8 @@
         </p:nvSpPr>
         <p:spPr>
           <a:xfrm>
-            <a:off x="5448300" y="3552825"/>
-            <a:ext cx="2190750" cy="723900"/>
+            <a:off x="5448300" y="3436334"/>
+            <a:ext cx="2190750" cy="770763"/>
           </a:xfrm>
           <a:prstGeom prst="rect">
             <a:avLst/>
@@ -3234,7 +3431,7 @@
                 <a:ea typeface="Noto Sans CJK SC" pitchFamily="34" charset="-122"/>
                 <a:cs typeface="Noto Sans CJK SC" pitchFamily="34" charset="-120"/>
               </a:rPr>
-              <a:t>填写接口与条件</a:t>
+              <a:t>只改变指定模块</a:t>
             </a:r>
             <a:endParaRPr lang="zh-CN" sz="1650" dirty="0"/>
           </a:p>
@@ -3248,14 +3445,14 @@
         </p:nvSpPr>
         <p:spPr>
           <a:xfrm>
-            <a:off x="3181350" y="5048250"/>
-            <a:ext cx="2362200" cy="933450"/>
+            <a:off x="3181350" y="5005007"/>
+            <a:ext cx="2362200" cy="969359"/>
           </a:xfrm>
           <a:prstGeom prst="rect">
             <a:avLst/>
           </a:prstGeom>
           <a:solidFill>
-            <a:srgbClr val="FFFFFF"/>
+            <a:srgbClr val="EAF2FA"/>
           </a:solidFill>
           <a:ln w="11430">
             <a:solidFill>
@@ -3273,7 +3470,7 @@
         </p:nvSpPr>
         <p:spPr>
           <a:xfrm>
-            <a:off x="3181350" y="5048250"/>
+            <a:off x="3181350" y="5005007"/>
             <a:ext cx="2362200" cy="0"/>
           </a:xfrm>
           <a:prstGeom prst="line">
@@ -3282,7 +3479,7 @@
           <a:noFill/>
           <a:ln w="19050">
             <a:solidFill>
-              <a:srgbClr val="173C70"/>
+              <a:srgbClr val="235E96"/>
             </a:solidFill>
             <a:prstDash val="solid"/>
           </a:ln>
@@ -3296,7 +3493,7 @@
         </p:nvSpPr>
         <p:spPr>
           <a:xfrm>
-            <a:off x="3295650" y="5381625"/>
+            <a:off x="3295650" y="5356336"/>
             <a:ext cx="2133600" cy="266700"/>
           </a:xfrm>
           <a:prstGeom prst="rect">
@@ -3318,7 +3515,7 @@
             <a:r>
               <a:rPr lang="zh-CN" altLang="en-US" sz="1800" b="1" dirty="0">
                 <a:solidFill>
-                  <a:srgbClr val="173C70"/>
+                  <a:srgbClr val="235E96"/>
                 </a:solidFill>
                 <a:latin typeface="Noto Sans CJK SC" pitchFamily="34" charset="0"/>
                 <a:ea typeface="Noto Sans CJK SC" pitchFamily="34" charset="-122"/>
@@ -3338,8 +3535,8 @@
         </p:nvSpPr>
         <p:spPr>
           <a:xfrm>
-            <a:off x="8610600" y="1390650"/>
-            <a:ext cx="3124200" cy="2095500"/>
+            <a:off x="8610600" y="1206722"/>
+            <a:ext cx="3124200" cy="2176082"/>
           </a:xfrm>
           <a:prstGeom prst="rect">
             <a:avLst/>
@@ -3363,14 +3560,14 @@
         </p:nvSpPr>
         <p:spPr>
           <a:xfrm>
-            <a:off x="8620125" y="1400175"/>
+            <a:off x="8620125" y="1216247"/>
             <a:ext cx="3105150" cy="371475"/>
           </a:xfrm>
           <a:prstGeom prst="rect">
             <a:avLst/>
           </a:prstGeom>
           <a:solidFill>
-            <a:srgbClr val="EEF3F8"/>
+            <a:srgbClr val="F0F3F6"/>
           </a:solidFill>
           <a:ln w="12700">
             <a:solidFill>
@@ -3390,7 +3587,7 @@
         </p:nvSpPr>
         <p:spPr>
           <a:xfrm>
-            <a:off x="8610600" y="1771650"/>
+            <a:off x="8610600" y="1587722"/>
             <a:ext cx="3124200" cy="0"/>
           </a:xfrm>
           <a:prstGeom prst="line">
@@ -3413,8 +3610,8 @@
         </p:nvSpPr>
         <p:spPr>
           <a:xfrm>
-            <a:off x="8734425" y="1447800"/>
-            <a:ext cx="2876550" cy="276225"/>
+            <a:off x="8734425" y="1254347"/>
+            <a:ext cx="2876550" cy="295275"/>
           </a:xfrm>
           <a:prstGeom prst="rect">
             <a:avLst/>
@@ -3428,54 +3625,108 @@
           <a:p>
             <a:pPr algn="l" indent="0" marL="0">
               <a:lnSpc>
-                <a:spcPts val="2070"/>
+                <a:spcPts val="2242"/>
+              </a:lnSpc>
+              <a:buNone/>
+            </a:pPr>
+            <a:r>
+              <a:rPr lang="zh-CN" altLang="en-US" sz="1950" b="1" dirty="0">
+                <a:solidFill>
+                  <a:srgbClr val="536A7A"/>
+                </a:solidFill>
+                <a:latin typeface="Noto Sans CJK SC" pitchFamily="34" charset="0"/>
+                <a:ea typeface="Noto Sans CJK SC" pitchFamily="34" charset="-122"/>
+                <a:cs typeface="Noto Sans CJK SC" pitchFamily="34" charset="-120"/>
+              </a:rPr>
+              <a:t>共同预算与信息</a:t>
+            </a:r>
+            <a:endParaRPr lang="zh-CN" sz="1950" dirty="0"/>
+          </a:p>
+        </p:txBody>
+      </p:sp>
+      <p:sp>
+        <p:nvSpPr>
+          <p:cNvPr id="37" name="T44/card/region-1/body"/>
+          <p:cNvSpPr/>
+          <p:nvPr/>
+        </p:nvSpPr>
+        <p:spPr>
+          <a:xfrm>
+            <a:off x="8743950" y="1692497"/>
+            <a:ext cx="2857500" cy="1595056"/>
+          </a:xfrm>
+          <a:prstGeom prst="rect">
+            <a:avLst/>
+          </a:prstGeom>
+          <a:noFill/>
+          <a:ln/>
+        </p:spPr>
+        <p:txBody>
+          <a:bodyPr wrap="none" lIns="0" tIns="0" rIns="0" bIns="0" rtlCol="0" anchor="t"/>
+          <a:lstStyle/>
+          <a:p>
+            <a:pPr algn="l" indent="0" marL="0">
+              <a:lnSpc>
+                <a:spcPts val="2232"/>
+              </a:lnSpc>
+              <a:buNone/>
+            </a:pPr>
+            <a:r>
+              <a:rPr lang="zh-CN" altLang="en-US" sz="1800" dirty="0">
+                <a:solidFill>
+                  <a:srgbClr val="1C2430"/>
+                </a:solidFill>
+                <a:latin typeface="Noto Sans CJK SC" pitchFamily="34" charset="0"/>
+                <a:ea typeface="Noto Sans CJK SC" pitchFamily="34" charset="-122"/>
+                <a:cs typeface="Noto Sans CJK SC" pitchFamily="34" charset="-120"/>
+              </a:rPr>
+              <a:t>双方使用</a:t>
+            </a:r>
+            <a:pPr algn="l" indent="0" marL="0">
+              <a:lnSpc>
+                <a:spcPts val="2232"/>
               </a:lnSpc>
               <a:buNone/>
             </a:pPr>
             <a:r>
               <a:rPr lang="zh-CN" altLang="en-US" sz="1800" b="1" dirty="0">
                 <a:solidFill>
-                  <a:srgbClr val="173C70"/>
-                </a:solidFill>
-                <a:latin typeface="Noto Sans CJK SC" pitchFamily="34" charset="0"/>
-                <a:ea typeface="Noto Sans CJK SC" pitchFamily="34" charset="-122"/>
-                <a:cs typeface="Noto Sans CJK SC" pitchFamily="34" charset="-120"/>
-              </a:rPr>
-              <a:t>共同预算与信息</a:t>
+                  <a:srgbClr val="536A7A"/>
+                </a:solidFill>
+                <a:latin typeface="Noto Sans CJK SC" pitchFamily="34" charset="0"/>
+                <a:ea typeface="Noto Sans CJK SC" pitchFamily="34" charset="-122"/>
+                <a:cs typeface="Noto Sans CJK SC" pitchFamily="34" charset="-120"/>
+              </a:rPr>
+              <a:t>同一任务</a:t>
+            </a:r>
+            <a:pPr algn="l" indent="0" marL="0">
+              <a:lnSpc>
+                <a:spcPts val="2232"/>
+              </a:lnSpc>
+              <a:buNone/>
+            </a:pPr>
+            <a:r>
+              <a:rPr lang="zh-CN" altLang="en-US" sz="1800" dirty="0">
+                <a:solidFill>
+                  <a:srgbClr val="1C2430"/>
+                </a:solidFill>
+                <a:latin typeface="Noto Sans CJK SC" pitchFamily="34" charset="0"/>
+                <a:ea typeface="Noto Sans CJK SC" pitchFamily="34" charset="-122"/>
+                <a:cs typeface="Noto Sans CJK SC" pitchFamily="34" charset="-120"/>
+              </a:rPr>
+              <a:t>、观测和</a:t>
             </a:r>
             <a:endParaRPr lang="zh-CN" sz="1800" dirty="0"/>
           </a:p>
-        </p:txBody>
-      </p:sp>
-      <p:sp>
-        <p:nvSpPr>
-          <p:cNvPr id="37" name="T44/card/region-1/body"/>
-          <p:cNvSpPr/>
-          <p:nvPr/>
-        </p:nvSpPr>
-        <p:spPr>
-          <a:xfrm>
-            <a:off x="8743950" y="1885950"/>
-            <a:ext cx="2857500" cy="1504950"/>
-          </a:xfrm>
-          <a:prstGeom prst="rect">
-            <a:avLst/>
-          </a:prstGeom>
-          <a:noFill/>
-          <a:ln/>
-        </p:spPr>
-        <p:txBody>
-          <a:bodyPr wrap="none" lIns="0" tIns="0" rIns="0" bIns="0" rtlCol="0" anchor="t"/>
-          <a:lstStyle/>
-          <a:p>
-            <a:pPr algn="l" indent="0" marL="0">
-              <a:lnSpc>
-                <a:spcPts val="2139"/>
-              </a:lnSpc>
-              <a:buNone/>
-            </a:pPr>
-            <a:r>
-              <a:rPr lang="zh-CN" altLang="en-US" sz="1725" dirty="0">
+          <a:p>
+            <a:pPr algn="l" indent="0" marL="0">
+              <a:lnSpc>
+                <a:spcPts val="2232"/>
+              </a:lnSpc>
+              <a:buNone/>
+            </a:pPr>
+            <a:r>
+              <a:rPr lang="zh-CN" altLang="en-US" sz="1800" dirty="0">
                 <a:solidFill>
                   <a:srgbClr val="1C2430"/>
                 </a:solidFill>
@@ -3483,19 +3734,19 @@
                 <a:ea typeface="Noto Sans CJK SC" pitchFamily="34" charset="-122"/>
                 <a:cs typeface="Noto Sans CJK SC" pitchFamily="34" charset="-120"/>
               </a:rPr>
-              <a:t>双方使用同一任务、观测和工</a:t>
-            </a:r>
-            <a:endParaRPr lang="zh-CN" sz="1725" dirty="0"/>
-          </a:p>
-          <a:p>
-            <a:pPr algn="l" indent="0" marL="0">
-              <a:lnSpc>
-                <a:spcPts val="2139"/>
-              </a:lnSpc>
-              <a:buNone/>
-            </a:pPr>
-            <a:r>
-              <a:rPr lang="zh-CN" altLang="en-US" sz="1725" dirty="0">
+              <a:t>工具</a:t>
+            </a:r>
+            <a:endParaRPr lang="zh-CN" sz="1800" dirty="0"/>
+          </a:p>
+          <a:p>
+            <a:pPr algn="l" indent="0" marL="0">
+              <a:lnSpc>
+                <a:spcPts val="2232"/>
+              </a:lnSpc>
+              <a:buNone/>
+            </a:pPr>
+            <a:r>
+              <a:rPr lang="zh-CN" altLang="en-US" sz="1800" dirty="0">
                 <a:solidFill>
                   <a:srgbClr val="1C2430"/>
                 </a:solidFill>
@@ -3503,19 +3754,19 @@
                 <a:ea typeface="Noto Sans CJK SC" pitchFamily="34" charset="-122"/>
                 <a:cs typeface="Noto Sans CJK SC" pitchFamily="34" charset="-120"/>
               </a:rPr>
-              <a:t>具</a:t>
-            </a:r>
-            <a:endParaRPr lang="zh-CN" sz="1725" dirty="0"/>
-          </a:p>
-          <a:p>
-            <a:pPr algn="l" indent="0" marL="0">
-              <a:lnSpc>
-                <a:spcPts val="2139"/>
-              </a:lnSpc>
-              <a:buNone/>
-            </a:pPr>
-            <a:r>
-              <a:rPr lang="zh-CN" altLang="en-US" sz="1725" dirty="0">
+              <a:t>固定调用次数、人工介入和</a:t>
+            </a:r>
+            <a:endParaRPr lang="zh-CN" sz="1800" dirty="0"/>
+          </a:p>
+          <a:p>
+            <a:pPr algn="l" indent="0" marL="0">
+              <a:lnSpc>
+                <a:spcPts val="2232"/>
+              </a:lnSpc>
+              <a:buNone/>
+            </a:pPr>
+            <a:r>
+              <a:rPr lang="zh-CN" altLang="en-US" sz="1800" dirty="0">
                 <a:solidFill>
                   <a:srgbClr val="1C2430"/>
                 </a:solidFill>
@@ -3523,19 +3774,19 @@
                 <a:ea typeface="Noto Sans CJK SC" pitchFamily="34" charset="-122"/>
                 <a:cs typeface="Noto Sans CJK SC" pitchFamily="34" charset="-120"/>
               </a:rPr>
-              <a:t>固定调用次数、人工介入和预</a:t>
-            </a:r>
-            <a:endParaRPr lang="zh-CN" sz="1725" dirty="0"/>
-          </a:p>
-          <a:p>
-            <a:pPr algn="l" indent="0" marL="0">
-              <a:lnSpc>
-                <a:spcPts val="2139"/>
-              </a:lnSpc>
-              <a:buNone/>
-            </a:pPr>
-            <a:r>
-              <a:rPr lang="zh-CN" altLang="en-US" sz="1725" dirty="0">
+              <a:t>预算</a:t>
+            </a:r>
+            <a:endParaRPr lang="zh-CN" sz="1800" dirty="0"/>
+          </a:p>
+          <a:p>
+            <a:pPr algn="l" indent="0" marL="0">
+              <a:lnSpc>
+                <a:spcPts val="2232"/>
+              </a:lnSpc>
+              <a:buNone/>
+            </a:pPr>
+            <a:r>
+              <a:rPr lang="zh-CN" altLang="en-US" sz="1800" dirty="0">
                 <a:solidFill>
                   <a:srgbClr val="1C2430"/>
                 </a:solidFill>
@@ -3543,29 +3794,9 @@
                 <a:ea typeface="Noto Sans CJK SC" pitchFamily="34" charset="-122"/>
                 <a:cs typeface="Noto Sans CJK SC" pitchFamily="34" charset="-120"/>
               </a:rPr>
-              <a:t>算</a:t>
-            </a:r>
-            <a:endParaRPr lang="zh-CN" sz="1725" dirty="0"/>
-          </a:p>
-          <a:p>
-            <a:pPr algn="l" indent="0" marL="0">
-              <a:lnSpc>
-                <a:spcPts val="2139"/>
-              </a:lnSpc>
-              <a:buNone/>
-            </a:pPr>
-            <a:r>
-              <a:rPr lang="zh-CN" altLang="en-US" sz="1725" dirty="0">
-                <a:solidFill>
-                  <a:srgbClr val="1C2430"/>
-                </a:solidFill>
-                <a:latin typeface="Noto Sans CJK SC" pitchFamily="34" charset="0"/>
-                <a:ea typeface="Noto Sans CJK SC" pitchFamily="34" charset="-122"/>
-                <a:cs typeface="Noto Sans CJK SC" pitchFamily="34" charset="-120"/>
-              </a:rPr>
               <a:t>明确干预只改变哪个环节</a:t>
             </a:r>
-            <a:endParaRPr lang="zh-CN" sz="1725" dirty="0"/>
+            <a:endParaRPr lang="zh-CN" sz="1800" dirty="0"/>
           </a:p>
         </p:txBody>
       </p:sp>
@@ -3577,8 +3808,8 @@
         </p:nvSpPr>
         <p:spPr>
           <a:xfrm>
-            <a:off x="8610600" y="3829050"/>
-            <a:ext cx="3124200" cy="2171700"/>
+            <a:off x="8610600" y="3734562"/>
+            <a:ext cx="3124200" cy="2259616"/>
           </a:xfrm>
           <a:prstGeom prst="rect">
             <a:avLst/>
@@ -3602,14 +3833,14 @@
         </p:nvSpPr>
         <p:spPr>
           <a:xfrm>
-            <a:off x="8724900" y="3714750"/>
-            <a:ext cx="1866900" cy="320040"/>
+            <a:off x="8724900" y="3620262"/>
+            <a:ext cx="2000250" cy="342900"/>
           </a:xfrm>
           <a:prstGeom prst="rect">
             <a:avLst/>
           </a:prstGeom>
           <a:solidFill>
-            <a:srgbClr val="903543"/>
+            <a:srgbClr val="A24736"/>
           </a:solidFill>
           <a:ln w="12700">
             <a:solidFill>
@@ -3629,8 +3860,8 @@
         </p:nvSpPr>
         <p:spPr>
           <a:xfrm>
-            <a:off x="8829675" y="3743325"/>
-            <a:ext cx="1657350" cy="262890"/>
+            <a:off x="8829675" y="3648837"/>
+            <a:ext cx="1790700" cy="285750"/>
           </a:xfrm>
           <a:prstGeom prst="rect">
             <a:avLst/>
@@ -3644,54 +3875,91 @@
           <a:p>
             <a:pPr algn="l" indent="0" marL="0">
               <a:lnSpc>
-                <a:spcPts val="2070"/>
+                <a:spcPts val="2242"/>
+              </a:lnSpc>
+              <a:buNone/>
+            </a:pPr>
+            <a:r>
+              <a:rPr lang="zh-CN" altLang="en-US" sz="1950" b="1" dirty="0">
+                <a:solidFill>
+                  <a:srgbClr val="FFFFFF"/>
+                </a:solidFill>
+                <a:latin typeface="Noto Sans CJK SC" pitchFamily="34" charset="0"/>
+                <a:ea typeface="Noto Sans CJK SC" pitchFamily="34" charset="-122"/>
+                <a:cs typeface="Noto Sans CJK SC" pitchFamily="34" charset="-120"/>
+              </a:rPr>
+              <a:t>主要终点与反证</a:t>
+            </a:r>
+            <a:endParaRPr lang="zh-CN" sz="1950" dirty="0"/>
+          </a:p>
+        </p:txBody>
+      </p:sp>
+      <p:sp>
+        <p:nvSpPr>
+          <p:cNvPr id="41" name="T44/card/region-2/body"/>
+          <p:cNvSpPr/>
+          <p:nvPr/>
+        </p:nvSpPr>
+        <p:spPr>
+          <a:xfrm>
+            <a:off x="8743950" y="4106037"/>
+            <a:ext cx="2857500" cy="1792891"/>
+          </a:xfrm>
+          <a:prstGeom prst="rect">
+            <a:avLst/>
+          </a:prstGeom>
+          <a:noFill/>
+          <a:ln/>
+        </p:spPr>
+        <p:txBody>
+          <a:bodyPr wrap="none" lIns="0" tIns="0" rIns="0" bIns="0" rtlCol="0" anchor="t"/>
+          <a:lstStyle/>
+          <a:p>
+            <a:pPr algn="l" indent="0" marL="0">
+              <a:lnSpc>
+                <a:spcPts val="2232"/>
+              </a:lnSpc>
+              <a:buNone/>
+            </a:pPr>
+            <a:r>
+              <a:rPr lang="zh-CN" altLang="en-US" sz="1800" dirty="0">
+                <a:solidFill>
+                  <a:srgbClr val="1C2430"/>
+                </a:solidFill>
+                <a:latin typeface="Noto Sans CJK SC" pitchFamily="34" charset="0"/>
+                <a:ea typeface="Noto Sans CJK SC" pitchFamily="34" charset="-122"/>
+                <a:cs typeface="Noto Sans CJK SC" pitchFamily="34" charset="-120"/>
+              </a:rPr>
+              <a:t>定义可测的</a:t>
+            </a:r>
+            <a:pPr algn="l" indent="0" marL="0">
+              <a:lnSpc>
+                <a:spcPts val="2232"/>
               </a:lnSpc>
               <a:buNone/>
             </a:pPr>
             <a:r>
               <a:rPr lang="zh-CN" altLang="en-US" sz="1800" b="1" dirty="0">
                 <a:solidFill>
-                  <a:srgbClr val="FFFFFF"/>
-                </a:solidFill>
-                <a:latin typeface="Noto Sans CJK SC" pitchFamily="34" charset="0"/>
-                <a:ea typeface="Noto Sans CJK SC" pitchFamily="34" charset="-122"/>
-                <a:cs typeface="Noto Sans CJK SC" pitchFamily="34" charset="-120"/>
-              </a:rPr>
-              <a:t>主要终点与反证</a:t>
+                  <a:srgbClr val="A24736"/>
+                </a:solidFill>
+                <a:latin typeface="Noto Sans CJK SC" pitchFamily="34" charset="0"/>
+                <a:ea typeface="Noto Sans CJK SC" pitchFamily="34" charset="-122"/>
+                <a:cs typeface="Noto Sans CJK SC" pitchFamily="34" charset="-120"/>
+              </a:rPr>
+              <a:t>主要终点</a:t>
             </a:r>
             <a:endParaRPr lang="zh-CN" sz="1800" dirty="0"/>
           </a:p>
-        </p:txBody>
-      </p:sp>
-      <p:sp>
-        <p:nvSpPr>
-          <p:cNvPr id="41" name="T44/card/region-2/body"/>
-          <p:cNvSpPr/>
-          <p:nvPr/>
-        </p:nvSpPr>
-        <p:spPr>
-          <a:xfrm>
-            <a:off x="8743950" y="4177665"/>
-            <a:ext cx="2857500" cy="1727835"/>
-          </a:xfrm>
-          <a:prstGeom prst="rect">
-            <a:avLst/>
-          </a:prstGeom>
-          <a:noFill/>
-          <a:ln/>
-        </p:spPr>
-        <p:txBody>
-          <a:bodyPr wrap="none" lIns="0" tIns="0" rIns="0" bIns="0" rtlCol="0" anchor="t"/>
-          <a:lstStyle/>
-          <a:p>
-            <a:pPr algn="l" indent="0" marL="0">
-              <a:lnSpc>
-                <a:spcPts val="2139"/>
-              </a:lnSpc>
-              <a:buNone/>
-            </a:pPr>
-            <a:r>
-              <a:rPr lang="zh-CN" altLang="en-US" sz="1725" dirty="0">
+          <a:p>
+            <a:pPr algn="l" indent="0" marL="0">
+              <a:lnSpc>
+                <a:spcPts val="2232"/>
+              </a:lnSpc>
+              <a:buNone/>
+            </a:pPr>
+            <a:r>
+              <a:rPr lang="zh-CN" altLang="en-US" sz="1800" dirty="0">
                 <a:solidFill>
                   <a:srgbClr val="1C2430"/>
                 </a:solidFill>
@@ -3699,19 +3967,36 @@
                 <a:ea typeface="Noto Sans CJK SC" pitchFamily="34" charset="-122"/>
                 <a:cs typeface="Noto Sans CJK SC" pitchFamily="34" charset="-120"/>
               </a:rPr>
-              <a:t>定义可测的主要终点</a:t>
-            </a:r>
-            <a:endParaRPr lang="zh-CN" sz="1725" dirty="0"/>
-          </a:p>
-          <a:p>
-            <a:pPr algn="l" indent="0" marL="0">
-              <a:lnSpc>
-                <a:spcPts val="2139"/>
-              </a:lnSpc>
-              <a:buNone/>
-            </a:pPr>
-            <a:r>
-              <a:rPr lang="zh-CN" altLang="en-US" sz="1725" dirty="0">
+              <a:t>统一盲评与统计</a:t>
+            </a:r>
+            <a:pPr algn="l" indent="0" marL="0">
+              <a:lnSpc>
+                <a:spcPts val="2232"/>
+              </a:lnSpc>
+              <a:buNone/>
+            </a:pPr>
+            <a:r>
+              <a:rPr lang="zh-CN" altLang="en-US" sz="1800" b="1" dirty="0">
+                <a:solidFill>
+                  <a:srgbClr val="A24736"/>
+                </a:solidFill>
+                <a:latin typeface="Noto Sans CJK SC" pitchFamily="34" charset="0"/>
+                <a:ea typeface="Noto Sans CJK SC" pitchFamily="34" charset="-122"/>
+                <a:cs typeface="Noto Sans CJK SC" pitchFamily="34" charset="-120"/>
+              </a:rPr>
+              <a:t>单位</a:t>
+            </a:r>
+            <a:endParaRPr lang="zh-CN" sz="1800" dirty="0"/>
+          </a:p>
+          <a:p>
+            <a:pPr algn="l" indent="0" marL="0">
+              <a:lnSpc>
+                <a:spcPts val="2232"/>
+              </a:lnSpc>
+              <a:buNone/>
+            </a:pPr>
+            <a:r>
+              <a:rPr lang="zh-CN" altLang="en-US" sz="1800" dirty="0">
                 <a:solidFill>
                   <a:srgbClr val="1C2430"/>
                 </a:solidFill>
@@ -3719,29 +4004,9 @@
                 <a:ea typeface="Noto Sans CJK SC" pitchFamily="34" charset="-122"/>
                 <a:cs typeface="Noto Sans CJK SC" pitchFamily="34" charset="-120"/>
               </a:rPr>
-              <a:t>统一盲评与统计单位</a:t>
-            </a:r>
-            <a:endParaRPr lang="zh-CN" sz="1725" dirty="0"/>
-          </a:p>
-          <a:p>
-            <a:pPr algn="l" indent="0" marL="0">
-              <a:lnSpc>
-                <a:spcPts val="2139"/>
-              </a:lnSpc>
-              <a:buNone/>
-            </a:pPr>
-            <a:r>
-              <a:rPr lang="zh-CN" altLang="en-US" sz="1725" dirty="0">
-                <a:solidFill>
-                  <a:srgbClr val="1C2430"/>
-                </a:solidFill>
-                <a:latin typeface="Noto Sans CJK SC" pitchFamily="34" charset="0"/>
-                <a:ea typeface="Noto Sans CJK SC" pitchFamily="34" charset="-122"/>
-                <a:cs typeface="Noto Sans CJK SC" pitchFamily="34" charset="-120"/>
-              </a:rPr>
               <a:t>预先规定不支持假说的结果</a:t>
             </a:r>
-            <a:endParaRPr lang="zh-CN" sz="1725" dirty="0"/>
+            <a:endParaRPr lang="zh-CN" sz="1800" dirty="0"/>
           </a:p>
         </p:txBody>
       </p:sp>
@@ -3781,7 +4046,7 @@
                 <a:ea typeface="Noto Sans CJK SC" pitchFamily="34" charset="-122"/>
                 <a:cs typeface="Noto Sans CJK SC" pitchFamily="34" charset="-120"/>
               </a:rPr>
-              <a:t>T1 · 2026 · 待替换</a:t>
+              <a:t>T1 · 2026 · 书目占位；图表均为合成示例</a:t>
             </a:r>
             <a:endParaRPr lang="zh-CN" sz="1125" dirty="0"/>
           </a:p>
@@ -3890,14 +4155,14 @@
       </p:sp>
       <p:sp>
         <p:nvSpPr>
-          <p:cNvPr id="4" name="T45/kicker"/>
-          <p:cNvSpPr/>
-          <p:nvPr/>
-        </p:nvSpPr>
-        <p:spPr>
-          <a:xfrm>
-            <a:off x="457200" y="152400"/>
-            <a:ext cx="11277600" cy="190500"/>
+          <p:cNvPr id="4" name="T45/title"/>
+          <p:cNvSpPr/>
+          <p:nvPr/>
+        </p:nvSpPr>
+        <p:spPr>
+          <a:xfrm>
+            <a:off x="457200" y="209550"/>
+            <a:ext cx="11277600" cy="438150"/>
           </a:xfrm>
           <a:prstGeom prst="rect">
             <a:avLst/>
@@ -3911,54 +4176,12 @@
           <a:p>
             <a:pPr algn="l" indent="0" marL="0">
               <a:lnSpc>
-                <a:spcPts val="1320"/>
-              </a:lnSpc>
-              <a:buNone/>
-            </a:pPr>
-            <a:r>
-              <a:rPr lang="zh-CN" altLang="en-US" sz="1200" dirty="0">
-                <a:solidFill>
-                  <a:srgbClr val="515B68"/>
-                </a:solidFill>
-                <a:latin typeface="Noto Sans CJK SC" pitchFamily="34" charset="0"/>
-                <a:ea typeface="Noto Sans CJK SC" pitchFamily="34" charset="-122"/>
-                <a:cs typeface="Noto Sans CJK SC" pitchFamily="34" charset="-120"/>
-              </a:rPr>
-              <a:t>结构模板 / 占位说明与合成数据</a:t>
-            </a:r>
-            <a:endParaRPr lang="zh-CN" sz="1200" dirty="0"/>
-          </a:p>
-        </p:txBody>
-      </p:sp>
-      <p:sp>
-        <p:nvSpPr>
-          <p:cNvPr id="5" name="T45/title"/>
-          <p:cNvSpPr/>
-          <p:nvPr/>
-        </p:nvSpPr>
-        <p:spPr>
-          <a:xfrm>
-            <a:off x="457200" y="381000"/>
-            <a:ext cx="11277600" cy="400050"/>
-          </a:xfrm>
-          <a:prstGeom prst="rect">
-            <a:avLst/>
-          </a:prstGeom>
-          <a:noFill/>
-          <a:ln/>
-        </p:spPr>
-        <p:txBody>
-          <a:bodyPr wrap="none" lIns="0" tIns="0" rIns="0" bIns="0" rtlCol="0" anchor="t"/>
-          <a:lstStyle/>
-          <a:p>
-            <a:pPr algn="l" indent="0" marL="0">
-              <a:lnSpc>
-                <a:spcPts val="2856"/>
-              </a:lnSpc>
-              <a:buNone/>
-            </a:pPr>
-            <a:r>
-              <a:rPr lang="zh-CN" altLang="en-US" sz="2550" b="1" dirty="0">
+                <a:spcPts val="3360"/>
+              </a:lnSpc>
+              <a:buNone/>
+            </a:pPr>
+            <a:r>
+              <a:rPr lang="zh-CN" altLang="en-US" sz="3000" b="1" dirty="0">
                 <a:solidFill>
                   <a:srgbClr val="1C2430"/>
                 </a:solidFill>
@@ -3968,26 +4191,49 @@
               </a:rPr>
               <a:t>数据采集与评价计划</a:t>
             </a:r>
-            <a:endParaRPr lang="zh-CN" sz="2550" dirty="0"/>
-          </a:p>
-        </p:txBody>
-      </p:sp>
-      <p:sp>
-        <p:nvSpPr>
-          <p:cNvPr id="6" name="T45/header-rule"/>
-          <p:cNvSpPr/>
-          <p:nvPr/>
-        </p:nvSpPr>
-        <p:spPr>
-          <a:xfrm>
-            <a:off x="457200" y="876300"/>
+            <a:endParaRPr lang="zh-CN" sz="3000" dirty="0"/>
+          </a:p>
+        </p:txBody>
+      </p:sp>
+      <p:sp>
+        <p:nvSpPr>
+          <p:cNvPr id="5" name="T45/header-rule"/>
+          <p:cNvSpPr/>
+          <p:nvPr/>
+        </p:nvSpPr>
+        <p:spPr>
+          <a:xfrm>
+            <a:off x="457200" y="752475"/>
             <a:ext cx="11277600" cy="0"/>
           </a:xfrm>
           <a:prstGeom prst="line">
             <a:avLst/>
           </a:prstGeom>
           <a:noFill/>
-          <a:ln w="11430">
+          <a:ln w="10478">
+            <a:solidFill>
+              <a:srgbClr val="BEC8D4"/>
+            </a:solidFill>
+            <a:prstDash val="solid"/>
+          </a:ln>
+        </p:spPr>
+      </p:sp>
+      <p:sp>
+        <p:nvSpPr>
+          <p:cNvPr id="6" name="T45/header-accent"/>
+          <p:cNvSpPr/>
+          <p:nvPr/>
+        </p:nvSpPr>
+        <p:spPr>
+          <a:xfrm>
+            <a:off x="457200" y="752475"/>
+            <a:ext cx="704850" cy="0"/>
+          </a:xfrm>
+          <a:prstGeom prst="line">
+            <a:avLst/>
+          </a:prstGeom>
+          <a:noFill/>
+          <a:ln w="28575">
             <a:solidFill>
               <a:srgbClr val="173C70"/>
             </a:solidFill>
@@ -4003,7 +4249,7 @@
         </p:nvSpPr>
         <p:spPr>
           <a:xfrm>
-            <a:off x="2743200" y="2181225"/>
+            <a:off x="2743200" y="2027682"/>
             <a:ext cx="704850" cy="0"/>
           </a:xfrm>
           <a:prstGeom prst="line">
@@ -4027,7 +4273,7 @@
         </p:nvSpPr>
         <p:spPr>
           <a:xfrm>
-            <a:off x="5734050" y="2181225"/>
+            <a:off x="5734050" y="2027682"/>
             <a:ext cx="704850" cy="0"/>
           </a:xfrm>
           <a:prstGeom prst="line">
@@ -4051,7 +4297,7 @@
         </p:nvSpPr>
         <p:spPr>
           <a:xfrm>
-            <a:off x="8724900" y="2181225"/>
+            <a:off x="8724900" y="2027682"/>
             <a:ext cx="704850" cy="0"/>
           </a:xfrm>
           <a:prstGeom prst="line">
@@ -4075,14 +4321,14 @@
         </p:nvSpPr>
         <p:spPr>
           <a:xfrm>
-            <a:off x="457200" y="1562100"/>
-            <a:ext cx="2286000" cy="1238250"/>
+            <a:off x="457200" y="1384745"/>
+            <a:ext cx="2286000" cy="1285875"/>
           </a:xfrm>
           <a:prstGeom prst="rect">
             <a:avLst/>
           </a:prstGeom>
           <a:solidFill>
-            <a:srgbClr val="FFFFFF"/>
+            <a:srgbClr val="F0F3F6"/>
           </a:solidFill>
           <a:ln w="11430">
             <a:solidFill>
@@ -4100,7 +4346,7 @@
         </p:nvSpPr>
         <p:spPr>
           <a:xfrm>
-            <a:off x="457200" y="1562100"/>
+            <a:off x="457200" y="1384745"/>
             <a:ext cx="2286000" cy="0"/>
           </a:xfrm>
           <a:prstGeom prst="line">
@@ -4109,7 +4355,7 @@
           <a:noFill/>
           <a:ln w="19050">
             <a:solidFill>
-              <a:srgbClr val="173C70"/>
+              <a:srgbClr val="536A7A"/>
             </a:solidFill>
             <a:prstDash val="solid"/>
           </a:ln>
@@ -4123,7 +4369,7 @@
         </p:nvSpPr>
         <p:spPr>
           <a:xfrm>
-            <a:off x="571500" y="1657350"/>
+            <a:off x="571500" y="1479995"/>
             <a:ext cx="2057400" cy="266700"/>
           </a:xfrm>
           <a:prstGeom prst="rect">
@@ -4145,7 +4391,7 @@
             <a:r>
               <a:rPr lang="zh-CN" altLang="en-US" sz="1800" b="1" dirty="0">
                 <a:solidFill>
-                  <a:srgbClr val="173C70"/>
+                  <a:srgbClr val="536A7A"/>
                 </a:solidFill>
                 <a:latin typeface="Noto Sans CJK SC" pitchFamily="34" charset="0"/>
                 <a:ea typeface="Noto Sans CJK SC" pitchFamily="34" charset="-122"/>
@@ -4165,8 +4411,8 @@
         </p:nvSpPr>
         <p:spPr>
           <a:xfrm>
-            <a:off x="571500" y="1971675"/>
-            <a:ext cx="2057400" cy="742950"/>
+            <a:off x="571500" y="1794320"/>
+            <a:ext cx="2057400" cy="790575"/>
           </a:xfrm>
           <a:prstGeom prst="rect">
             <a:avLst/>
@@ -4193,7 +4439,7 @@
                 <a:ea typeface="Noto Sans CJK SC" pitchFamily="34" charset="-122"/>
                 <a:cs typeface="Noto Sans CJK SC" pitchFamily="34" charset="-120"/>
               </a:rPr>
-              <a:t>填写接口与条件</a:t>
+              <a:t>独立实验单位</a:t>
             </a:r>
             <a:endParaRPr lang="zh-CN" sz="1650" dirty="0"/>
           </a:p>
@@ -4207,14 +4453,14 @@
         </p:nvSpPr>
         <p:spPr>
           <a:xfrm>
-            <a:off x="3448050" y="1562100"/>
-            <a:ext cx="2286000" cy="1238250"/>
+            <a:off x="3448050" y="1384745"/>
+            <a:ext cx="2286000" cy="1285875"/>
           </a:xfrm>
           <a:prstGeom prst="rect">
             <a:avLst/>
           </a:prstGeom>
           <a:solidFill>
-            <a:srgbClr val="FFFFFF"/>
+            <a:srgbClr val="FAEEE8"/>
           </a:solidFill>
           <a:ln w="11430">
             <a:solidFill>
@@ -4232,7 +4478,7 @@
         </p:nvSpPr>
         <p:spPr>
           <a:xfrm>
-            <a:off x="3448050" y="1562100"/>
+            <a:off x="3448050" y="1384745"/>
             <a:ext cx="2286000" cy="0"/>
           </a:xfrm>
           <a:prstGeom prst="line">
@@ -4241,7 +4487,7 @@
           <a:noFill/>
           <a:ln w="19050">
             <a:solidFill>
-              <a:srgbClr val="173C70"/>
+              <a:srgbClr val="A24736"/>
             </a:solidFill>
             <a:prstDash val="solid"/>
           </a:ln>
@@ -4255,7 +4501,7 @@
         </p:nvSpPr>
         <p:spPr>
           <a:xfrm>
-            <a:off x="3562350" y="1657350"/>
+            <a:off x="3562350" y="1479995"/>
             <a:ext cx="2057400" cy="266700"/>
           </a:xfrm>
           <a:prstGeom prst="rect">
@@ -4277,7 +4523,7 @@
             <a:r>
               <a:rPr lang="zh-CN" altLang="en-US" sz="1800" b="1" dirty="0">
                 <a:solidFill>
-                  <a:srgbClr val="173C70"/>
+                  <a:srgbClr val="A24736"/>
                 </a:solidFill>
                 <a:latin typeface="Noto Sans CJK SC" pitchFamily="34" charset="0"/>
                 <a:ea typeface="Noto Sans CJK SC" pitchFamily="34" charset="-122"/>
@@ -4297,8 +4543,8 @@
         </p:nvSpPr>
         <p:spPr>
           <a:xfrm>
-            <a:off x="3562350" y="1971675"/>
-            <a:ext cx="2057400" cy="742950"/>
+            <a:off x="3562350" y="1794320"/>
+            <a:ext cx="2057400" cy="790575"/>
           </a:xfrm>
           <a:prstGeom prst="rect">
             <a:avLst/>
@@ -4325,7 +4571,7 @@
                 <a:ea typeface="Noto Sans CJK SC" pitchFamily="34" charset="-122"/>
                 <a:cs typeface="Noto Sans CJK SC" pitchFamily="34" charset="-120"/>
               </a:rPr>
-              <a:t>填写接口与条件</a:t>
+              <a:t>统一测量与版本</a:t>
             </a:r>
             <a:endParaRPr lang="zh-CN" sz="1650" dirty="0"/>
           </a:p>
@@ -4339,14 +4585,14 @@
         </p:nvSpPr>
         <p:spPr>
           <a:xfrm>
-            <a:off x="6438900" y="1562100"/>
-            <a:ext cx="2286000" cy="1238250"/>
+            <a:off x="6438900" y="1384745"/>
+            <a:ext cx="2286000" cy="1285875"/>
           </a:xfrm>
           <a:prstGeom prst="rect">
             <a:avLst/>
           </a:prstGeom>
           <a:solidFill>
-            <a:srgbClr val="FFFFFF"/>
+            <a:srgbClr val="EAF2FA"/>
           </a:solidFill>
           <a:ln w="11430">
             <a:solidFill>
@@ -4364,7 +4610,7 @@
         </p:nvSpPr>
         <p:spPr>
           <a:xfrm>
-            <a:off x="6438900" y="1562100"/>
+            <a:off x="6438900" y="1384745"/>
             <a:ext cx="2286000" cy="0"/>
           </a:xfrm>
           <a:prstGeom prst="line">
@@ -4373,7 +4619,7 @@
           <a:noFill/>
           <a:ln w="19050">
             <a:solidFill>
-              <a:srgbClr val="173C70"/>
+              <a:srgbClr val="235E96"/>
             </a:solidFill>
             <a:prstDash val="solid"/>
           </a:ln>
@@ -4387,7 +4633,7 @@
         </p:nvSpPr>
         <p:spPr>
           <a:xfrm>
-            <a:off x="6553200" y="1657350"/>
+            <a:off x="6553200" y="1479995"/>
             <a:ext cx="2057400" cy="266700"/>
           </a:xfrm>
           <a:prstGeom prst="rect">
@@ -4409,7 +4655,7 @@
             <a:r>
               <a:rPr lang="zh-CN" altLang="en-US" sz="1800" b="1" dirty="0">
                 <a:solidFill>
-                  <a:srgbClr val="173C70"/>
+                  <a:srgbClr val="235E96"/>
                 </a:solidFill>
                 <a:latin typeface="Noto Sans CJK SC" pitchFamily="34" charset="0"/>
                 <a:ea typeface="Noto Sans CJK SC" pitchFamily="34" charset="-122"/>
@@ -4429,8 +4675,8 @@
         </p:nvSpPr>
         <p:spPr>
           <a:xfrm>
-            <a:off x="6553200" y="1971675"/>
-            <a:ext cx="2057400" cy="742950"/>
+            <a:off x="6553200" y="1794320"/>
+            <a:ext cx="2057400" cy="790575"/>
           </a:xfrm>
           <a:prstGeom prst="rect">
             <a:avLst/>
@@ -4457,7 +4703,7 @@
                 <a:ea typeface="Noto Sans CJK SC" pitchFamily="34" charset="-122"/>
                 <a:cs typeface="Noto Sans CJK SC" pitchFamily="34" charset="-120"/>
               </a:rPr>
-              <a:t>填写接口与条件</a:t>
+              <a:t>冻结主要终点</a:t>
             </a:r>
             <a:endParaRPr lang="zh-CN" sz="1650" dirty="0"/>
           </a:p>
@@ -4471,14 +4717,14 @@
         </p:nvSpPr>
         <p:spPr>
           <a:xfrm>
-            <a:off x="9429750" y="1562100"/>
-            <a:ext cx="2305050" cy="1238250"/>
+            <a:off x="9429750" y="1384745"/>
+            <a:ext cx="2305050" cy="1285875"/>
           </a:xfrm>
           <a:prstGeom prst="rect">
             <a:avLst/>
           </a:prstGeom>
           <a:solidFill>
-            <a:srgbClr val="FFFFFF"/>
+            <a:srgbClr val="E9F4F0"/>
           </a:solidFill>
           <a:ln w="11430">
             <a:solidFill>
@@ -4496,7 +4742,7 @@
         </p:nvSpPr>
         <p:spPr>
           <a:xfrm>
-            <a:off x="9429750" y="1562100"/>
+            <a:off x="9429750" y="1384745"/>
             <a:ext cx="2305050" cy="0"/>
           </a:xfrm>
           <a:prstGeom prst="line">
@@ -4505,7 +4751,7 @@
           <a:noFill/>
           <a:ln w="19050">
             <a:solidFill>
-              <a:srgbClr val="173C70"/>
+              <a:srgbClr val="146C63"/>
             </a:solidFill>
             <a:prstDash val="solid"/>
           </a:ln>
@@ -4519,7 +4765,7 @@
         </p:nvSpPr>
         <p:spPr>
           <a:xfrm>
-            <a:off x="9544050" y="1657350"/>
+            <a:off x="9544050" y="1479995"/>
             <a:ext cx="2076450" cy="266700"/>
           </a:xfrm>
           <a:prstGeom prst="rect">
@@ -4541,7 +4787,7 @@
             <a:r>
               <a:rPr lang="zh-CN" altLang="en-US" sz="1800" b="1" dirty="0">
                 <a:solidFill>
-                  <a:srgbClr val="173C70"/>
+                  <a:srgbClr val="146C63"/>
                 </a:solidFill>
                 <a:latin typeface="Noto Sans CJK SC" pitchFamily="34" charset="0"/>
                 <a:ea typeface="Noto Sans CJK SC" pitchFamily="34" charset="-122"/>
@@ -4561,8 +4807,8 @@
         </p:nvSpPr>
         <p:spPr>
           <a:xfrm>
-            <a:off x="9544050" y="1971675"/>
-            <a:ext cx="2076450" cy="742950"/>
+            <a:off x="9544050" y="1794320"/>
+            <a:ext cx="2076450" cy="790575"/>
           </a:xfrm>
           <a:prstGeom prst="rect">
             <a:avLst/>
@@ -4589,7 +4835,7 @@
                 <a:ea typeface="Noto Sans CJK SC" pitchFamily="34" charset="-122"/>
                 <a:cs typeface="Noto Sans CJK SC" pitchFamily="34" charset="-120"/>
               </a:rPr>
-              <a:t>填写接口与条件</a:t>
+              <a:t>单独留出环境</a:t>
             </a:r>
             <a:endParaRPr lang="zh-CN" sz="1650" dirty="0"/>
           </a:p>
@@ -4603,8 +4849,8 @@
         </p:nvSpPr>
         <p:spPr>
           <a:xfrm>
-            <a:off x="457200" y="3829050"/>
-            <a:ext cx="5467350" cy="2190750"/>
+            <a:off x="457200" y="3738944"/>
+            <a:ext cx="5467350" cy="2275046"/>
           </a:xfrm>
           <a:prstGeom prst="rect">
             <a:avLst/>
@@ -4628,14 +4874,14 @@
         </p:nvSpPr>
         <p:spPr>
           <a:xfrm>
-            <a:off x="466725" y="3838575"/>
+            <a:off x="466725" y="3748469"/>
             <a:ext cx="5448300" cy="371475"/>
           </a:xfrm>
           <a:prstGeom prst="rect">
             <a:avLst/>
           </a:prstGeom>
           <a:solidFill>
-            <a:srgbClr val="EEF3F8"/>
+            <a:srgbClr val="F0F3F6"/>
           </a:solidFill>
           <a:ln w="12700">
             <a:solidFill>
@@ -4655,7 +4901,7 @@
         </p:nvSpPr>
         <p:spPr>
           <a:xfrm>
-            <a:off x="457200" y="4210050"/>
+            <a:off x="457200" y="4119944"/>
             <a:ext cx="5467350" cy="0"/>
           </a:xfrm>
           <a:prstGeom prst="line">
@@ -4678,8 +4924,8 @@
         </p:nvSpPr>
         <p:spPr>
           <a:xfrm>
-            <a:off x="581025" y="3886200"/>
-            <a:ext cx="5219700" cy="276225"/>
+            <a:off x="581025" y="3786569"/>
+            <a:ext cx="5219700" cy="295275"/>
           </a:xfrm>
           <a:prstGeom prst="rect">
             <a:avLst/>
@@ -4693,35 +4939,194 @@
           <a:p>
             <a:pPr algn="l" indent="0" marL="0">
               <a:lnSpc>
-                <a:spcPts val="2070"/>
+                <a:spcPts val="2242"/>
+              </a:lnSpc>
+              <a:buNone/>
+            </a:pPr>
+            <a:r>
+              <a:rPr lang="zh-CN" altLang="en-US" sz="1950" b="1" dirty="0">
+                <a:solidFill>
+                  <a:srgbClr val="536A7A"/>
+                </a:solidFill>
+                <a:latin typeface="Noto Sans CJK SC" pitchFamily="34" charset="0"/>
+                <a:ea typeface="Noto Sans CJK SC" pitchFamily="34" charset="-122"/>
+                <a:cs typeface="Noto Sans CJK SC" pitchFamily="34" charset="-120"/>
+              </a:rPr>
+              <a:t>样本量与采集计划</a:t>
+            </a:r>
+            <a:endParaRPr lang="zh-CN" sz="1950" dirty="0"/>
+          </a:p>
+        </p:txBody>
+      </p:sp>
+      <p:sp>
+        <p:nvSpPr>
+          <p:cNvPr id="30" name="T45/card/region-1/body"/>
+          <p:cNvSpPr/>
+          <p:nvPr/>
+        </p:nvSpPr>
+        <p:spPr>
+          <a:xfrm>
+            <a:off x="590550" y="4224719"/>
+            <a:ext cx="5200650" cy="1694021"/>
+          </a:xfrm>
+          <a:prstGeom prst="rect">
+            <a:avLst/>
+          </a:prstGeom>
+          <a:noFill/>
+          <a:ln/>
+        </p:spPr>
+        <p:txBody>
+          <a:bodyPr wrap="none" lIns="0" tIns="0" rIns="0" bIns="0" rtlCol="0" anchor="t"/>
+          <a:lstStyle/>
+          <a:p>
+            <a:pPr algn="l" indent="0" marL="0">
+              <a:lnSpc>
+                <a:spcPts val="2232"/>
+              </a:lnSpc>
+              <a:buNone/>
+            </a:pPr>
+            <a:r>
+              <a:rPr lang="zh-CN" altLang="en-US" sz="1800" dirty="0">
+                <a:solidFill>
+                  <a:srgbClr val="1C2430"/>
+                </a:solidFill>
+                <a:latin typeface="Noto Sans CJK SC" pitchFamily="34" charset="0"/>
+                <a:ea typeface="Noto Sans CJK SC" pitchFamily="34" charset="-122"/>
+                <a:cs typeface="Noto Sans CJK SC" pitchFamily="34" charset="-120"/>
+              </a:rPr>
+              <a:t>按</a:t>
+            </a:r>
+            <a:pPr algn="l" indent="0" marL="0">
+              <a:lnSpc>
+                <a:spcPts val="2232"/>
               </a:lnSpc>
               <a:buNone/>
             </a:pPr>
             <a:r>
               <a:rPr lang="zh-CN" altLang="en-US" sz="1800" b="1" dirty="0">
                 <a:solidFill>
-                  <a:srgbClr val="173C70"/>
-                </a:solidFill>
-                <a:latin typeface="Noto Sans CJK SC" pitchFamily="34" charset="0"/>
-                <a:ea typeface="Noto Sans CJK SC" pitchFamily="34" charset="-122"/>
-                <a:cs typeface="Noto Sans CJK SC" pitchFamily="34" charset="-120"/>
-              </a:rPr>
-              <a:t>样本量与采集计划</a:t>
+                  <a:srgbClr val="536A7A"/>
+                </a:solidFill>
+                <a:latin typeface="Noto Sans CJK SC" pitchFamily="34" charset="0"/>
+                <a:ea typeface="Noto Sans CJK SC" pitchFamily="34" charset="-122"/>
+                <a:cs typeface="Noto Sans CJK SC" pitchFamily="34" charset="-120"/>
+              </a:rPr>
+              <a:t>独立实验</a:t>
+            </a:r>
+            <a:pPr algn="l" indent="0" marL="0">
+              <a:lnSpc>
+                <a:spcPts val="2232"/>
+              </a:lnSpc>
+              <a:buNone/>
+            </a:pPr>
+            <a:r>
+              <a:rPr lang="zh-CN" altLang="en-US" sz="1800" b="1" dirty="0">
+                <a:solidFill>
+                  <a:srgbClr val="536A7A"/>
+                </a:solidFill>
+                <a:latin typeface="Noto Sans CJK SC" pitchFamily="34" charset="0"/>
+                <a:ea typeface="Noto Sans CJK SC" pitchFamily="34" charset="-122"/>
+                <a:cs typeface="Noto Sans CJK SC" pitchFamily="34" charset="-120"/>
+              </a:rPr>
+              <a:t>单位</a:t>
+            </a:r>
+            <a:pPr algn="l" indent="0" marL="0">
+              <a:lnSpc>
+                <a:spcPts val="2232"/>
+              </a:lnSpc>
+              <a:buNone/>
+            </a:pPr>
+            <a:r>
+              <a:rPr lang="zh-CN" altLang="en-US" sz="1800" dirty="0">
+                <a:solidFill>
+                  <a:srgbClr val="1C2430"/>
+                </a:solidFill>
+                <a:latin typeface="Noto Sans CJK SC" pitchFamily="34" charset="0"/>
+                <a:ea typeface="Noto Sans CJK SC" pitchFamily="34" charset="-122"/>
+                <a:cs typeface="Noto Sans CJK SC" pitchFamily="34" charset="-120"/>
+              </a:rPr>
+              <a:t>规划采集</a:t>
             </a:r>
             <a:endParaRPr lang="zh-CN" sz="1800" dirty="0"/>
           </a:p>
-        </p:txBody>
-      </p:sp>
-      <p:sp>
-        <p:nvSpPr>
-          <p:cNvPr id="30" name="T45/card/region-1/body"/>
-          <p:cNvSpPr/>
-          <p:nvPr/>
-        </p:nvSpPr>
-        <p:spPr>
-          <a:xfrm>
-            <a:off x="590550" y="4324350"/>
-            <a:ext cx="5200650" cy="1600200"/>
+          <a:p>
+            <a:pPr algn="l" indent="0" marL="0">
+              <a:lnSpc>
+                <a:spcPts val="2232"/>
+              </a:lnSpc>
+              <a:buNone/>
+            </a:pPr>
+            <a:r>
+              <a:rPr lang="zh-CN" altLang="en-US" sz="1800" dirty="0">
+                <a:solidFill>
+                  <a:srgbClr val="1C2430"/>
+                </a:solidFill>
+                <a:latin typeface="Noto Sans CJK SC" pitchFamily="34" charset="0"/>
+                <a:ea typeface="Noto Sans CJK SC" pitchFamily="34" charset="-122"/>
+                <a:cs typeface="Noto Sans CJK SC" pitchFamily="34" charset="-120"/>
+              </a:rPr>
+              <a:t>依据预期效应与变异说明样本量</a:t>
+            </a:r>
+            <a:endParaRPr lang="zh-CN" sz="1800" dirty="0"/>
+          </a:p>
+        </p:txBody>
+      </p:sp>
+      <p:sp>
+        <p:nvSpPr>
+          <p:cNvPr id="31" name="T45/card/region-2/heading-rule"/>
+          <p:cNvSpPr/>
+          <p:nvPr/>
+        </p:nvSpPr>
+        <p:spPr>
+          <a:xfrm>
+            <a:off x="6248400" y="4100894"/>
+            <a:ext cx="5486400" cy="0"/>
+          </a:xfrm>
+          <a:prstGeom prst="line">
+            <a:avLst/>
+          </a:prstGeom>
+          <a:noFill/>
+          <a:ln w="9525">
+            <a:solidFill>
+              <a:srgbClr val="BEC8D4"/>
+            </a:solidFill>
+            <a:prstDash val="solid"/>
+          </a:ln>
+        </p:spPr>
+      </p:sp>
+      <p:sp>
+        <p:nvSpPr>
+          <p:cNvPr id="32" name="T45/card/region-2/heading-mark"/>
+          <p:cNvSpPr/>
+          <p:nvPr/>
+        </p:nvSpPr>
+        <p:spPr>
+          <a:xfrm>
+            <a:off x="6248400" y="4100894"/>
+            <a:ext cx="342900" cy="0"/>
+          </a:xfrm>
+          <a:prstGeom prst="line">
+            <a:avLst/>
+          </a:prstGeom>
+          <a:noFill/>
+          <a:ln w="17145">
+            <a:solidFill>
+              <a:srgbClr val="235E96"/>
+            </a:solidFill>
+            <a:prstDash val="solid"/>
+          </a:ln>
+        </p:spPr>
+      </p:sp>
+      <p:sp>
+        <p:nvSpPr>
+          <p:cNvPr id="33" name="T45/card/region-2/title"/>
+          <p:cNvSpPr/>
+          <p:nvPr/>
+        </p:nvSpPr>
+        <p:spPr>
+          <a:xfrm>
+            <a:off x="6248400" y="3757994"/>
+            <a:ext cx="5486400" cy="323850"/>
           </a:xfrm>
           <a:prstGeom prst="rect">
             <a:avLst/>
@@ -4735,12 +5140,54 @@
           <a:p>
             <a:pPr algn="l" indent="0" marL="0">
               <a:lnSpc>
-                <a:spcPts val="2139"/>
-              </a:lnSpc>
-              <a:buNone/>
-            </a:pPr>
-            <a:r>
-              <a:rPr lang="zh-CN" altLang="en-US" sz="1725" dirty="0">
+                <a:spcPts val="2242"/>
+              </a:lnSpc>
+              <a:buNone/>
+            </a:pPr>
+            <a:r>
+              <a:rPr lang="zh-CN" altLang="en-US" sz="1950" b="1" dirty="0">
+                <a:solidFill>
+                  <a:srgbClr val="235E96"/>
+                </a:solidFill>
+                <a:latin typeface="Noto Sans CJK SC" pitchFamily="34" charset="0"/>
+                <a:ea typeface="Noto Sans CJK SC" pitchFamily="34" charset="-122"/>
+                <a:cs typeface="Noto Sans CJK SC" pitchFamily="34" charset="-120"/>
+              </a:rPr>
+              <a:t>留出与分析计划</a:t>
+            </a:r>
+            <a:endParaRPr lang="zh-CN" sz="1950" dirty="0"/>
+          </a:p>
+        </p:txBody>
+      </p:sp>
+      <p:sp>
+        <p:nvSpPr>
+          <p:cNvPr id="34" name="T45/card/region-2/body"/>
+          <p:cNvSpPr/>
+          <p:nvPr/>
+        </p:nvSpPr>
+        <p:spPr>
+          <a:xfrm>
+            <a:off x="6248400" y="4234244"/>
+            <a:ext cx="5486400" cy="1741646"/>
+          </a:xfrm>
+          <a:prstGeom prst="rect">
+            <a:avLst/>
+          </a:prstGeom>
+          <a:noFill/>
+          <a:ln/>
+        </p:spPr>
+        <p:txBody>
+          <a:bodyPr wrap="none" lIns="0" tIns="0" rIns="0" bIns="0" rtlCol="0" anchor="t"/>
+          <a:lstStyle/>
+          <a:p>
+            <a:pPr algn="l" indent="0" marL="0">
+              <a:lnSpc>
+                <a:spcPts val="2232"/>
+              </a:lnSpc>
+              <a:buNone/>
+            </a:pPr>
+            <a:r>
+              <a:rPr lang="zh-CN" altLang="en-US" sz="1800" dirty="0">
                 <a:solidFill>
                   <a:srgbClr val="1C2430"/>
                 </a:solidFill>
@@ -4748,19 +5195,33 @@
                 <a:ea typeface="Noto Sans CJK SC" pitchFamily="34" charset="-122"/>
                 <a:cs typeface="Noto Sans CJK SC" pitchFamily="34" charset="-120"/>
               </a:rPr>
-              <a:t>按独立实验单位规划采集</a:t>
-            </a:r>
-            <a:endParaRPr lang="zh-CN" sz="1725" dirty="0"/>
-          </a:p>
-          <a:p>
-            <a:pPr algn="l" indent="0" marL="0">
-              <a:lnSpc>
-                <a:spcPts val="2139"/>
-              </a:lnSpc>
-              <a:buNone/>
-            </a:pPr>
-            <a:r>
-              <a:rPr lang="zh-CN" altLang="en-US" sz="1725" dirty="0">
+              <a:t>在采集前明确</a:t>
+            </a:r>
+            <a:pPr algn="l" indent="0" marL="0">
+              <a:lnSpc>
+                <a:spcPts val="2232"/>
+              </a:lnSpc>
+              <a:buNone/>
+            </a:pPr>
+            <a:r>
+              <a:rPr lang="zh-CN" altLang="en-US" sz="1800" b="1" dirty="0">
+                <a:solidFill>
+                  <a:srgbClr val="235E96"/>
+                </a:solidFill>
+                <a:latin typeface="Noto Sans CJK SC" pitchFamily="34" charset="0"/>
+                <a:ea typeface="Noto Sans CJK SC" pitchFamily="34" charset="-122"/>
+                <a:cs typeface="Noto Sans CJK SC" pitchFamily="34" charset="-120"/>
+              </a:rPr>
+              <a:t>主要终点</a:t>
+            </a:r>
+            <a:pPr algn="l" indent="0" marL="0">
+              <a:lnSpc>
+                <a:spcPts val="2232"/>
+              </a:lnSpc>
+              <a:buNone/>
+            </a:pPr>
+            <a:r>
+              <a:rPr lang="zh-CN" altLang="en-US" sz="1800" dirty="0">
                 <a:solidFill>
                   <a:srgbClr val="1C2430"/>
                 </a:solidFill>
@@ -4768,120 +5229,10 @@
                 <a:ea typeface="Noto Sans CJK SC" pitchFamily="34" charset="-122"/>
                 <a:cs typeface="Noto Sans CJK SC" pitchFamily="34" charset="-120"/>
               </a:rPr>
-              <a:t>依据预期效应与变异说明样本量</a:t>
-            </a:r>
-            <a:endParaRPr lang="zh-CN" sz="1725" dirty="0"/>
-          </a:p>
-        </p:txBody>
-      </p:sp>
-      <p:sp>
-        <p:nvSpPr>
-          <p:cNvPr id="31" name="T45/card/region-2/heading-rule"/>
-          <p:cNvSpPr/>
-          <p:nvPr/>
-        </p:nvSpPr>
-        <p:spPr>
-          <a:xfrm>
-            <a:off x="6248400" y="4191000"/>
-            <a:ext cx="5486400" cy="0"/>
-          </a:xfrm>
-          <a:prstGeom prst="line">
-            <a:avLst/>
-          </a:prstGeom>
-          <a:noFill/>
-          <a:ln w="9525">
-            <a:solidFill>
-              <a:srgbClr val="BEC8D4"/>
-            </a:solidFill>
-            <a:prstDash val="solid"/>
-          </a:ln>
-        </p:spPr>
-      </p:sp>
-      <p:sp>
-        <p:nvSpPr>
-          <p:cNvPr id="32" name="T45/card/region-2/heading-mark"/>
-          <p:cNvSpPr/>
-          <p:nvPr/>
-        </p:nvSpPr>
-        <p:spPr>
-          <a:xfrm>
-            <a:off x="6248400" y="4191000"/>
-            <a:ext cx="342900" cy="0"/>
-          </a:xfrm>
-          <a:prstGeom prst="line">
-            <a:avLst/>
-          </a:prstGeom>
-          <a:noFill/>
-          <a:ln w="17145">
-            <a:solidFill>
-              <a:srgbClr val="173C70"/>
-            </a:solidFill>
-            <a:prstDash val="solid"/>
-          </a:ln>
-        </p:spPr>
-      </p:sp>
-      <p:sp>
-        <p:nvSpPr>
-          <p:cNvPr id="33" name="T45/card/region-2/title"/>
-          <p:cNvSpPr/>
-          <p:nvPr/>
-        </p:nvSpPr>
-        <p:spPr>
-          <a:xfrm>
-            <a:off x="6248400" y="3848100"/>
-            <a:ext cx="5486400" cy="323850"/>
-          </a:xfrm>
-          <a:prstGeom prst="rect">
-            <a:avLst/>
-          </a:prstGeom>
-          <a:noFill/>
-          <a:ln/>
-        </p:spPr>
-        <p:txBody>
-          <a:bodyPr wrap="none" lIns="0" tIns="0" rIns="0" bIns="0" rtlCol="0" anchor="t"/>
-          <a:lstStyle/>
-          <a:p>
-            <a:pPr algn="l" indent="0" marL="0">
-              <a:lnSpc>
-                <a:spcPts val="2156"/>
-              </a:lnSpc>
-              <a:buNone/>
-            </a:pPr>
-            <a:r>
-              <a:rPr lang="zh-CN" altLang="en-US" sz="1875" b="1" dirty="0">
-                <a:solidFill>
-                  <a:srgbClr val="173C70"/>
-                </a:solidFill>
-                <a:latin typeface="Noto Sans CJK SC" pitchFamily="34" charset="0"/>
-                <a:ea typeface="Noto Sans CJK SC" pitchFamily="34" charset="-122"/>
-                <a:cs typeface="Noto Sans CJK SC" pitchFamily="34" charset="-120"/>
-              </a:rPr>
-              <a:t>留出与分析计划</a:t>
-            </a:r>
-            <a:endParaRPr lang="zh-CN" sz="1875" dirty="0"/>
-          </a:p>
-        </p:txBody>
-      </p:sp>
-      <p:sp>
-        <p:nvSpPr>
-          <p:cNvPr id="34" name="T45/card/region-2/body"/>
-          <p:cNvSpPr/>
-          <p:nvPr/>
-        </p:nvSpPr>
-        <p:spPr>
-          <a:xfrm>
-            <a:off x="6248400" y="4324350"/>
-            <a:ext cx="5486400" cy="1657350"/>
-          </a:xfrm>
-          <a:prstGeom prst="rect">
-            <a:avLst/>
-          </a:prstGeom>
-          <a:noFill/>
-          <a:ln/>
-        </p:spPr>
-        <p:txBody>
-          <a:bodyPr wrap="none" lIns="0" tIns="0" rIns="0" bIns="0" rtlCol="0" anchor="t"/>
-          <a:lstStyle/>
+              <a:t>和分析程序</a:t>
+            </a:r>
+            <a:endParaRPr lang="zh-CN" sz="1800" dirty="0"/>
+          </a:p>
           <a:p>
             <a:pPr algn="l" indent="0" marL="0">
               <a:lnSpc>
@@ -4898,11 +5249,8 @@
                 <a:ea typeface="Noto Sans CJK SC" pitchFamily="34" charset="-122"/>
                 <a:cs typeface="Noto Sans CJK SC" pitchFamily="34" charset="-120"/>
               </a:rPr>
-              <a:t>在采集前明确主要终点和分析程序</a:t>
-            </a:r>
-            <a:endParaRPr lang="zh-CN" sz="1800" dirty="0"/>
-          </a:p>
-          <a:p>
+              <a:t>锁定</a:t>
+            </a:r>
             <a:pPr algn="l" indent="0" marL="0">
               <a:lnSpc>
                 <a:spcPts val="2232"/>
@@ -4910,6 +5258,23 @@
               <a:buNone/>
             </a:pPr>
             <a:r>
+              <a:rPr lang="zh-CN" altLang="en-US" sz="1800" b="1" dirty="0">
+                <a:solidFill>
+                  <a:srgbClr val="235E96"/>
+                </a:solidFill>
+                <a:latin typeface="Noto Sans CJK SC" pitchFamily="34" charset="0"/>
+                <a:ea typeface="Noto Sans CJK SC" pitchFamily="34" charset="-122"/>
+                <a:cs typeface="Noto Sans CJK SC" pitchFamily="34" charset="-120"/>
+              </a:rPr>
+              <a:t>独立留出</a:t>
+            </a:r>
+            <a:pPr algn="l" indent="0" marL="0">
+              <a:lnSpc>
+                <a:spcPts val="2232"/>
+              </a:lnSpc>
+              <a:buNone/>
+            </a:pPr>
+            <a:r>
               <a:rPr lang="zh-CN" altLang="en-US" sz="1800" dirty="0">
                 <a:solidFill>
                   <a:srgbClr val="1C2430"/>
@@ -4918,7 +5283,7 @@
                 <a:ea typeface="Noto Sans CJK SC" pitchFamily="34" charset="-122"/>
                 <a:cs typeface="Noto Sans CJK SC" pitchFamily="34" charset="-120"/>
               </a:rPr>
-              <a:t>锁定独立留出条件与缺失值处理</a:t>
+              <a:t>条件与缺失值处理</a:t>
             </a:r>
             <a:endParaRPr lang="zh-CN" sz="1800" dirty="0"/>
           </a:p>
@@ -4960,7 +5325,7 @@
                 <a:ea typeface="Noto Sans CJK SC" pitchFamily="34" charset="-122"/>
                 <a:cs typeface="Noto Sans CJK SC" pitchFamily="34" charset="-120"/>
               </a:rPr>
-              <a:t>T1 · 2026 · 待替换</a:t>
+              <a:t>T1 · 2026 · 书目占位；图表均为合成示例</a:t>
             </a:r>
             <a:endParaRPr lang="zh-CN" sz="1125" dirty="0"/>
           </a:p>
@@ -5069,14 +5434,14 @@
       </p:sp>
       <p:sp>
         <p:nvSpPr>
-          <p:cNvPr id="4" name="T46/kicker"/>
-          <p:cNvSpPr/>
-          <p:nvPr/>
-        </p:nvSpPr>
-        <p:spPr>
-          <a:xfrm>
-            <a:off x="457200" y="152400"/>
-            <a:ext cx="11277600" cy="190500"/>
+          <p:cNvPr id="4" name="T46/title"/>
+          <p:cNvSpPr/>
+          <p:nvPr/>
+        </p:nvSpPr>
+        <p:spPr>
+          <a:xfrm>
+            <a:off x="457200" y="209550"/>
+            <a:ext cx="11277600" cy="438150"/>
           </a:xfrm>
           <a:prstGeom prst="rect">
             <a:avLst/>
@@ -5090,54 +5455,12 @@
           <a:p>
             <a:pPr algn="l" indent="0" marL="0">
               <a:lnSpc>
-                <a:spcPts val="1320"/>
-              </a:lnSpc>
-              <a:buNone/>
-            </a:pPr>
-            <a:r>
-              <a:rPr lang="zh-CN" altLang="en-US" sz="1200" dirty="0">
-                <a:solidFill>
-                  <a:srgbClr val="515B68"/>
-                </a:solidFill>
-                <a:latin typeface="Noto Sans CJK SC" pitchFamily="34" charset="0"/>
-                <a:ea typeface="Noto Sans CJK SC" pitchFamily="34" charset="-122"/>
-                <a:cs typeface="Noto Sans CJK SC" pitchFamily="34" charset="-120"/>
-              </a:rPr>
-              <a:t>结构模板 / 占位说明与合成数据</a:t>
-            </a:r>
-            <a:endParaRPr lang="zh-CN" sz="1200" dirty="0"/>
-          </a:p>
-        </p:txBody>
-      </p:sp>
-      <p:sp>
-        <p:nvSpPr>
-          <p:cNvPr id="5" name="T46/title"/>
-          <p:cNvSpPr/>
-          <p:nvPr/>
-        </p:nvSpPr>
-        <p:spPr>
-          <a:xfrm>
-            <a:off x="457200" y="381000"/>
-            <a:ext cx="11277600" cy="400050"/>
-          </a:xfrm>
-          <a:prstGeom prst="rect">
-            <a:avLst/>
-          </a:prstGeom>
-          <a:noFill/>
-          <a:ln/>
-        </p:spPr>
-        <p:txBody>
-          <a:bodyPr wrap="none" lIns="0" tIns="0" rIns="0" bIns="0" rtlCol="0" anchor="t"/>
-          <a:lstStyle/>
-          <a:p>
-            <a:pPr algn="l" indent="0" marL="0">
-              <a:lnSpc>
-                <a:spcPts val="2856"/>
-              </a:lnSpc>
-              <a:buNone/>
-            </a:pPr>
-            <a:r>
-              <a:rPr lang="zh-CN" altLang="en-US" sz="2550" b="1" dirty="0">
+                <a:spcPts val="3360"/>
+              </a:lnSpc>
+              <a:buNone/>
+            </a:pPr>
+            <a:r>
+              <a:rPr lang="zh-CN" altLang="en-US" sz="3000" b="1" dirty="0">
                 <a:solidFill>
                   <a:srgbClr val="1C2430"/>
                 </a:solidFill>
@@ -5147,26 +5470,49 @@
               </a:rPr>
               <a:t>研究任务与阶段交付</a:t>
             </a:r>
-            <a:endParaRPr lang="zh-CN" sz="2550" dirty="0"/>
-          </a:p>
-        </p:txBody>
-      </p:sp>
-      <p:sp>
-        <p:nvSpPr>
-          <p:cNvPr id="6" name="T46/header-rule"/>
-          <p:cNvSpPr/>
-          <p:nvPr/>
-        </p:nvSpPr>
-        <p:spPr>
-          <a:xfrm>
-            <a:off x="457200" y="876300"/>
+            <a:endParaRPr lang="zh-CN" sz="3000" dirty="0"/>
+          </a:p>
+        </p:txBody>
+      </p:sp>
+      <p:sp>
+        <p:nvSpPr>
+          <p:cNvPr id="5" name="T46/header-rule"/>
+          <p:cNvSpPr/>
+          <p:nvPr/>
+        </p:nvSpPr>
+        <p:spPr>
+          <a:xfrm>
+            <a:off x="457200" y="752475"/>
             <a:ext cx="11277600" cy="0"/>
           </a:xfrm>
           <a:prstGeom prst="line">
             <a:avLst/>
           </a:prstGeom>
           <a:noFill/>
-          <a:ln w="11430">
+          <a:ln w="10478">
+            <a:solidFill>
+              <a:srgbClr val="BEC8D4"/>
+            </a:solidFill>
+            <a:prstDash val="solid"/>
+          </a:ln>
+        </p:spPr>
+      </p:sp>
+      <p:sp>
+        <p:nvSpPr>
+          <p:cNvPr id="6" name="T46/header-accent"/>
+          <p:cNvSpPr/>
+          <p:nvPr/>
+        </p:nvSpPr>
+        <p:spPr>
+          <a:xfrm>
+            <a:off x="457200" y="752475"/>
+            <a:ext cx="704850" cy="0"/>
+          </a:xfrm>
+          <a:prstGeom prst="line">
+            <a:avLst/>
+          </a:prstGeom>
+          <a:noFill/>
+          <a:ln w="28575">
             <a:solidFill>
               <a:srgbClr val="173C70"/>
             </a:solidFill>
@@ -5182,7 +5528,7 @@
         </p:nvSpPr>
         <p:spPr>
           <a:xfrm>
-            <a:off x="457200" y="2762250"/>
+            <a:off x="457200" y="2631091"/>
             <a:ext cx="7924800" cy="0"/>
           </a:xfrm>
           <a:prstGeom prst="line">
@@ -5205,14 +5551,14 @@
         </p:nvSpPr>
         <p:spPr>
           <a:xfrm>
-            <a:off x="457200" y="1428750"/>
+            <a:off x="457200" y="1245584"/>
             <a:ext cx="47625" cy="295275"/>
           </a:xfrm>
           <a:prstGeom prst="rect">
             <a:avLst/>
           </a:prstGeom>
           <a:solidFill>
-            <a:srgbClr val="173C70"/>
+            <a:srgbClr val="536A7A"/>
           </a:solidFill>
           <a:ln w="12700">
             <a:solidFill>
@@ -5232,7 +5578,7 @@
         </p:nvSpPr>
         <p:spPr>
           <a:xfrm>
-            <a:off x="609600" y="1428750"/>
+            <a:off x="609600" y="1245584"/>
             <a:ext cx="7772400" cy="304800"/>
           </a:xfrm>
           <a:prstGeom prst="rect">
@@ -5247,14 +5593,14 @@
           <a:p>
             <a:pPr algn="l" indent="0" marL="0">
               <a:lnSpc>
-                <a:spcPts val="2070"/>
-              </a:lnSpc>
-              <a:buNone/>
-            </a:pPr>
-            <a:r>
-              <a:rPr lang="zh-CN" altLang="en-US" sz="1800" b="1" dirty="0">
-                <a:solidFill>
-                  <a:srgbClr val="173C70"/>
+                <a:spcPts val="2242"/>
+              </a:lnSpc>
+              <a:buNone/>
+            </a:pPr>
+            <a:r>
+              <a:rPr lang="zh-CN" altLang="en-US" sz="1950" b="1" dirty="0">
+                <a:solidFill>
+                  <a:srgbClr val="536A7A"/>
                 </a:solidFill>
                 <a:latin typeface="Noto Sans CJK SC" pitchFamily="34" charset="0"/>
                 <a:ea typeface="Noto Sans CJK SC" pitchFamily="34" charset="-122"/>
@@ -5262,39 +5608,59 @@
               </a:rPr>
               <a:t>阶段一：材料与基线</a:t>
             </a:r>
+            <a:endParaRPr lang="zh-CN" sz="1950" dirty="0"/>
+          </a:p>
+        </p:txBody>
+      </p:sp>
+      <p:sp>
+        <p:nvSpPr>
+          <p:cNvPr id="10" name="T46/card/region-1/body"/>
+          <p:cNvSpPr/>
+          <p:nvPr/>
+        </p:nvSpPr>
+        <p:spPr>
+          <a:xfrm>
+            <a:off x="609600" y="1664684"/>
+            <a:ext cx="7772400" cy="871157"/>
+          </a:xfrm>
+          <a:prstGeom prst="rect">
+            <a:avLst/>
+          </a:prstGeom>
+          <a:noFill/>
+          <a:ln/>
+        </p:spPr>
+        <p:txBody>
+          <a:bodyPr wrap="none" lIns="0" tIns="0" rIns="0" bIns="0" rtlCol="0" anchor="t"/>
+          <a:lstStyle/>
+          <a:p>
+            <a:pPr algn="l" indent="0" marL="0">
+              <a:lnSpc>
+                <a:spcPts val="2232"/>
+              </a:lnSpc>
+              <a:buNone/>
+            </a:pPr>
+            <a:r>
+              <a:rPr lang="zh-CN" altLang="en-US" sz="1800" dirty="0">
+                <a:solidFill>
+                  <a:srgbClr val="1C2430"/>
+                </a:solidFill>
+                <a:latin typeface="Noto Sans CJK SC" pitchFamily="34" charset="0"/>
+                <a:ea typeface="Noto Sans CJK SC" pitchFamily="34" charset="-122"/>
+                <a:cs typeface="Noto Sans CJK SC" pitchFamily="34" charset="-120"/>
+              </a:rPr>
+              <a:t>确认数据版本、许可与基线</a:t>
+            </a:r>
             <a:endParaRPr lang="zh-CN" sz="1800" dirty="0"/>
           </a:p>
-        </p:txBody>
-      </p:sp>
-      <p:sp>
-        <p:nvSpPr>
-          <p:cNvPr id="10" name="T46/card/region-1/body"/>
-          <p:cNvSpPr/>
-          <p:nvPr/>
-        </p:nvSpPr>
-        <p:spPr>
-          <a:xfrm>
-            <a:off x="609600" y="1847850"/>
-            <a:ext cx="7772400" cy="819150"/>
-          </a:xfrm>
-          <a:prstGeom prst="rect">
-            <a:avLst/>
-          </a:prstGeom>
-          <a:noFill/>
-          <a:ln/>
-        </p:spPr>
-        <p:txBody>
-          <a:bodyPr wrap="none" lIns="0" tIns="0" rIns="0" bIns="0" rtlCol="0" anchor="t"/>
-          <a:lstStyle/>
-          <a:p>
-            <a:pPr algn="l" indent="0" marL="0">
-              <a:lnSpc>
-                <a:spcPts val="2139"/>
-              </a:lnSpc>
-              <a:buNone/>
-            </a:pPr>
-            <a:r>
-              <a:rPr lang="zh-CN" altLang="en-US" sz="1725" dirty="0">
+          <a:p>
+            <a:pPr algn="l" indent="0" marL="0">
+              <a:lnSpc>
+                <a:spcPts val="2232"/>
+              </a:lnSpc>
+              <a:buNone/>
+            </a:pPr>
+            <a:r>
+              <a:rPr lang="zh-CN" altLang="en-US" sz="1800" dirty="0">
                 <a:solidFill>
                   <a:srgbClr val="1C2430"/>
                 </a:solidFill>
@@ -5302,29 +5668,9 @@
                 <a:ea typeface="Noto Sans CJK SC" pitchFamily="34" charset="-122"/>
                 <a:cs typeface="Noto Sans CJK SC" pitchFamily="34" charset="-120"/>
               </a:rPr>
-              <a:t>确认数据版本、许可与基线</a:t>
-            </a:r>
-            <a:endParaRPr lang="zh-CN" sz="1725" dirty="0"/>
-          </a:p>
-          <a:p>
-            <a:pPr algn="l" indent="0" marL="0">
-              <a:lnSpc>
-                <a:spcPts val="2139"/>
-              </a:lnSpc>
-              <a:buNone/>
-            </a:pPr>
-            <a:r>
-              <a:rPr lang="zh-CN" altLang="en-US" sz="1725" dirty="0">
-                <a:solidFill>
-                  <a:srgbClr val="1C2430"/>
-                </a:solidFill>
-                <a:latin typeface="Noto Sans CJK SC" pitchFamily="34" charset="0"/>
-                <a:ea typeface="Noto Sans CJK SC" pitchFamily="34" charset="-122"/>
-                <a:cs typeface="Noto Sans CJK SC" pitchFamily="34" charset="-120"/>
-              </a:rPr>
               <a:t>产物：可复现的基线与证据记录</a:t>
             </a:r>
-            <a:endParaRPr lang="zh-CN" sz="1725" dirty="0"/>
+            <a:endParaRPr lang="zh-CN" sz="1800" dirty="0"/>
           </a:p>
         </p:txBody>
       </p:sp>
@@ -5336,7 +5682,7 @@
         </p:nvSpPr>
         <p:spPr>
           <a:xfrm>
-            <a:off x="457200" y="4400550"/>
+            <a:off x="457200" y="4332351"/>
             <a:ext cx="7924800" cy="0"/>
           </a:xfrm>
           <a:prstGeom prst="line">
@@ -5359,14 +5705,14 @@
         </p:nvSpPr>
         <p:spPr>
           <a:xfrm>
-            <a:off x="457200" y="3067050"/>
+            <a:off x="457200" y="2946845"/>
             <a:ext cx="47625" cy="295275"/>
           </a:xfrm>
           <a:prstGeom prst="rect">
             <a:avLst/>
           </a:prstGeom>
           <a:solidFill>
-            <a:srgbClr val="173C70"/>
+            <a:srgbClr val="235E96"/>
           </a:solidFill>
           <a:ln w="12700">
             <a:solidFill>
@@ -5386,7 +5732,7 @@
         </p:nvSpPr>
         <p:spPr>
           <a:xfrm>
-            <a:off x="609600" y="3067050"/>
+            <a:off x="609600" y="2946845"/>
             <a:ext cx="7772400" cy="304800"/>
           </a:xfrm>
           <a:prstGeom prst="rect">
@@ -5401,14 +5747,14 @@
           <a:p>
             <a:pPr algn="l" indent="0" marL="0">
               <a:lnSpc>
-                <a:spcPts val="2070"/>
-              </a:lnSpc>
-              <a:buNone/>
-            </a:pPr>
-            <a:r>
-              <a:rPr lang="zh-CN" altLang="en-US" sz="1800" b="1" dirty="0">
-                <a:solidFill>
-                  <a:srgbClr val="173C70"/>
+                <a:spcPts val="2242"/>
+              </a:lnSpc>
+              <a:buNone/>
+            </a:pPr>
+            <a:r>
+              <a:rPr lang="zh-CN" altLang="en-US" sz="1950" b="1" dirty="0">
+                <a:solidFill>
+                  <a:srgbClr val="235E96"/>
                 </a:solidFill>
                 <a:latin typeface="Noto Sans CJK SC" pitchFamily="34" charset="0"/>
                 <a:ea typeface="Noto Sans CJK SC" pitchFamily="34" charset="-122"/>
@@ -5416,39 +5762,59 @@
               </a:rPr>
               <a:t>阶段二：机制与验证</a:t>
             </a:r>
+            <a:endParaRPr lang="zh-CN" sz="1950" dirty="0"/>
+          </a:p>
+        </p:txBody>
+      </p:sp>
+      <p:sp>
+        <p:nvSpPr>
+          <p:cNvPr id="14" name="T46/card/region-2/body"/>
+          <p:cNvSpPr/>
+          <p:nvPr/>
+        </p:nvSpPr>
+        <p:spPr>
+          <a:xfrm>
+            <a:off x="609600" y="3365945"/>
+            <a:ext cx="7772400" cy="871157"/>
+          </a:xfrm>
+          <a:prstGeom prst="rect">
+            <a:avLst/>
+          </a:prstGeom>
+          <a:noFill/>
+          <a:ln/>
+        </p:spPr>
+        <p:txBody>
+          <a:bodyPr wrap="none" lIns="0" tIns="0" rIns="0" bIns="0" rtlCol="0" anchor="t"/>
+          <a:lstStyle/>
+          <a:p>
+            <a:pPr algn="l" indent="0" marL="0">
+              <a:lnSpc>
+                <a:spcPts val="2232"/>
+              </a:lnSpc>
+              <a:buNone/>
+            </a:pPr>
+            <a:r>
+              <a:rPr lang="zh-CN" altLang="en-US" sz="1800" dirty="0">
+                <a:solidFill>
+                  <a:srgbClr val="1C2430"/>
+                </a:solidFill>
+                <a:latin typeface="Noto Sans CJK SC" pitchFamily="34" charset="0"/>
+                <a:ea typeface="Noto Sans CJK SC" pitchFamily="34" charset="-122"/>
+                <a:cs typeface="Noto Sans CJK SC" pitchFamily="34" charset="-120"/>
+              </a:rPr>
+              <a:t>实施预定义干预与消融</a:t>
+            </a:r>
             <a:endParaRPr lang="zh-CN" sz="1800" dirty="0"/>
           </a:p>
-        </p:txBody>
-      </p:sp>
-      <p:sp>
-        <p:nvSpPr>
-          <p:cNvPr id="14" name="T46/card/region-2/body"/>
-          <p:cNvSpPr/>
-          <p:nvPr/>
-        </p:nvSpPr>
-        <p:spPr>
-          <a:xfrm>
-            <a:off x="609600" y="3486150"/>
-            <a:ext cx="7772400" cy="819150"/>
-          </a:xfrm>
-          <a:prstGeom prst="rect">
-            <a:avLst/>
-          </a:prstGeom>
-          <a:noFill/>
-          <a:ln/>
-        </p:spPr>
-        <p:txBody>
-          <a:bodyPr wrap="none" lIns="0" tIns="0" rIns="0" bIns="0" rtlCol="0" anchor="t"/>
-          <a:lstStyle/>
-          <a:p>
-            <a:pPr algn="l" indent="0" marL="0">
-              <a:lnSpc>
-                <a:spcPts val="2139"/>
-              </a:lnSpc>
-              <a:buNone/>
-            </a:pPr>
-            <a:r>
-              <a:rPr lang="zh-CN" altLang="en-US" sz="1725" dirty="0">
+          <a:p>
+            <a:pPr algn="l" indent="0" marL="0">
+              <a:lnSpc>
+                <a:spcPts val="2232"/>
+              </a:lnSpc>
+              <a:buNone/>
+            </a:pPr>
+            <a:r>
+              <a:rPr lang="zh-CN" altLang="en-US" sz="1800" dirty="0">
                 <a:solidFill>
                   <a:srgbClr val="1C2430"/>
                 </a:solidFill>
@@ -5456,29 +5822,9 @@
                 <a:ea typeface="Noto Sans CJK SC" pitchFamily="34" charset="-122"/>
                 <a:cs typeface="Noto Sans CJK SC" pitchFamily="34" charset="-120"/>
               </a:rPr>
-              <a:t>实施预定义干预与消融</a:t>
-            </a:r>
-            <a:endParaRPr lang="zh-CN" sz="1725" dirty="0"/>
-          </a:p>
-          <a:p>
-            <a:pPr algn="l" indent="0" marL="0">
-              <a:lnSpc>
-                <a:spcPts val="2139"/>
-              </a:lnSpc>
-              <a:buNone/>
-            </a:pPr>
-            <a:r>
-              <a:rPr lang="zh-CN" altLang="en-US" sz="1725" dirty="0">
-                <a:solidFill>
-                  <a:srgbClr val="1C2430"/>
-                </a:solidFill>
-                <a:latin typeface="Noto Sans CJK SC" pitchFamily="34" charset="0"/>
-                <a:ea typeface="Noto Sans CJK SC" pitchFamily="34" charset="-122"/>
-                <a:cs typeface="Noto Sans CJK SC" pitchFamily="34" charset="-120"/>
-              </a:rPr>
               <a:t>产物：按统一口径报告的比较结果</a:t>
             </a:r>
-            <a:endParaRPr lang="zh-CN" sz="1725" dirty="0"/>
+            <a:endParaRPr lang="zh-CN" sz="1800" dirty="0"/>
           </a:p>
         </p:txBody>
       </p:sp>
@@ -5490,7 +5836,7 @@
         </p:nvSpPr>
         <p:spPr>
           <a:xfrm>
-            <a:off x="457200" y="6038850"/>
+            <a:off x="457200" y="6033707"/>
             <a:ext cx="7924800" cy="0"/>
           </a:xfrm>
           <a:prstGeom prst="line">
@@ -5513,14 +5859,14 @@
         </p:nvSpPr>
         <p:spPr>
           <a:xfrm>
-            <a:off x="457200" y="4705350"/>
+            <a:off x="457200" y="4648200"/>
             <a:ext cx="47625" cy="295275"/>
           </a:xfrm>
           <a:prstGeom prst="rect">
             <a:avLst/>
           </a:prstGeom>
           <a:solidFill>
-            <a:srgbClr val="903543"/>
+            <a:srgbClr val="A24736"/>
           </a:solidFill>
           <a:ln w="12700">
             <a:solidFill>
@@ -5540,7 +5886,7 @@
         </p:nvSpPr>
         <p:spPr>
           <a:xfrm>
-            <a:off x="609600" y="4705350"/>
+            <a:off x="609600" y="4648200"/>
             <a:ext cx="7772400" cy="304800"/>
           </a:xfrm>
           <a:prstGeom prst="rect">
@@ -5555,54 +5901,212 @@
           <a:p>
             <a:pPr algn="l" indent="0" marL="0">
               <a:lnSpc>
-                <a:spcPts val="2070"/>
+                <a:spcPts val="2242"/>
+              </a:lnSpc>
+              <a:buNone/>
+            </a:pPr>
+            <a:r>
+              <a:rPr lang="zh-CN" altLang="en-US" sz="1950" b="1" dirty="0">
+                <a:solidFill>
+                  <a:srgbClr val="A24736"/>
+                </a:solidFill>
+                <a:latin typeface="Noto Sans CJK SC" pitchFamily="34" charset="0"/>
+                <a:ea typeface="Noto Sans CJK SC" pitchFamily="34" charset="-122"/>
+                <a:cs typeface="Noto Sans CJK SC" pitchFamily="34" charset="-120"/>
+              </a:rPr>
+              <a:t>阶段三：边界与复现</a:t>
+            </a:r>
+            <a:endParaRPr lang="zh-CN" sz="1950" dirty="0"/>
+          </a:p>
+        </p:txBody>
+      </p:sp>
+      <p:sp>
+        <p:nvSpPr>
+          <p:cNvPr id="18" name="T46/card/region-3/body"/>
+          <p:cNvSpPr/>
+          <p:nvPr/>
+        </p:nvSpPr>
+        <p:spPr>
+          <a:xfrm>
+            <a:off x="609600" y="5067300"/>
+            <a:ext cx="7772400" cy="871157"/>
+          </a:xfrm>
+          <a:prstGeom prst="rect">
+            <a:avLst/>
+          </a:prstGeom>
+          <a:noFill/>
+          <a:ln/>
+        </p:spPr>
+        <p:txBody>
+          <a:bodyPr wrap="none" lIns="0" tIns="0" rIns="0" bIns="0" rtlCol="0" anchor="t"/>
+          <a:lstStyle/>
+          <a:p>
+            <a:pPr algn="l" indent="0" marL="0">
+              <a:lnSpc>
+                <a:spcPts val="2232"/>
+              </a:lnSpc>
+              <a:buNone/>
+            </a:pPr>
+            <a:r>
+              <a:rPr lang="zh-CN" altLang="en-US" sz="1800" dirty="0">
+                <a:solidFill>
+                  <a:srgbClr val="1C2430"/>
+                </a:solidFill>
+                <a:latin typeface="Noto Sans CJK SC" pitchFamily="34" charset="0"/>
+                <a:ea typeface="Noto Sans CJK SC" pitchFamily="34" charset="-122"/>
+                <a:cs typeface="Noto Sans CJK SC" pitchFamily="34" charset="-120"/>
+              </a:rPr>
+              <a:t>补充留出、失败与稳健性分析</a:t>
+            </a:r>
+            <a:endParaRPr lang="zh-CN" sz="1800" dirty="0"/>
+          </a:p>
+          <a:p>
+            <a:pPr algn="l" indent="0" marL="0">
+              <a:lnSpc>
+                <a:spcPts val="2232"/>
+              </a:lnSpc>
+              <a:buNone/>
+            </a:pPr>
+            <a:r>
+              <a:rPr lang="zh-CN" altLang="en-US" sz="1800" dirty="0">
+                <a:solidFill>
+                  <a:srgbClr val="1C2430"/>
+                </a:solidFill>
+                <a:latin typeface="Noto Sans CJK SC" pitchFamily="34" charset="0"/>
+                <a:ea typeface="Noto Sans CJK SC" pitchFamily="34" charset="-122"/>
+                <a:cs typeface="Noto Sans CJK SC" pitchFamily="34" charset="-120"/>
+              </a:rPr>
+              <a:t>产物：复现材料与解释边界</a:t>
+            </a:r>
+            <a:endParaRPr lang="zh-CN" sz="1800" dirty="0"/>
+          </a:p>
+        </p:txBody>
+      </p:sp>
+      <p:sp>
+        <p:nvSpPr>
+          <p:cNvPr id="19" name="T46/card/region-4/title"/>
+          <p:cNvSpPr/>
+          <p:nvPr/>
+        </p:nvSpPr>
+        <p:spPr>
+          <a:xfrm>
+            <a:off x="8705850" y="1245584"/>
+            <a:ext cx="3028950" cy="323850"/>
+          </a:xfrm>
+          <a:prstGeom prst="rect">
+            <a:avLst/>
+          </a:prstGeom>
+          <a:noFill/>
+          <a:ln/>
+        </p:spPr>
+        <p:txBody>
+          <a:bodyPr wrap="none" lIns="0" tIns="0" rIns="0" bIns="0" rtlCol="0" anchor="t"/>
+          <a:lstStyle/>
+          <a:p>
+            <a:pPr algn="l" indent="0" marL="0">
+              <a:lnSpc>
+                <a:spcPts val="2242"/>
+              </a:lnSpc>
+              <a:buNone/>
+            </a:pPr>
+            <a:r>
+              <a:rPr lang="zh-CN" altLang="en-US" sz="1950" b="1" dirty="0">
+                <a:solidFill>
+                  <a:srgbClr val="235E96"/>
+                </a:solidFill>
+                <a:latin typeface="Noto Sans CJK SC" pitchFamily="34" charset="0"/>
+                <a:ea typeface="Noto Sans CJK SC" pitchFamily="34" charset="-122"/>
+                <a:cs typeface="Noto Sans CJK SC" pitchFamily="34" charset="-120"/>
+              </a:rPr>
+              <a:t>阶段依赖</a:t>
+            </a:r>
+            <a:endParaRPr lang="zh-CN" sz="1950" dirty="0"/>
+          </a:p>
+        </p:txBody>
+      </p:sp>
+      <p:sp>
+        <p:nvSpPr>
+          <p:cNvPr id="20" name="T46/card/region-4/body"/>
+          <p:cNvSpPr/>
+          <p:nvPr/>
+        </p:nvSpPr>
+        <p:spPr>
+          <a:xfrm>
+            <a:off x="8705850" y="1693259"/>
+            <a:ext cx="3028950" cy="1671257"/>
+          </a:xfrm>
+          <a:prstGeom prst="rect">
+            <a:avLst/>
+          </a:prstGeom>
+          <a:noFill/>
+          <a:ln/>
+        </p:spPr>
+        <p:txBody>
+          <a:bodyPr wrap="none" lIns="0" tIns="0" rIns="0" bIns="0" rtlCol="0" anchor="t"/>
+          <a:lstStyle/>
+          <a:p>
+            <a:pPr algn="l" indent="0" marL="0">
+              <a:lnSpc>
+                <a:spcPts val="2232"/>
+              </a:lnSpc>
+              <a:buNone/>
+            </a:pPr>
+            <a:r>
+              <a:rPr lang="zh-CN" altLang="en-US" sz="1800" dirty="0">
+                <a:solidFill>
+                  <a:srgbClr val="1C2430"/>
+                </a:solidFill>
+                <a:latin typeface="Noto Sans CJK SC" pitchFamily="34" charset="0"/>
+                <a:ea typeface="Noto Sans CJK SC" pitchFamily="34" charset="-122"/>
+                <a:cs typeface="Noto Sans CJK SC" pitchFamily="34" charset="-120"/>
+              </a:rPr>
+              <a:t>说明各阶段所需</a:t>
+            </a:r>
+            <a:pPr algn="l" indent="0" marL="0">
+              <a:lnSpc>
+                <a:spcPts val="2232"/>
               </a:lnSpc>
               <a:buNone/>
             </a:pPr>
             <a:r>
               <a:rPr lang="zh-CN" altLang="en-US" sz="1800" b="1" dirty="0">
                 <a:solidFill>
-                  <a:srgbClr val="903543"/>
-                </a:solidFill>
-                <a:latin typeface="Noto Sans CJK SC" pitchFamily="34" charset="0"/>
-                <a:ea typeface="Noto Sans CJK SC" pitchFamily="34" charset="-122"/>
-                <a:cs typeface="Noto Sans CJK SC" pitchFamily="34" charset="-120"/>
-              </a:rPr>
-              <a:t>阶段三：边界与复现</a:t>
+                  <a:srgbClr val="235E96"/>
+                </a:solidFill>
+                <a:latin typeface="Noto Sans CJK SC" pitchFamily="34" charset="0"/>
+                <a:ea typeface="Noto Sans CJK SC" pitchFamily="34" charset="-122"/>
+                <a:cs typeface="Noto Sans CJK SC" pitchFamily="34" charset="-120"/>
+              </a:rPr>
+              <a:t>输入</a:t>
+            </a:r>
+            <a:pPr algn="l" indent="0" marL="0">
+              <a:lnSpc>
+                <a:spcPts val="2232"/>
+              </a:lnSpc>
+              <a:buNone/>
+            </a:pPr>
+            <a:r>
+              <a:rPr lang="zh-CN" altLang="en-US" sz="1800" dirty="0">
+                <a:solidFill>
+                  <a:srgbClr val="1C2430"/>
+                </a:solidFill>
+                <a:latin typeface="Noto Sans CJK SC" pitchFamily="34" charset="0"/>
+                <a:ea typeface="Noto Sans CJK SC" pitchFamily="34" charset="-122"/>
+                <a:cs typeface="Noto Sans CJK SC" pitchFamily="34" charset="-120"/>
+              </a:rPr>
+              <a:t>与完成条</a:t>
             </a:r>
             <a:endParaRPr lang="zh-CN" sz="1800" dirty="0"/>
           </a:p>
-        </p:txBody>
-      </p:sp>
-      <p:sp>
-        <p:nvSpPr>
-          <p:cNvPr id="18" name="T46/card/region-3/body"/>
-          <p:cNvSpPr/>
-          <p:nvPr/>
-        </p:nvSpPr>
-        <p:spPr>
-          <a:xfrm>
-            <a:off x="609600" y="5124450"/>
-            <a:ext cx="7772400" cy="819150"/>
-          </a:xfrm>
-          <a:prstGeom prst="rect">
-            <a:avLst/>
-          </a:prstGeom>
-          <a:noFill/>
-          <a:ln/>
-        </p:spPr>
-        <p:txBody>
-          <a:bodyPr wrap="none" lIns="0" tIns="0" rIns="0" bIns="0" rtlCol="0" anchor="t"/>
-          <a:lstStyle/>
-          <a:p>
-            <a:pPr algn="l" indent="0" marL="0">
-              <a:lnSpc>
-                <a:spcPts val="2139"/>
-              </a:lnSpc>
-              <a:buNone/>
-            </a:pPr>
-            <a:r>
-              <a:rPr lang="zh-CN" altLang="en-US" sz="1725" dirty="0">
+          <a:p>
+            <a:pPr algn="l" indent="0" marL="0">
+              <a:lnSpc>
+                <a:spcPts val="2232"/>
+              </a:lnSpc>
+              <a:buNone/>
+            </a:pPr>
+            <a:r>
+              <a:rPr lang="zh-CN" altLang="en-US" sz="1800" dirty="0">
                 <a:solidFill>
                   <a:srgbClr val="1C2430"/>
                 </a:solidFill>
@@ -5610,19 +6114,19 @@
                 <a:ea typeface="Noto Sans CJK SC" pitchFamily="34" charset="-122"/>
                 <a:cs typeface="Noto Sans CJK SC" pitchFamily="34" charset="-120"/>
               </a:rPr>
-              <a:t>补充留出、失败与稳健性分析</a:t>
-            </a:r>
-            <a:endParaRPr lang="zh-CN" sz="1725" dirty="0"/>
-          </a:p>
-          <a:p>
-            <a:pPr algn="l" indent="0" marL="0">
-              <a:lnSpc>
-                <a:spcPts val="2139"/>
-              </a:lnSpc>
-              <a:buNone/>
-            </a:pPr>
-            <a:r>
-              <a:rPr lang="zh-CN" altLang="en-US" sz="1725" dirty="0">
+              <a:t>件</a:t>
+            </a:r>
+            <a:endParaRPr lang="zh-CN" sz="1800" dirty="0"/>
+          </a:p>
+          <a:p>
+            <a:pPr algn="l" indent="0" marL="0">
+              <a:lnSpc>
+                <a:spcPts val="2232"/>
+              </a:lnSpc>
+              <a:buNone/>
+            </a:pPr>
+            <a:r>
+              <a:rPr lang="zh-CN" altLang="en-US" sz="1800" dirty="0">
                 <a:solidFill>
                   <a:srgbClr val="1C2430"/>
                 </a:solidFill>
@@ -5630,134 +6134,10 @@
                 <a:ea typeface="Noto Sans CJK SC" pitchFamily="34" charset="-122"/>
                 <a:cs typeface="Noto Sans CJK SC" pitchFamily="34" charset="-120"/>
               </a:rPr>
-              <a:t>产物：复现材料与解释边界</a:t>
-            </a:r>
-            <a:endParaRPr lang="zh-CN" sz="1725" dirty="0"/>
-          </a:p>
-        </p:txBody>
-      </p:sp>
-      <p:sp>
-        <p:nvSpPr>
-          <p:cNvPr id="19" name="T46/card/region-4/title"/>
-          <p:cNvSpPr/>
-          <p:nvPr/>
-        </p:nvSpPr>
-        <p:spPr>
-          <a:xfrm>
-            <a:off x="8705850" y="1428750"/>
-            <a:ext cx="3028950" cy="323850"/>
-          </a:xfrm>
-          <a:prstGeom prst="rect">
-            <a:avLst/>
-          </a:prstGeom>
-          <a:noFill/>
-          <a:ln/>
-        </p:spPr>
-        <p:txBody>
-          <a:bodyPr wrap="none" lIns="0" tIns="0" rIns="0" bIns="0" rtlCol="0" anchor="t"/>
-          <a:lstStyle/>
-          <a:p>
-            <a:pPr algn="l" indent="0" marL="0">
-              <a:lnSpc>
-                <a:spcPts val="2156"/>
-              </a:lnSpc>
-              <a:buNone/>
-            </a:pPr>
-            <a:r>
-              <a:rPr lang="zh-CN" altLang="en-US" sz="1875" b="1" dirty="0">
-                <a:solidFill>
-                  <a:srgbClr val="173C70"/>
-                </a:solidFill>
-                <a:latin typeface="Noto Sans CJK SC" pitchFamily="34" charset="0"/>
-                <a:ea typeface="Noto Sans CJK SC" pitchFamily="34" charset="-122"/>
-                <a:cs typeface="Noto Sans CJK SC" pitchFamily="34" charset="-120"/>
-              </a:rPr>
-              <a:t>阶段依赖</a:t>
-            </a:r>
-            <a:endParaRPr lang="zh-CN" sz="1875" dirty="0"/>
-          </a:p>
-        </p:txBody>
-      </p:sp>
-      <p:sp>
-        <p:nvSpPr>
-          <p:cNvPr id="20" name="T46/card/region-4/body"/>
-          <p:cNvSpPr/>
-          <p:nvPr/>
-        </p:nvSpPr>
-        <p:spPr>
-          <a:xfrm>
-            <a:off x="8705850" y="1876425"/>
-            <a:ext cx="3028950" cy="1590675"/>
-          </a:xfrm>
-          <a:prstGeom prst="rect">
-            <a:avLst/>
-          </a:prstGeom>
-          <a:noFill/>
-          <a:ln/>
-        </p:spPr>
-        <p:txBody>
-          <a:bodyPr wrap="none" lIns="0" tIns="0" rIns="0" bIns="0" rtlCol="0" anchor="t"/>
-          <a:lstStyle/>
-          <a:p>
-            <a:pPr algn="l" indent="0" marL="0">
-              <a:lnSpc>
-                <a:spcPts val="2232"/>
-              </a:lnSpc>
-              <a:buNone/>
-            </a:pPr>
-            <a:r>
-              <a:rPr lang="zh-CN" altLang="en-US" sz="1800" dirty="0">
-                <a:solidFill>
-                  <a:srgbClr val="1C2430"/>
-                </a:solidFill>
-                <a:latin typeface="Noto Sans CJK SC" pitchFamily="34" charset="0"/>
-                <a:ea typeface="Noto Sans CJK SC" pitchFamily="34" charset="-122"/>
-                <a:cs typeface="Noto Sans CJK SC" pitchFamily="34" charset="-120"/>
-              </a:rPr>
-              <a:t>说明各阶段所需输入与完成条</a:t>
+              <a:t>避免仅按日期排列任务</a:t>
             </a:r>
             <a:endParaRPr lang="zh-CN" sz="1800" dirty="0"/>
           </a:p>
-          <a:p>
-            <a:pPr algn="l" indent="0" marL="0">
-              <a:lnSpc>
-                <a:spcPts val="2232"/>
-              </a:lnSpc>
-              <a:buNone/>
-            </a:pPr>
-            <a:r>
-              <a:rPr lang="zh-CN" altLang="en-US" sz="1800" dirty="0">
-                <a:solidFill>
-                  <a:srgbClr val="1C2430"/>
-                </a:solidFill>
-                <a:latin typeface="Noto Sans CJK SC" pitchFamily="34" charset="0"/>
-                <a:ea typeface="Noto Sans CJK SC" pitchFamily="34" charset="-122"/>
-                <a:cs typeface="Noto Sans CJK SC" pitchFamily="34" charset="-120"/>
-              </a:rPr>
-              <a:t>件</a:t>
-            </a:r>
-            <a:endParaRPr lang="zh-CN" sz="1800" dirty="0"/>
-          </a:p>
-          <a:p>
-            <a:pPr algn="l" indent="0" marL="0">
-              <a:lnSpc>
-                <a:spcPts val="2232"/>
-              </a:lnSpc>
-              <a:buNone/>
-            </a:pPr>
-            <a:r>
-              <a:rPr lang="zh-CN" altLang="en-US" sz="1800" dirty="0">
-                <a:solidFill>
-                  <a:srgbClr val="1C2430"/>
-                </a:solidFill>
-                <a:latin typeface="Noto Sans CJK SC" pitchFamily="34" charset="0"/>
-                <a:ea typeface="Noto Sans CJK SC" pitchFamily="34" charset="-122"/>
-                <a:cs typeface="Noto Sans CJK SC" pitchFamily="34" charset="-120"/>
-              </a:rPr>
-              <a:t>避免仅按日期排列任务</a:t>
-            </a:r>
-            <a:endParaRPr lang="zh-CN" sz="1800" dirty="0"/>
-          </a:p>
         </p:txBody>
       </p:sp>
       <p:sp>
@@ -5768,8 +6148,8 @@
         </p:nvSpPr>
         <p:spPr>
           <a:xfrm>
-            <a:off x="8705850" y="3867150"/>
-            <a:ext cx="3028950" cy="2171700"/>
+            <a:off x="8705850" y="3774091"/>
+            <a:ext cx="3028950" cy="2259616"/>
           </a:xfrm>
           <a:prstGeom prst="rect">
             <a:avLst/>
@@ -5793,14 +6173,14 @@
         </p:nvSpPr>
         <p:spPr>
           <a:xfrm>
-            <a:off x="8820150" y="3752850"/>
-            <a:ext cx="1866900" cy="320040"/>
+            <a:off x="8820150" y="3659791"/>
+            <a:ext cx="2000250" cy="342900"/>
           </a:xfrm>
           <a:prstGeom prst="rect">
             <a:avLst/>
           </a:prstGeom>
           <a:solidFill>
-            <a:srgbClr val="173C70"/>
+            <a:srgbClr val="536A7A"/>
           </a:solidFill>
           <a:ln w="12700">
             <a:solidFill>
@@ -5820,8 +6200,8 @@
         </p:nvSpPr>
         <p:spPr>
           <a:xfrm>
-            <a:off x="8924925" y="3781425"/>
-            <a:ext cx="1657350" cy="262890"/>
+            <a:off x="8924925" y="3688366"/>
+            <a:ext cx="1790700" cy="285750"/>
           </a:xfrm>
           <a:prstGeom prst="rect">
             <a:avLst/>
@@ -5835,12 +6215,12 @@
           <a:p>
             <a:pPr algn="l" indent="0" marL="0">
               <a:lnSpc>
-                <a:spcPts val="2070"/>
-              </a:lnSpc>
-              <a:buNone/>
-            </a:pPr>
-            <a:r>
-              <a:rPr lang="zh-CN" altLang="en-US" sz="1800" b="1" dirty="0">
+                <a:spcPts val="2242"/>
+              </a:lnSpc>
+              <a:buNone/>
+            </a:pPr>
+            <a:r>
+              <a:rPr lang="zh-CN" altLang="en-US" sz="1950" b="1" dirty="0">
                 <a:solidFill>
                   <a:srgbClr val="FFFFFF"/>
                 </a:solidFill>
@@ -5850,39 +6230,59 @@
               </a:rPr>
               <a:t>停止与调整条件</a:t>
             </a:r>
+            <a:endParaRPr lang="zh-CN" sz="1950" dirty="0"/>
+          </a:p>
+        </p:txBody>
+      </p:sp>
+      <p:sp>
+        <p:nvSpPr>
+          <p:cNvPr id="24" name="T46/card/region-5/body"/>
+          <p:cNvSpPr/>
+          <p:nvPr/>
+        </p:nvSpPr>
+        <p:spPr>
+          <a:xfrm>
+            <a:off x="8839200" y="4145566"/>
+            <a:ext cx="2762250" cy="1792891"/>
+          </a:xfrm>
+          <a:prstGeom prst="rect">
+            <a:avLst/>
+          </a:prstGeom>
+          <a:noFill/>
+          <a:ln/>
+        </p:spPr>
+        <p:txBody>
+          <a:bodyPr wrap="none" lIns="0" tIns="0" rIns="0" bIns="0" rtlCol="0" anchor="t"/>
+          <a:lstStyle/>
+          <a:p>
+            <a:pPr algn="l" indent="0" marL="0">
+              <a:lnSpc>
+                <a:spcPts val="2232"/>
+              </a:lnSpc>
+              <a:buNone/>
+            </a:pPr>
+            <a:r>
+              <a:rPr lang="zh-CN" altLang="en-US" sz="1800" dirty="0">
+                <a:solidFill>
+                  <a:srgbClr val="1C2430"/>
+                </a:solidFill>
+                <a:latin typeface="Noto Sans CJK SC" pitchFamily="34" charset="0"/>
+                <a:ea typeface="Noto Sans CJK SC" pitchFamily="34" charset="-122"/>
+                <a:cs typeface="Noto Sans CJK SC" pitchFamily="34" charset="-120"/>
+              </a:rPr>
+              <a:t>材料不足、效果无效或成本</a:t>
+            </a:r>
             <a:endParaRPr lang="zh-CN" sz="1800" dirty="0"/>
           </a:p>
-        </p:txBody>
-      </p:sp>
-      <p:sp>
-        <p:nvSpPr>
-          <p:cNvPr id="24" name="T46/card/region-5/body"/>
-          <p:cNvSpPr/>
-          <p:nvPr/>
-        </p:nvSpPr>
-        <p:spPr>
-          <a:xfrm>
-            <a:off x="8839200" y="4215765"/>
-            <a:ext cx="2762250" cy="1727835"/>
-          </a:xfrm>
-          <a:prstGeom prst="rect">
-            <a:avLst/>
-          </a:prstGeom>
-          <a:noFill/>
-          <a:ln/>
-        </p:spPr>
-        <p:txBody>
-          <a:bodyPr wrap="none" lIns="0" tIns="0" rIns="0" bIns="0" rtlCol="0" anchor="t"/>
-          <a:lstStyle/>
-          <a:p>
-            <a:pPr algn="l" indent="0" marL="0">
-              <a:lnSpc>
-                <a:spcPts val="2139"/>
-              </a:lnSpc>
-              <a:buNone/>
-            </a:pPr>
-            <a:r>
-              <a:rPr lang="zh-CN" altLang="en-US" sz="1725" dirty="0">
+          <a:p>
+            <a:pPr algn="l" indent="0" marL="0">
+              <a:lnSpc>
+                <a:spcPts val="2232"/>
+              </a:lnSpc>
+              <a:buNone/>
+            </a:pPr>
+            <a:r>
+              <a:rPr lang="zh-CN" altLang="en-US" sz="1800" dirty="0">
                 <a:solidFill>
                   <a:srgbClr val="1C2430"/>
                 </a:solidFill>
@@ -5890,19 +6290,19 @@
                 <a:ea typeface="Noto Sans CJK SC" pitchFamily="34" charset="-122"/>
                 <a:cs typeface="Noto Sans CJK SC" pitchFamily="34" charset="-120"/>
               </a:rPr>
-              <a:t>材料不足、效果无效或成本</a:t>
-            </a:r>
-            <a:endParaRPr lang="zh-CN" sz="1725" dirty="0"/>
-          </a:p>
-          <a:p>
-            <a:pPr algn="l" indent="0" marL="0">
-              <a:lnSpc>
-                <a:spcPts val="2139"/>
-              </a:lnSpc>
-              <a:buNone/>
-            </a:pPr>
-            <a:r>
-              <a:rPr lang="zh-CN" altLang="en-US" sz="1725" dirty="0">
+              <a:t>超出时如何调整</a:t>
+            </a:r>
+            <a:endParaRPr lang="zh-CN" sz="1800" dirty="0"/>
+          </a:p>
+          <a:p>
+            <a:pPr algn="l" indent="0" marL="0">
+              <a:lnSpc>
+                <a:spcPts val="2232"/>
+              </a:lnSpc>
+              <a:buNone/>
+            </a:pPr>
+            <a:r>
+              <a:rPr lang="zh-CN" altLang="en-US" sz="1800" dirty="0">
                 <a:solidFill>
                   <a:srgbClr val="1C2430"/>
                 </a:solidFill>
@@ -5910,29 +6310,9 @@
                 <a:ea typeface="Noto Sans CJK SC" pitchFamily="34" charset="-122"/>
                 <a:cs typeface="Noto Sans CJK SC" pitchFamily="34" charset="-120"/>
               </a:rPr>
-              <a:t>超出时如何调整</a:t>
-            </a:r>
-            <a:endParaRPr lang="zh-CN" sz="1725" dirty="0"/>
-          </a:p>
-          <a:p>
-            <a:pPr algn="l" indent="0" marL="0">
-              <a:lnSpc>
-                <a:spcPts val="2139"/>
-              </a:lnSpc>
-              <a:buNone/>
-            </a:pPr>
-            <a:r>
-              <a:rPr lang="zh-CN" altLang="en-US" sz="1725" dirty="0">
-                <a:solidFill>
-                  <a:srgbClr val="1C2430"/>
-                </a:solidFill>
-                <a:latin typeface="Noto Sans CJK SC" pitchFamily="34" charset="0"/>
-                <a:ea typeface="Noto Sans CJK SC" pitchFamily="34" charset="-122"/>
-                <a:cs typeface="Noto Sans CJK SC" pitchFamily="34" charset="-120"/>
-              </a:rPr>
               <a:t>把停止条件与研究问题对应</a:t>
             </a:r>
-            <a:endParaRPr lang="zh-CN" sz="1725" dirty="0"/>
+            <a:endParaRPr lang="zh-CN" sz="1800" dirty="0"/>
           </a:p>
         </p:txBody>
       </p:sp>
@@ -5972,7 +6352,7 @@
                 <a:ea typeface="Noto Sans CJK SC" pitchFamily="34" charset="-122"/>
                 <a:cs typeface="Noto Sans CJK SC" pitchFamily="34" charset="-120"/>
               </a:rPr>
-              <a:t>T1 · 2026 · 待替换</a:t>
+              <a:t>T1 · 2026 · 书目占位；图表均为合成示例</a:t>
             </a:r>
             <a:endParaRPr lang="zh-CN" sz="1125" dirty="0"/>
           </a:p>
@@ -6081,14 +6461,14 @@
       </p:sp>
       <p:sp>
         <p:nvSpPr>
-          <p:cNvPr id="4" name="T47/kicker"/>
-          <p:cNvSpPr/>
-          <p:nvPr/>
-        </p:nvSpPr>
-        <p:spPr>
-          <a:xfrm>
-            <a:off x="457200" y="152400"/>
-            <a:ext cx="11277600" cy="190500"/>
+          <p:cNvPr id="4" name="T47/title"/>
+          <p:cNvSpPr/>
+          <p:nvPr/>
+        </p:nvSpPr>
+        <p:spPr>
+          <a:xfrm>
+            <a:off x="457200" y="209550"/>
+            <a:ext cx="11277600" cy="438150"/>
           </a:xfrm>
           <a:prstGeom prst="rect">
             <a:avLst/>
@@ -6102,54 +6482,12 @@
           <a:p>
             <a:pPr algn="l" indent="0" marL="0">
               <a:lnSpc>
-                <a:spcPts val="1320"/>
-              </a:lnSpc>
-              <a:buNone/>
-            </a:pPr>
-            <a:r>
-              <a:rPr lang="zh-CN" altLang="en-US" sz="1200" dirty="0">
-                <a:solidFill>
-                  <a:srgbClr val="515B68"/>
-                </a:solidFill>
-                <a:latin typeface="Noto Sans CJK SC" pitchFamily="34" charset="0"/>
-                <a:ea typeface="Noto Sans CJK SC" pitchFamily="34" charset="-122"/>
-                <a:cs typeface="Noto Sans CJK SC" pitchFamily="34" charset="-120"/>
-              </a:rPr>
-              <a:t>结构模板 / 占位说明与合成数据</a:t>
-            </a:r>
-            <a:endParaRPr lang="zh-CN" sz="1200" dirty="0"/>
-          </a:p>
-        </p:txBody>
-      </p:sp>
-      <p:sp>
-        <p:nvSpPr>
-          <p:cNvPr id="5" name="T47/title"/>
-          <p:cNvSpPr/>
-          <p:nvPr/>
-        </p:nvSpPr>
-        <p:spPr>
-          <a:xfrm>
-            <a:off x="457200" y="381000"/>
-            <a:ext cx="11277600" cy="400050"/>
-          </a:xfrm>
-          <a:prstGeom prst="rect">
-            <a:avLst/>
-          </a:prstGeom>
-          <a:noFill/>
-          <a:ln/>
-        </p:spPr>
-        <p:txBody>
-          <a:bodyPr wrap="none" lIns="0" tIns="0" rIns="0" bIns="0" rtlCol="0" anchor="t"/>
-          <a:lstStyle/>
-          <a:p>
-            <a:pPr algn="l" indent="0" marL="0">
-              <a:lnSpc>
-                <a:spcPts val="2856"/>
-              </a:lnSpc>
-              <a:buNone/>
-            </a:pPr>
-            <a:r>
-              <a:rPr lang="zh-CN" altLang="en-US" sz="2550" b="1" dirty="0">
+                <a:spcPts val="3360"/>
+              </a:lnSpc>
+              <a:buNone/>
+            </a:pPr>
+            <a:r>
+              <a:rPr lang="zh-CN" altLang="en-US" sz="3000" b="1" dirty="0">
                 <a:solidFill>
                   <a:srgbClr val="1C2430"/>
                 </a:solidFill>
@@ -6159,26 +6497,49 @@
               </a:rPr>
               <a:t>结论证据与后续问题</a:t>
             </a:r>
-            <a:endParaRPr lang="zh-CN" sz="2550" dirty="0"/>
-          </a:p>
-        </p:txBody>
-      </p:sp>
-      <p:sp>
-        <p:nvSpPr>
-          <p:cNvPr id="6" name="T47/header-rule"/>
-          <p:cNvSpPr/>
-          <p:nvPr/>
-        </p:nvSpPr>
-        <p:spPr>
-          <a:xfrm>
-            <a:off x="457200" y="876300"/>
+            <a:endParaRPr lang="zh-CN" sz="3000" dirty="0"/>
+          </a:p>
+        </p:txBody>
+      </p:sp>
+      <p:sp>
+        <p:nvSpPr>
+          <p:cNvPr id="5" name="T47/header-rule"/>
+          <p:cNvSpPr/>
+          <p:nvPr/>
+        </p:nvSpPr>
+        <p:spPr>
+          <a:xfrm>
+            <a:off x="457200" y="752475"/>
             <a:ext cx="11277600" cy="0"/>
           </a:xfrm>
           <a:prstGeom prst="line">
             <a:avLst/>
           </a:prstGeom>
           <a:noFill/>
-          <a:ln w="11430">
+          <a:ln w="10478">
+            <a:solidFill>
+              <a:srgbClr val="BEC8D4"/>
+            </a:solidFill>
+            <a:prstDash val="solid"/>
+          </a:ln>
+        </p:spPr>
+      </p:sp>
+      <p:sp>
+        <p:nvSpPr>
+          <p:cNvPr id="6" name="T47/header-accent"/>
+          <p:cNvSpPr/>
+          <p:nvPr/>
+        </p:nvSpPr>
+        <p:spPr>
+          <a:xfrm>
+            <a:off x="457200" y="752475"/>
+            <a:ext cx="704850" cy="0"/>
+          </a:xfrm>
+          <a:prstGeom prst="line">
+            <a:avLst/>
+          </a:prstGeom>
+          <a:noFill/>
+          <a:ln w="28575">
             <a:solidFill>
               <a:srgbClr val="173C70"/>
             </a:solidFill>
@@ -6194,7 +6555,7 @@
         </p:nvSpPr>
         <p:spPr>
           <a:xfrm>
-            <a:off x="457200" y="2724150"/>
+            <a:off x="457200" y="2591562"/>
             <a:ext cx="7448550" cy="0"/>
           </a:xfrm>
           <a:prstGeom prst="line">
@@ -6217,14 +6578,14 @@
         </p:nvSpPr>
         <p:spPr>
           <a:xfrm>
-            <a:off x="457200" y="1447800"/>
+            <a:off x="457200" y="1265396"/>
             <a:ext cx="47625" cy="295275"/>
           </a:xfrm>
           <a:prstGeom prst="rect">
             <a:avLst/>
           </a:prstGeom>
           <a:solidFill>
-            <a:srgbClr val="173C70"/>
+            <a:srgbClr val="146C63"/>
           </a:solidFill>
           <a:ln w="12700">
             <a:solidFill>
@@ -6244,7 +6605,7 @@
         </p:nvSpPr>
         <p:spPr>
           <a:xfrm>
-            <a:off x="609600" y="1447800"/>
+            <a:off x="609600" y="1265396"/>
             <a:ext cx="7296150" cy="304800"/>
           </a:xfrm>
           <a:prstGeom prst="rect">
@@ -6259,14 +6620,14 @@
           <a:p>
             <a:pPr algn="l" indent="0" marL="0">
               <a:lnSpc>
-                <a:spcPts val="2070"/>
-              </a:lnSpc>
-              <a:buNone/>
-            </a:pPr>
-            <a:r>
-              <a:rPr lang="zh-CN" altLang="en-US" sz="1800" b="1" dirty="0">
-                <a:solidFill>
-                  <a:srgbClr val="173C70"/>
+                <a:spcPts val="2242"/>
+              </a:lnSpc>
+              <a:buNone/>
+            </a:pPr>
+            <a:r>
+              <a:rPr lang="zh-CN" altLang="en-US" sz="1950" b="1" dirty="0">
+                <a:solidFill>
+                  <a:srgbClr val="146C63"/>
                 </a:solidFill>
                 <a:latin typeface="Noto Sans CJK SC" pitchFamily="34" charset="0"/>
                 <a:ea typeface="Noto Sans CJK SC" pitchFamily="34" charset="-122"/>
@@ -6274,20 +6635,128 @@
               </a:rPr>
               <a:t>结论一及证据</a:t>
             </a:r>
+            <a:endParaRPr lang="zh-CN" sz="1950" dirty="0"/>
+          </a:p>
+        </p:txBody>
+      </p:sp>
+      <p:sp>
+        <p:nvSpPr>
+          <p:cNvPr id="10" name="T47/card/region-1/body"/>
+          <p:cNvSpPr/>
+          <p:nvPr/>
+        </p:nvSpPr>
+        <p:spPr>
+          <a:xfrm>
+            <a:off x="609600" y="1684496"/>
+            <a:ext cx="7296150" cy="811816"/>
+          </a:xfrm>
+          <a:prstGeom prst="rect">
+            <a:avLst/>
+          </a:prstGeom>
+          <a:noFill/>
+          <a:ln/>
+        </p:spPr>
+        <p:txBody>
+          <a:bodyPr wrap="none" lIns="0" tIns="0" rIns="0" bIns="0" rtlCol="0" anchor="t"/>
+          <a:lstStyle/>
+          <a:p>
+            <a:pPr algn="l" indent="0" marL="0">
+              <a:lnSpc>
+                <a:spcPts val="2232"/>
+              </a:lnSpc>
+              <a:buNone/>
+            </a:pPr>
+            <a:r>
+              <a:rPr lang="zh-CN" altLang="en-US" sz="1800" dirty="0">
+                <a:solidFill>
+                  <a:srgbClr val="1C2430"/>
+                </a:solidFill>
+                <a:latin typeface="Noto Sans CJK SC" pitchFamily="34" charset="0"/>
+                <a:ea typeface="Noto Sans CJK SC" pitchFamily="34" charset="-122"/>
+                <a:cs typeface="Noto Sans CJK SC" pitchFamily="34" charset="-120"/>
+              </a:rPr>
+              <a:t>用一句结论连接一项核心证据</a:t>
+            </a:r>
             <a:endParaRPr lang="zh-CN" sz="1800" dirty="0"/>
           </a:p>
-        </p:txBody>
-      </p:sp>
-      <p:sp>
-        <p:nvSpPr>
-          <p:cNvPr id="10" name="T47/card/region-1/body"/>
-          <p:cNvSpPr/>
-          <p:nvPr/>
-        </p:nvSpPr>
-        <p:spPr>
-          <a:xfrm>
-            <a:off x="609600" y="1866900"/>
-            <a:ext cx="7296150" cy="762000"/>
+          <a:p>
+            <a:pPr algn="l" indent="0" marL="0">
+              <a:lnSpc>
+                <a:spcPts val="2232"/>
+              </a:lnSpc>
+              <a:buNone/>
+            </a:pPr>
+            <a:r>
+              <a:rPr lang="zh-CN" altLang="en-US" sz="1800" dirty="0">
+                <a:solidFill>
+                  <a:srgbClr val="1C2430"/>
+                </a:solidFill>
+                <a:latin typeface="Noto Sans CJK SC" pitchFamily="34" charset="0"/>
+                <a:ea typeface="Noto Sans CJK SC" pitchFamily="34" charset="-122"/>
+                <a:cs typeface="Noto Sans CJK SC" pitchFamily="34" charset="-120"/>
+              </a:rPr>
+              <a:t>保留样本、比较与实验身份</a:t>
+            </a:r>
+            <a:endParaRPr lang="zh-CN" sz="1800" dirty="0"/>
+          </a:p>
+        </p:txBody>
+      </p:sp>
+      <p:sp>
+        <p:nvSpPr>
+          <p:cNvPr id="11" name="T47/card/region-2/heading-rule"/>
+          <p:cNvSpPr/>
+          <p:nvPr/>
+        </p:nvSpPr>
+        <p:spPr>
+          <a:xfrm>
+            <a:off x="457200" y="3230404"/>
+            <a:ext cx="7448550" cy="0"/>
+          </a:xfrm>
+          <a:prstGeom prst="line">
+            <a:avLst/>
+          </a:prstGeom>
+          <a:noFill/>
+          <a:ln w="9525">
+            <a:solidFill>
+              <a:srgbClr val="BEC8D4"/>
+            </a:solidFill>
+            <a:prstDash val="solid"/>
+          </a:ln>
+        </p:spPr>
+      </p:sp>
+      <p:sp>
+        <p:nvSpPr>
+          <p:cNvPr id="12" name="T47/card/region-2/heading-mark"/>
+          <p:cNvSpPr/>
+          <p:nvPr/>
+        </p:nvSpPr>
+        <p:spPr>
+          <a:xfrm>
+            <a:off x="457200" y="3230404"/>
+            <a:ext cx="342900" cy="0"/>
+          </a:xfrm>
+          <a:prstGeom prst="line">
+            <a:avLst/>
+          </a:prstGeom>
+          <a:noFill/>
+          <a:ln w="17145">
+            <a:solidFill>
+              <a:srgbClr val="146C63"/>
+            </a:solidFill>
+            <a:prstDash val="solid"/>
+          </a:ln>
+        </p:spPr>
+      </p:sp>
+      <p:sp>
+        <p:nvSpPr>
+          <p:cNvPr id="13" name="T47/card/region-2/title"/>
+          <p:cNvSpPr/>
+          <p:nvPr/>
+        </p:nvSpPr>
+        <p:spPr>
+          <a:xfrm>
+            <a:off x="457200" y="2887504"/>
+            <a:ext cx="7448550" cy="323850"/>
           </a:xfrm>
           <a:prstGeom prst="rect">
             <a:avLst/>
@@ -6301,12 +6770,54 @@
           <a:p>
             <a:pPr algn="l" indent="0" marL="0">
               <a:lnSpc>
-                <a:spcPts val="2139"/>
-              </a:lnSpc>
-              <a:buNone/>
-            </a:pPr>
-            <a:r>
-              <a:rPr lang="zh-CN" altLang="en-US" sz="1725" dirty="0">
+                <a:spcPts val="2242"/>
+              </a:lnSpc>
+              <a:buNone/>
+            </a:pPr>
+            <a:r>
+              <a:rPr lang="zh-CN" altLang="en-US" sz="1950" b="1" dirty="0">
+                <a:solidFill>
+                  <a:srgbClr val="146C63"/>
+                </a:solidFill>
+                <a:latin typeface="Noto Sans CJK SC" pitchFamily="34" charset="0"/>
+                <a:ea typeface="Noto Sans CJK SC" pitchFamily="34" charset="-122"/>
+                <a:cs typeface="Noto Sans CJK SC" pitchFamily="34" charset="-120"/>
+              </a:rPr>
+              <a:t>结论二及证据</a:t>
+            </a:r>
+            <a:endParaRPr lang="zh-CN" sz="1950" dirty="0"/>
+          </a:p>
+        </p:txBody>
+      </p:sp>
+      <p:sp>
+        <p:nvSpPr>
+          <p:cNvPr id="14" name="T47/card/region-2/body"/>
+          <p:cNvSpPr/>
+          <p:nvPr/>
+        </p:nvSpPr>
+        <p:spPr>
+          <a:xfrm>
+            <a:off x="457200" y="3363754"/>
+            <a:ext cx="7448550" cy="811816"/>
+          </a:xfrm>
+          <a:prstGeom prst="rect">
+            <a:avLst/>
+          </a:prstGeom>
+          <a:noFill/>
+          <a:ln/>
+        </p:spPr>
+        <p:txBody>
+          <a:bodyPr wrap="none" lIns="0" tIns="0" rIns="0" bIns="0" rtlCol="0" anchor="t"/>
+          <a:lstStyle/>
+          <a:p>
+            <a:pPr algn="l" indent="0" marL="0">
+              <a:lnSpc>
+                <a:spcPts val="2232"/>
+              </a:lnSpc>
+              <a:buNone/>
+            </a:pPr>
+            <a:r>
+              <a:rPr lang="zh-CN" altLang="en-US" sz="1800" dirty="0">
                 <a:solidFill>
                   <a:srgbClr val="1C2430"/>
                 </a:solidFill>
@@ -6314,19 +6825,19 @@
                 <a:ea typeface="Noto Sans CJK SC" pitchFamily="34" charset="-122"/>
                 <a:cs typeface="Noto Sans CJK SC" pitchFamily="34" charset="-120"/>
               </a:rPr>
-              <a:t>用一句结论连接一项核心证据</a:t>
-            </a:r>
-            <a:endParaRPr lang="zh-CN" sz="1725" dirty="0"/>
-          </a:p>
-          <a:p>
-            <a:pPr algn="l" indent="0" marL="0">
-              <a:lnSpc>
-                <a:spcPts val="2139"/>
-              </a:lnSpc>
-              <a:buNone/>
-            </a:pPr>
-            <a:r>
-              <a:rPr lang="zh-CN" altLang="en-US" sz="1725" dirty="0">
+              <a:t>解释与前一结论的关系</a:t>
+            </a:r>
+            <a:endParaRPr lang="zh-CN" sz="1800" dirty="0"/>
+          </a:p>
+          <a:p>
+            <a:pPr algn="l" indent="0" marL="0">
+              <a:lnSpc>
+                <a:spcPts val="2232"/>
+              </a:lnSpc>
+              <a:buNone/>
+            </a:pPr>
+            <a:r>
+              <a:rPr lang="zh-CN" altLang="en-US" sz="1800" dirty="0">
                 <a:solidFill>
                   <a:srgbClr val="1C2430"/>
                 </a:solidFill>
@@ -6334,67 +6845,21 @@
                 <a:ea typeface="Noto Sans CJK SC" pitchFamily="34" charset="-122"/>
                 <a:cs typeface="Noto Sans CJK SC" pitchFamily="34" charset="-120"/>
               </a:rPr>
-              <a:t>保留样本、比较与实验身份</a:t>
-            </a:r>
-            <a:endParaRPr lang="zh-CN" sz="1725" dirty="0"/>
-          </a:p>
-        </p:txBody>
-      </p:sp>
-      <p:sp>
-        <p:nvSpPr>
-          <p:cNvPr id="11" name="T47/card/region-2/heading-rule"/>
-          <p:cNvSpPr/>
-          <p:nvPr/>
-        </p:nvSpPr>
-        <p:spPr>
-          <a:xfrm>
-            <a:off x="457200" y="3352800"/>
-            <a:ext cx="7448550" cy="0"/>
-          </a:xfrm>
-          <a:prstGeom prst="line">
-            <a:avLst/>
-          </a:prstGeom>
-          <a:noFill/>
-          <a:ln w="9525">
-            <a:solidFill>
-              <a:srgbClr val="BEC8D4"/>
-            </a:solidFill>
-            <a:prstDash val="solid"/>
-          </a:ln>
-        </p:spPr>
-      </p:sp>
-      <p:sp>
-        <p:nvSpPr>
-          <p:cNvPr id="12" name="T47/card/region-2/heading-mark"/>
-          <p:cNvSpPr/>
-          <p:nvPr/>
-        </p:nvSpPr>
-        <p:spPr>
-          <a:xfrm>
-            <a:off x="457200" y="3352800"/>
-            <a:ext cx="342900" cy="0"/>
-          </a:xfrm>
-          <a:prstGeom prst="line">
-            <a:avLst/>
-          </a:prstGeom>
-          <a:noFill/>
-          <a:ln w="17145">
-            <a:solidFill>
-              <a:srgbClr val="173C70"/>
-            </a:solidFill>
-            <a:prstDash val="solid"/>
-          </a:ln>
-        </p:spPr>
-      </p:sp>
-      <p:sp>
-        <p:nvSpPr>
-          <p:cNvPr id="13" name="T47/card/region-2/title"/>
-          <p:cNvSpPr/>
-          <p:nvPr/>
-        </p:nvSpPr>
-        <p:spPr>
-          <a:xfrm>
-            <a:off x="457200" y="3009900"/>
+              <a:t>避免重复陈述相同发现</a:t>
+            </a:r>
+            <a:endParaRPr lang="zh-CN" sz="1800" dirty="0"/>
+          </a:p>
+        </p:txBody>
+      </p:sp>
+      <p:sp>
+        <p:nvSpPr>
+          <p:cNvPr id="15" name="T47/card/region-3/title"/>
+          <p:cNvSpPr/>
+          <p:nvPr/>
+        </p:nvSpPr>
+        <p:spPr>
+          <a:xfrm>
+            <a:off x="457200" y="4509707"/>
             <a:ext cx="7448550" cy="323850"/>
           </a:xfrm>
           <a:prstGeom prst="rect">
@@ -6409,35 +6874,35 @@
           <a:p>
             <a:pPr algn="l" indent="0" marL="0">
               <a:lnSpc>
-                <a:spcPts val="2156"/>
-              </a:lnSpc>
-              <a:buNone/>
-            </a:pPr>
-            <a:r>
-              <a:rPr lang="zh-CN" altLang="en-US" sz="1875" b="1" dirty="0">
-                <a:solidFill>
-                  <a:srgbClr val="173C70"/>
-                </a:solidFill>
-                <a:latin typeface="Noto Sans CJK SC" pitchFamily="34" charset="0"/>
-                <a:ea typeface="Noto Sans CJK SC" pitchFamily="34" charset="-122"/>
-                <a:cs typeface="Noto Sans CJK SC" pitchFamily="34" charset="-120"/>
-              </a:rPr>
-              <a:t>结论二及证据</a:t>
-            </a:r>
-            <a:endParaRPr lang="zh-CN" sz="1875" dirty="0"/>
-          </a:p>
-        </p:txBody>
-      </p:sp>
-      <p:sp>
-        <p:nvSpPr>
-          <p:cNvPr id="14" name="T47/card/region-2/body"/>
-          <p:cNvSpPr/>
-          <p:nvPr/>
-        </p:nvSpPr>
-        <p:spPr>
-          <a:xfrm>
-            <a:off x="457200" y="3486150"/>
-            <a:ext cx="7448550" cy="762000"/>
+                <a:spcPts val="2242"/>
+              </a:lnSpc>
+              <a:buNone/>
+            </a:pPr>
+            <a:r>
+              <a:rPr lang="zh-CN" altLang="en-US" sz="1950" b="1" dirty="0">
+                <a:solidFill>
+                  <a:srgbClr val="146C63"/>
+                </a:solidFill>
+                <a:latin typeface="Noto Sans CJK SC" pitchFamily="34" charset="0"/>
+                <a:ea typeface="Noto Sans CJK SC" pitchFamily="34" charset="-122"/>
+                <a:cs typeface="Noto Sans CJK SC" pitchFamily="34" charset="-120"/>
+              </a:rPr>
+              <a:t>结论三及证据</a:t>
+            </a:r>
+            <a:endParaRPr lang="zh-CN" sz="1950" dirty="0"/>
+          </a:p>
+        </p:txBody>
+      </p:sp>
+      <p:sp>
+        <p:nvSpPr>
+          <p:cNvPr id="16" name="T47/card/region-3/body"/>
+          <p:cNvSpPr/>
+          <p:nvPr/>
+        </p:nvSpPr>
+        <p:spPr>
+          <a:xfrm>
+            <a:off x="457200" y="4957382"/>
+            <a:ext cx="7448550" cy="1018413"/>
           </a:xfrm>
           <a:prstGeom prst="rect">
             <a:avLst/>
@@ -6464,7 +6929,7 @@
                 <a:ea typeface="Noto Sans CJK SC" pitchFamily="34" charset="-122"/>
                 <a:cs typeface="Noto Sans CJK SC" pitchFamily="34" charset="-120"/>
               </a:rPr>
-              <a:t>解释与前一结论的关系</a:t>
+              <a:t>总结机制或适用范围</a:t>
             </a:r>
             <a:endParaRPr lang="zh-CN" sz="1800" dirty="0"/>
           </a:p>
@@ -6484,7 +6949,7 @@
                 <a:ea typeface="Noto Sans CJK SC" pitchFamily="34" charset="-122"/>
                 <a:cs typeface="Noto Sans CJK SC" pitchFamily="34" charset="-120"/>
               </a:rPr>
-              <a:t>避免重复陈述相同发现</a:t>
+              <a:t>将推断与原文报告区分</a:t>
             </a:r>
             <a:endParaRPr lang="zh-CN" sz="1800" dirty="0"/>
           </a:p>
@@ -6492,118 +6957,14 @@
       </p:sp>
       <p:sp>
         <p:nvSpPr>
-          <p:cNvPr id="15" name="T47/card/region-3/title"/>
-          <p:cNvSpPr/>
-          <p:nvPr/>
-        </p:nvSpPr>
-        <p:spPr>
-          <a:xfrm>
-            <a:off x="457200" y="4572000"/>
-            <a:ext cx="7448550" cy="323850"/>
-          </a:xfrm>
-          <a:prstGeom prst="rect">
-            <a:avLst/>
-          </a:prstGeom>
-          <a:noFill/>
-          <a:ln/>
-        </p:spPr>
-        <p:txBody>
-          <a:bodyPr wrap="none" lIns="0" tIns="0" rIns="0" bIns="0" rtlCol="0" anchor="t"/>
-          <a:lstStyle/>
-          <a:p>
-            <a:pPr algn="l" indent="0" marL="0">
-              <a:lnSpc>
-                <a:spcPts val="2156"/>
-              </a:lnSpc>
-              <a:buNone/>
-            </a:pPr>
-            <a:r>
-              <a:rPr lang="zh-CN" altLang="en-US" sz="1875" b="1" dirty="0">
-                <a:solidFill>
-                  <a:srgbClr val="173C70"/>
-                </a:solidFill>
-                <a:latin typeface="Noto Sans CJK SC" pitchFamily="34" charset="0"/>
-                <a:ea typeface="Noto Sans CJK SC" pitchFamily="34" charset="-122"/>
-                <a:cs typeface="Noto Sans CJK SC" pitchFamily="34" charset="-120"/>
-              </a:rPr>
-              <a:t>结论三及证据</a:t>
-            </a:r>
-            <a:endParaRPr lang="zh-CN" sz="1875" dirty="0"/>
-          </a:p>
-        </p:txBody>
-      </p:sp>
-      <p:sp>
-        <p:nvSpPr>
-          <p:cNvPr id="16" name="T47/card/region-3/body"/>
-          <p:cNvSpPr/>
-          <p:nvPr/>
-        </p:nvSpPr>
-        <p:spPr>
-          <a:xfrm>
-            <a:off x="457200" y="5019675"/>
-            <a:ext cx="7448550" cy="962025"/>
-          </a:xfrm>
-          <a:prstGeom prst="rect">
-            <a:avLst/>
-          </a:prstGeom>
-          <a:noFill/>
-          <a:ln/>
-        </p:spPr>
-        <p:txBody>
-          <a:bodyPr wrap="none" lIns="0" tIns="0" rIns="0" bIns="0" rtlCol="0" anchor="t"/>
-          <a:lstStyle/>
-          <a:p>
-            <a:pPr algn="l" indent="0" marL="0">
-              <a:lnSpc>
-                <a:spcPts val="2232"/>
-              </a:lnSpc>
-              <a:buNone/>
-            </a:pPr>
-            <a:r>
-              <a:rPr lang="zh-CN" altLang="en-US" sz="1800" dirty="0">
-                <a:solidFill>
-                  <a:srgbClr val="1C2430"/>
-                </a:solidFill>
-                <a:latin typeface="Noto Sans CJK SC" pitchFamily="34" charset="0"/>
-                <a:ea typeface="Noto Sans CJK SC" pitchFamily="34" charset="-122"/>
-                <a:cs typeface="Noto Sans CJK SC" pitchFamily="34" charset="-120"/>
-              </a:rPr>
-              <a:t>总结机制或适用范围</a:t>
-            </a:r>
-            <a:endParaRPr lang="zh-CN" sz="1800" dirty="0"/>
-          </a:p>
-          <a:p>
-            <a:pPr algn="l" indent="0" marL="0">
-              <a:lnSpc>
-                <a:spcPts val="2232"/>
-              </a:lnSpc>
-              <a:buNone/>
-            </a:pPr>
-            <a:r>
-              <a:rPr lang="zh-CN" altLang="en-US" sz="1800" dirty="0">
-                <a:solidFill>
-                  <a:srgbClr val="1C2430"/>
-                </a:solidFill>
-                <a:latin typeface="Noto Sans CJK SC" pitchFamily="34" charset="0"/>
-                <a:ea typeface="Noto Sans CJK SC" pitchFamily="34" charset="-122"/>
-                <a:cs typeface="Noto Sans CJK SC" pitchFamily="34" charset="-120"/>
-              </a:rPr>
-              <a:t>将推断与原文报告区分</a:t>
-            </a:r>
-            <a:endParaRPr lang="zh-CN" sz="1800" dirty="0"/>
-          </a:p>
-        </p:txBody>
-      </p:sp>
-      <p:sp>
-        <p:nvSpPr>
           <p:cNvPr id="17" name="T47/card/region-4/frame"/>
           <p:cNvSpPr/>
           <p:nvPr/>
         </p:nvSpPr>
         <p:spPr>
           <a:xfrm>
-            <a:off x="8286750" y="1543050"/>
-            <a:ext cx="3448050" cy="2000250"/>
+            <a:off x="8286750" y="1360646"/>
+            <a:ext cx="3448050" cy="2081594"/>
           </a:xfrm>
           <a:prstGeom prst="rect">
             <a:avLst/>
@@ -6627,14 +6988,14 @@
         </p:nvSpPr>
         <p:spPr>
           <a:xfrm>
-            <a:off x="8401050" y="1428750"/>
-            <a:ext cx="1181100" cy="320040"/>
+            <a:off x="8401050" y="1246346"/>
+            <a:ext cx="1257300" cy="342900"/>
           </a:xfrm>
           <a:prstGeom prst="rect">
             <a:avLst/>
           </a:prstGeom>
           <a:solidFill>
-            <a:srgbClr val="903543"/>
+            <a:srgbClr val="A24736"/>
           </a:solidFill>
           <a:ln w="12700">
             <a:solidFill>
@@ -6654,8 +7015,8 @@
         </p:nvSpPr>
         <p:spPr>
           <a:xfrm>
-            <a:off x="8505825" y="1457325"/>
-            <a:ext cx="971550" cy="262890"/>
+            <a:off x="8505825" y="1274921"/>
+            <a:ext cx="1047750" cy="285750"/>
           </a:xfrm>
           <a:prstGeom prst="rect">
             <a:avLst/>
@@ -6669,12 +7030,12 @@
           <a:p>
             <a:pPr algn="l" indent="0" marL="0">
               <a:lnSpc>
-                <a:spcPts val="2070"/>
-              </a:lnSpc>
-              <a:buNone/>
-            </a:pPr>
-            <a:r>
-              <a:rPr lang="zh-CN" altLang="en-US" sz="1800" b="1" dirty="0">
+                <a:spcPts val="2242"/>
+              </a:lnSpc>
+              <a:buNone/>
+            </a:pPr>
+            <a:r>
+              <a:rPr lang="zh-CN" altLang="en-US" sz="1950" b="1" dirty="0">
                 <a:solidFill>
                   <a:srgbClr val="FFFFFF"/>
                 </a:solidFill>
@@ -6684,39 +7045,59 @@
               </a:rPr>
               <a:t>尚未验证</a:t>
             </a:r>
+            <a:endParaRPr lang="zh-CN" sz="1950" dirty="0"/>
+          </a:p>
+        </p:txBody>
+      </p:sp>
+      <p:sp>
+        <p:nvSpPr>
+          <p:cNvPr id="20" name="T47/card/region-4/body"/>
+          <p:cNvSpPr/>
+          <p:nvPr/>
+        </p:nvSpPr>
+        <p:spPr>
+          <a:xfrm>
+            <a:off x="8420100" y="1732121"/>
+            <a:ext cx="3181350" cy="1614868"/>
+          </a:xfrm>
+          <a:prstGeom prst="rect">
+            <a:avLst/>
+          </a:prstGeom>
+          <a:noFill/>
+          <a:ln/>
+        </p:spPr>
+        <p:txBody>
+          <a:bodyPr wrap="none" lIns="0" tIns="0" rIns="0" bIns="0" rtlCol="0" anchor="t"/>
+          <a:lstStyle/>
+          <a:p>
+            <a:pPr algn="l" indent="0" marL="0">
+              <a:lnSpc>
+                <a:spcPts val="2232"/>
+              </a:lnSpc>
+              <a:buNone/>
+            </a:pPr>
+            <a:r>
+              <a:rPr lang="zh-CN" altLang="en-US" sz="1800" dirty="0">
+                <a:solidFill>
+                  <a:srgbClr val="1C2430"/>
+                </a:solidFill>
+                <a:latin typeface="Noto Sans CJK SC" pitchFamily="34" charset="0"/>
+                <a:ea typeface="Noto Sans CJK SC" pitchFamily="34" charset="-122"/>
+                <a:cs typeface="Noto Sans CJK SC" pitchFamily="34" charset="-120"/>
+              </a:rPr>
+              <a:t>列出论文没有测试的条件</a:t>
+            </a:r>
             <a:endParaRPr lang="zh-CN" sz="1800" dirty="0"/>
           </a:p>
-        </p:txBody>
-      </p:sp>
-      <p:sp>
-        <p:nvSpPr>
-          <p:cNvPr id="20" name="T47/card/region-4/body"/>
-          <p:cNvSpPr/>
-          <p:nvPr/>
-        </p:nvSpPr>
-        <p:spPr>
-          <a:xfrm>
-            <a:off x="8420100" y="1891665"/>
-            <a:ext cx="3181350" cy="1556385"/>
-          </a:xfrm>
-          <a:prstGeom prst="rect">
-            <a:avLst/>
-          </a:prstGeom>
-          <a:noFill/>
-          <a:ln/>
-        </p:spPr>
-        <p:txBody>
-          <a:bodyPr wrap="none" lIns="0" tIns="0" rIns="0" bIns="0" rtlCol="0" anchor="t"/>
-          <a:lstStyle/>
-          <a:p>
-            <a:pPr algn="l" indent="0" marL="0">
-              <a:lnSpc>
-                <a:spcPts val="2139"/>
-              </a:lnSpc>
-              <a:buNone/>
-            </a:pPr>
-            <a:r>
-              <a:rPr lang="zh-CN" altLang="en-US" sz="1725" dirty="0">
+          <a:p>
+            <a:pPr algn="l" indent="0" marL="0">
+              <a:lnSpc>
+                <a:spcPts val="2232"/>
+              </a:lnSpc>
+              <a:buNone/>
+            </a:pPr>
+            <a:r>
+              <a:rPr lang="zh-CN" altLang="en-US" sz="1800" dirty="0">
                 <a:solidFill>
                   <a:srgbClr val="1C2430"/>
                 </a:solidFill>
@@ -6724,29 +7105,9 @@
                 <a:ea typeface="Noto Sans CJK SC" pitchFamily="34" charset="-122"/>
                 <a:cs typeface="Noto Sans CJK SC" pitchFamily="34" charset="-120"/>
               </a:rPr>
-              <a:t>列出论文没有测试的条件</a:t>
-            </a:r>
-            <a:endParaRPr lang="zh-CN" sz="1725" dirty="0"/>
-          </a:p>
-          <a:p>
-            <a:pPr algn="l" indent="0" marL="0">
-              <a:lnSpc>
-                <a:spcPts val="2139"/>
-              </a:lnSpc>
-              <a:buNone/>
-            </a:pPr>
-            <a:r>
-              <a:rPr lang="zh-CN" altLang="en-US" sz="1725" dirty="0">
-                <a:solidFill>
-                  <a:srgbClr val="1C2430"/>
-                </a:solidFill>
-                <a:latin typeface="Noto Sans CJK SC" pitchFamily="34" charset="0"/>
-                <a:ea typeface="Noto Sans CJK SC" pitchFamily="34" charset="-122"/>
-                <a:cs typeface="Noto Sans CJK SC" pitchFamily="34" charset="-120"/>
-              </a:rPr>
               <a:t>说明这些未知如何影响应用</a:t>
             </a:r>
-            <a:endParaRPr lang="zh-CN" sz="1725" dirty="0"/>
+            <a:endParaRPr lang="zh-CN" sz="1800" dirty="0"/>
           </a:p>
         </p:txBody>
       </p:sp>
@@ -6758,8 +7119,8 @@
         </p:nvSpPr>
         <p:spPr>
           <a:xfrm>
-            <a:off x="8286750" y="3952875"/>
-            <a:ext cx="3448050" cy="2066925"/>
+            <a:off x="8286750" y="3861245"/>
+            <a:ext cx="3448050" cy="2152650"/>
           </a:xfrm>
           <a:prstGeom prst="rect">
             <a:avLst/>
@@ -6769,7 +7130,7 @@
           </a:solidFill>
           <a:ln w="14288">
             <a:solidFill>
-              <a:srgbClr val="355D88"/>
+              <a:srgbClr val="6C528E"/>
             </a:solidFill>
             <a:prstDash val="solid"/>
           </a:ln>
@@ -6783,7 +7144,7 @@
         </p:nvSpPr>
         <p:spPr>
           <a:xfrm>
-            <a:off x="8420100" y="3800475"/>
+            <a:off x="8420100" y="3708844"/>
             <a:ext cx="1524000" cy="323850"/>
           </a:xfrm>
           <a:prstGeom prst="rect">
@@ -6810,7 +7171,7 @@
         </p:nvSpPr>
         <p:spPr>
           <a:xfrm>
-            <a:off x="8477250" y="5867400"/>
+            <a:off x="8477250" y="5861495"/>
             <a:ext cx="333375" cy="0"/>
           </a:xfrm>
           <a:prstGeom prst="line">
@@ -6819,7 +7180,7 @@
           <a:noFill/>
           <a:ln w="28575">
             <a:solidFill>
-              <a:srgbClr val="355D88"/>
+              <a:srgbClr val="6C528E"/>
             </a:solidFill>
             <a:prstDash val="solid"/>
           </a:ln>
@@ -6833,7 +7194,7 @@
         </p:nvSpPr>
         <p:spPr>
           <a:xfrm>
-            <a:off x="8477250" y="3810000"/>
+            <a:off x="8477250" y="3718370"/>
             <a:ext cx="3067050" cy="361950"/>
           </a:xfrm>
           <a:prstGeom prst="rect">
@@ -6848,84 +7209,138 @@
           <a:p>
             <a:pPr algn="l" indent="0" marL="0">
               <a:lnSpc>
-                <a:spcPts val="2070"/>
+                <a:spcPts val="2242"/>
+              </a:lnSpc>
+              <a:buNone/>
+            </a:pPr>
+            <a:r>
+              <a:rPr lang="zh-CN" altLang="en-US" sz="1950" b="1" dirty="0">
+                <a:solidFill>
+                  <a:srgbClr val="6C528E"/>
+                </a:solidFill>
+                <a:latin typeface="Noto Sans CJK SC" pitchFamily="34" charset="0"/>
+                <a:ea typeface="Noto Sans CJK SC" pitchFamily="34" charset="-122"/>
+                <a:cs typeface="Noto Sans CJK SC" pitchFamily="34" charset="-120"/>
+              </a:rPr>
+              <a:t>优先研究问题</a:t>
+            </a:r>
+            <a:endParaRPr lang="zh-CN" sz="1950" dirty="0"/>
+          </a:p>
+        </p:txBody>
+      </p:sp>
+      <p:sp>
+        <p:nvSpPr>
+          <p:cNvPr id="25" name="T47/card/region-5/body"/>
+          <p:cNvSpPr/>
+          <p:nvPr/>
+        </p:nvSpPr>
+        <p:spPr>
+          <a:xfrm>
+            <a:off x="8477250" y="4251770"/>
+            <a:ext cx="3067050" cy="1571625"/>
+          </a:xfrm>
+          <a:prstGeom prst="rect">
+            <a:avLst/>
+          </a:prstGeom>
+          <a:noFill/>
+          <a:ln/>
+        </p:spPr>
+        <p:txBody>
+          <a:bodyPr wrap="none" lIns="0" tIns="0" rIns="0" bIns="0" rtlCol="0" anchor="t"/>
+          <a:lstStyle/>
+          <a:p>
+            <a:pPr algn="l" indent="0" marL="0">
+              <a:lnSpc>
+                <a:spcPts val="2232"/>
+              </a:lnSpc>
+              <a:buNone/>
+            </a:pPr>
+            <a:r>
+              <a:rPr lang="zh-CN" altLang="en-US" sz="1800" dirty="0">
+                <a:solidFill>
+                  <a:srgbClr val="1C2430"/>
+                </a:solidFill>
+                <a:latin typeface="Noto Sans CJK SC" pitchFamily="34" charset="0"/>
+                <a:ea typeface="Noto Sans CJK SC" pitchFamily="34" charset="-122"/>
+                <a:cs typeface="Noto Sans CJK SC" pitchFamily="34" charset="-120"/>
+              </a:rPr>
+              <a:t>提出能被实验区分的下一步问</a:t>
+            </a:r>
+            <a:endParaRPr lang="zh-CN" sz="1800" dirty="0"/>
+          </a:p>
+          <a:p>
+            <a:pPr algn="l" indent="0" marL="0">
+              <a:lnSpc>
+                <a:spcPts val="2232"/>
+              </a:lnSpc>
+              <a:buNone/>
+            </a:pPr>
+            <a:r>
+              <a:rPr lang="zh-CN" altLang="en-US" sz="1800" dirty="0">
+                <a:solidFill>
+                  <a:srgbClr val="1C2430"/>
+                </a:solidFill>
+                <a:latin typeface="Noto Sans CJK SC" pitchFamily="34" charset="0"/>
+                <a:ea typeface="Noto Sans CJK SC" pitchFamily="34" charset="-122"/>
+                <a:cs typeface="Noto Sans CJK SC" pitchFamily="34" charset="-120"/>
+              </a:rPr>
+              <a:t>题</a:t>
+            </a:r>
+            <a:endParaRPr lang="zh-CN" sz="1800" dirty="0"/>
+          </a:p>
+          <a:p>
+            <a:pPr algn="l" indent="0" marL="0">
+              <a:lnSpc>
+                <a:spcPts val="2232"/>
+              </a:lnSpc>
+              <a:buNone/>
+            </a:pPr>
+            <a:r>
+              <a:rPr lang="zh-CN" altLang="en-US" sz="1800" dirty="0">
+                <a:solidFill>
+                  <a:srgbClr val="1C2430"/>
+                </a:solidFill>
+                <a:latin typeface="Noto Sans CJK SC" pitchFamily="34" charset="0"/>
+                <a:ea typeface="Noto Sans CJK SC" pitchFamily="34" charset="-122"/>
+                <a:cs typeface="Noto Sans CJK SC" pitchFamily="34" charset="-120"/>
+              </a:rPr>
+              <a:t>保留公平</a:t>
+            </a:r>
+            <a:pPr algn="l" indent="0" marL="0">
+              <a:lnSpc>
+                <a:spcPts val="2232"/>
               </a:lnSpc>
               <a:buNone/>
             </a:pPr>
             <a:r>
               <a:rPr lang="zh-CN" altLang="en-US" sz="1800" b="1" dirty="0">
                 <a:solidFill>
-                  <a:srgbClr val="355D88"/>
-                </a:solidFill>
-                <a:latin typeface="Noto Sans CJK SC" pitchFamily="34" charset="0"/>
-                <a:ea typeface="Noto Sans CJK SC" pitchFamily="34" charset="-122"/>
-                <a:cs typeface="Noto Sans CJK SC" pitchFamily="34" charset="-120"/>
-              </a:rPr>
-              <a:t>优先研究问题</a:t>
+                  <a:srgbClr val="6C528E"/>
+                </a:solidFill>
+                <a:latin typeface="Noto Sans CJK SC" pitchFamily="34" charset="0"/>
+                <a:ea typeface="Noto Sans CJK SC" pitchFamily="34" charset="-122"/>
+                <a:cs typeface="Noto Sans CJK SC" pitchFamily="34" charset="-120"/>
+              </a:rPr>
+              <a:t>对照</a:t>
+            </a:r>
+            <a:pPr algn="l" indent="0" marL="0">
+              <a:lnSpc>
+                <a:spcPts val="2232"/>
+              </a:lnSpc>
+              <a:buNone/>
+            </a:pPr>
+            <a:r>
+              <a:rPr lang="zh-CN" altLang="en-US" sz="1800" dirty="0">
+                <a:solidFill>
+                  <a:srgbClr val="1C2430"/>
+                </a:solidFill>
+                <a:latin typeface="Noto Sans CJK SC" pitchFamily="34" charset="0"/>
+                <a:ea typeface="Noto Sans CJK SC" pitchFamily="34" charset="-122"/>
+                <a:cs typeface="Noto Sans CJK SC" pitchFamily="34" charset="-120"/>
+              </a:rPr>
+              <a:t>和评价尺度</a:t>
             </a:r>
             <a:endParaRPr lang="zh-CN" sz="1800" dirty="0"/>
-          </a:p>
-        </p:txBody>
-      </p:sp>
-      <p:sp>
-        <p:nvSpPr>
-          <p:cNvPr id="25" name="T47/card/region-5/body"/>
-          <p:cNvSpPr/>
-          <p:nvPr/>
-        </p:nvSpPr>
-        <p:spPr>
-          <a:xfrm>
-            <a:off x="8477250" y="4343400"/>
-            <a:ext cx="3067050" cy="1485900"/>
-          </a:xfrm>
-          <a:prstGeom prst="rect">
-            <a:avLst/>
-          </a:prstGeom>
-          <a:noFill/>
-          <a:ln/>
-        </p:spPr>
-        <p:txBody>
-          <a:bodyPr wrap="none" lIns="0" tIns="0" rIns="0" bIns="0" rtlCol="0" anchor="t"/>
-          <a:lstStyle/>
-          <a:p>
-            <a:pPr algn="l" indent="0" marL="0">
-              <a:lnSpc>
-                <a:spcPts val="2178"/>
-              </a:lnSpc>
-              <a:buNone/>
-            </a:pPr>
-            <a:r>
-              <a:rPr lang="zh-CN" altLang="en-US" sz="1650" dirty="0">
-                <a:solidFill>
-                  <a:srgbClr val="1C2430"/>
-                </a:solidFill>
-                <a:latin typeface="Noto Sans CJK SC" pitchFamily="34" charset="0"/>
-                <a:ea typeface="Noto Sans CJK SC" pitchFamily="34" charset="-122"/>
-                <a:cs typeface="Noto Sans CJK SC" pitchFamily="34" charset="-120"/>
-              </a:rPr>
-              <a:t>提出能被实验区分的下一步问题</a:t>
-            </a:r>
-            <a:endParaRPr lang="zh-CN" sz="1650" dirty="0"/>
-          </a:p>
-          <a:p>
-            <a:pPr algn="l" indent="0" marL="0">
-              <a:lnSpc>
-                <a:spcPts val="2178"/>
-              </a:lnSpc>
-              <a:buNone/>
-            </a:pPr>
-            <a:r>
-              <a:rPr lang="zh-CN" altLang="en-US" sz="1650" dirty="0">
-                <a:solidFill>
-                  <a:srgbClr val="1C2430"/>
-                </a:solidFill>
-                <a:latin typeface="Noto Sans CJK SC" pitchFamily="34" charset="0"/>
-                <a:ea typeface="Noto Sans CJK SC" pitchFamily="34" charset="-122"/>
-                <a:cs typeface="Noto Sans CJK SC" pitchFamily="34" charset="-120"/>
-              </a:rPr>
-              <a:t>保留公平对照和评价尺度</a:t>
-            </a:r>
-            <a:endParaRPr lang="zh-CN" sz="1650" dirty="0"/>
           </a:p>
         </p:txBody>
       </p:sp>
@@ -6965,7 +7380,7 @@
                 <a:ea typeface="Noto Sans CJK SC" pitchFamily="34" charset="-122"/>
                 <a:cs typeface="Noto Sans CJK SC" pitchFamily="34" charset="-120"/>
               </a:rPr>
-              <a:t>T1 · 2026 · 待替换</a:t>
+              <a:t>T1 · 2026 · 书目占位；图表均为合成示例</a:t>
             </a:r>
             <a:endParaRPr lang="zh-CN" sz="1125" dirty="0"/>
           </a:p>
@@ -7074,14 +7489,14 @@
       </p:sp>
       <p:sp>
         <p:nvSpPr>
-          <p:cNvPr id="4" name="T48/kicker"/>
-          <p:cNvSpPr/>
-          <p:nvPr/>
-        </p:nvSpPr>
-        <p:spPr>
-          <a:xfrm>
-            <a:off x="457200" y="152400"/>
-            <a:ext cx="11277600" cy="190500"/>
+          <p:cNvPr id="4" name="T48/title"/>
+          <p:cNvSpPr/>
+          <p:nvPr/>
+        </p:nvSpPr>
+        <p:spPr>
+          <a:xfrm>
+            <a:off x="457200" y="209550"/>
+            <a:ext cx="11277600" cy="438150"/>
           </a:xfrm>
           <a:prstGeom prst="rect">
             <a:avLst/>
@@ -7095,12 +7510,204 @@
           <a:p>
             <a:pPr algn="l" indent="0" marL="0">
               <a:lnSpc>
-                <a:spcPts val="1320"/>
-              </a:lnSpc>
-              <a:buNone/>
-            </a:pPr>
-            <a:r>
-              <a:rPr lang="zh-CN" altLang="en-US" sz="1200" dirty="0">
+                <a:spcPts val="3360"/>
+              </a:lnSpc>
+              <a:buNone/>
+            </a:pPr>
+            <a:r>
+              <a:rPr lang="zh-CN" altLang="en-US" sz="3000" b="1" dirty="0">
+                <a:solidFill>
+                  <a:srgbClr val="1C2430"/>
+                </a:solidFill>
+                <a:latin typeface="Noto Sans CJK SC" pitchFamily="34" charset="0"/>
+                <a:ea typeface="Noto Sans CJK SC" pitchFamily="34" charset="-122"/>
+                <a:cs typeface="Noto Sans CJK SC" pitchFamily="34" charset="-120"/>
+              </a:rPr>
+              <a:t>参考文献与补充说明</a:t>
+            </a:r>
+            <a:endParaRPr lang="zh-CN" sz="3000" dirty="0"/>
+          </a:p>
+        </p:txBody>
+      </p:sp>
+      <p:sp>
+        <p:nvSpPr>
+          <p:cNvPr id="5" name="T48/header-rule"/>
+          <p:cNvSpPr/>
+          <p:nvPr/>
+        </p:nvSpPr>
+        <p:spPr>
+          <a:xfrm>
+            <a:off x="457200" y="752475"/>
+            <a:ext cx="11277600" cy="0"/>
+          </a:xfrm>
+          <a:prstGeom prst="line">
+            <a:avLst/>
+          </a:prstGeom>
+          <a:noFill/>
+          <a:ln w="10478">
+            <a:solidFill>
+              <a:srgbClr val="BEC8D4"/>
+            </a:solidFill>
+            <a:prstDash val="solid"/>
+          </a:ln>
+        </p:spPr>
+      </p:sp>
+      <p:sp>
+        <p:nvSpPr>
+          <p:cNvPr id="6" name="T48/header-accent"/>
+          <p:cNvSpPr/>
+          <p:nvPr/>
+        </p:nvSpPr>
+        <p:spPr>
+          <a:xfrm>
+            <a:off x="457200" y="752475"/>
+            <a:ext cx="704850" cy="0"/>
+          </a:xfrm>
+          <a:prstGeom prst="line">
+            <a:avLst/>
+          </a:prstGeom>
+          <a:noFill/>
+          <a:ln w="28575">
+            <a:solidFill>
+              <a:srgbClr val="173C70"/>
+            </a:solidFill>
+            <a:prstDash val="solid"/>
+          </a:ln>
+        </p:spPr>
+      </p:sp>
+      <p:sp>
+        <p:nvSpPr>
+          <p:cNvPr id="7" name="T48/ref:T1:id"/>
+          <p:cNvSpPr/>
+          <p:nvPr/>
+        </p:nvSpPr>
+        <p:spPr>
+          <a:xfrm>
+            <a:off x="457200" y="1166432"/>
+            <a:ext cx="552450" cy="304800"/>
+          </a:xfrm>
+          <a:prstGeom prst="rect">
+            <a:avLst/>
+          </a:prstGeom>
+          <a:noFill/>
+          <a:ln/>
+        </p:spPr>
+        <p:txBody>
+          <a:bodyPr wrap="none" lIns="0" tIns="0" rIns="0" bIns="0" rtlCol="0" anchor="t"/>
+          <a:lstStyle/>
+          <a:p>
+            <a:pPr algn="l" indent="0" marL="0">
+              <a:lnSpc>
+                <a:spcPts val="2112"/>
+              </a:lnSpc>
+              <a:buNone/>
+            </a:pPr>
+            <a:r>
+              <a:rPr lang="zh-CN" altLang="en-US" sz="1650" b="1" dirty="0">
+                <a:solidFill>
+                  <a:srgbClr val="173C70"/>
+                </a:solidFill>
+                <a:latin typeface="Noto Sans CJK SC" pitchFamily="34" charset="0"/>
+                <a:ea typeface="Noto Sans CJK SC" pitchFamily="34" charset="-122"/>
+                <a:cs typeface="Noto Sans CJK SC" pitchFamily="34" charset="-120"/>
+              </a:rPr>
+              <a:t>T1</a:t>
+            </a:r>
+            <a:endParaRPr lang="zh-CN" sz="1650" dirty="0"/>
+          </a:p>
+        </p:txBody>
+      </p:sp>
+      <p:sp>
+        <p:nvSpPr>
+          <p:cNvPr id="8" name="T48/ref:T1:title"/>
+          <p:cNvSpPr/>
+          <p:nvPr/>
+        </p:nvSpPr>
+        <p:spPr>
+          <a:xfrm>
+            <a:off x="1123950" y="1147381"/>
+            <a:ext cx="7010400" cy="548640"/>
+          </a:xfrm>
+          <a:prstGeom prst="rect">
+            <a:avLst/>
+          </a:prstGeom>
+          <a:noFill/>
+          <a:ln/>
+        </p:spPr>
+        <p:txBody>
+          <a:bodyPr wrap="none" lIns="0" tIns="0" rIns="0" bIns="0" rtlCol="0" anchor="t"/>
+          <a:lstStyle/>
+          <a:p>
+            <a:pPr algn="l" indent="0" marL="0">
+              <a:lnSpc>
+                <a:spcPts val="2160"/>
+              </a:lnSpc>
+              <a:buNone/>
+            </a:pPr>
+            <a:r>
+              <a:rPr lang="zh-CN" altLang="en-US" sz="1800" b="1" dirty="0">
+                <a:solidFill>
+                  <a:srgbClr val="1C2430"/>
+                </a:solidFill>
+                <a:latin typeface="Noto Sans CJK SC" pitchFamily="34" charset="0"/>
+                <a:ea typeface="Noto Sans CJK SC" pitchFamily="34" charset="-122"/>
+                <a:cs typeface="Noto Sans CJK SC" pitchFamily="34" charset="-120"/>
+              </a:rPr>
+              <a:t>Full article title: connecting decision models, experimental</a:t>
+            </a:r>
+            <a:endParaRPr lang="zh-CN" sz="1800" dirty="0"/>
+          </a:p>
+          <a:p>
+            <a:pPr algn="l" indent="0" marL="0">
+              <a:lnSpc>
+                <a:spcPts val="2160"/>
+              </a:lnSpc>
+              <a:buNone/>
+            </a:pPr>
+            <a:r>
+              <a:rPr lang="zh-CN" altLang="en-US" sz="1800" b="1" dirty="0">
+                <a:solidFill>
+                  <a:srgbClr val="1C2430"/>
+                </a:solidFill>
+                <a:latin typeface="Noto Sans CJK SC" pitchFamily="34" charset="0"/>
+                <a:ea typeface="Noto Sans CJK SC" pitchFamily="34" charset="-122"/>
+                <a:cs typeface="Noto Sans CJK SC" pitchFamily="34" charset="-120"/>
+              </a:rPr>
+              <a:t> evidence and independent validation in crop cultivation</a:t>
+            </a:r>
+            <a:endParaRPr lang="zh-CN" sz="1800" dirty="0"/>
+          </a:p>
+        </p:txBody>
+      </p:sp>
+      <p:sp>
+        <p:nvSpPr>
+          <p:cNvPr id="9" name="T48/ref:T1:meta"/>
+          <p:cNvSpPr/>
+          <p:nvPr/>
+        </p:nvSpPr>
+        <p:spPr>
+          <a:xfrm>
+            <a:off x="1123950" y="1762697"/>
+            <a:ext cx="7010400" cy="424815"/>
+          </a:xfrm>
+          <a:prstGeom prst="rect">
+            <a:avLst/>
+          </a:prstGeom>
+          <a:noFill/>
+          <a:ln/>
+        </p:spPr>
+        <p:txBody>
+          <a:bodyPr wrap="none" lIns="0" tIns="0" rIns="0" bIns="0" rtlCol="0" anchor="t"/>
+          <a:lstStyle/>
+          <a:p>
+            <a:pPr algn="l" indent="0" marL="0">
+              <a:lnSpc>
+                <a:spcPts val="1674"/>
+              </a:lnSpc>
+              <a:buNone/>
+            </a:pPr>
+            <a:r>
+              <a:rPr lang="zh-CN" altLang="en-US" sz="1350" dirty="0">
                 <a:solidFill>
                   <a:srgbClr val="515B68"/>
                 </a:solidFill>
@@ -7108,22 +7715,65 @@
                 <a:ea typeface="Noto Sans CJK SC" pitchFamily="34" charset="-122"/>
                 <a:cs typeface="Noto Sans CJK SC" pitchFamily="34" charset="-120"/>
               </a:rPr>
-              <a:t>结构模板 / 占位说明与合成数据</a:t>
-            </a:r>
-            <a:endParaRPr lang="zh-CN" sz="1200" dirty="0"/>
-          </a:p>
-        </p:txBody>
-      </p:sp>
-      <p:sp>
-        <p:nvSpPr>
-          <p:cNvPr id="5" name="T48/title"/>
-          <p:cNvSpPr/>
-          <p:nvPr/>
-        </p:nvSpPr>
-        <p:spPr>
-          <a:xfrm>
-            <a:off x="457200" y="381000"/>
-            <a:ext cx="11277600" cy="400050"/>
+              <a:t>作者姓名（替换） · 期刊与卷页（替换） · 2026 · DOI: 书目占位；图表均为合成示例 · 书</a:t>
+            </a:r>
+            <a:endParaRPr lang="zh-CN" sz="1350" dirty="0"/>
+          </a:p>
+          <a:p>
+            <a:pPr algn="l" indent="0" marL="0">
+              <a:lnSpc>
+                <a:spcPts val="1674"/>
+              </a:lnSpc>
+              <a:buNone/>
+            </a:pPr>
+            <a:r>
+              <a:rPr lang="zh-CN" altLang="en-US" sz="1350" dirty="0">
+                <a:solidFill>
+                  <a:srgbClr val="515B68"/>
+                </a:solidFill>
+                <a:latin typeface="Noto Sans CJK SC" pitchFamily="34" charset="0"/>
+                <a:ea typeface="Noto Sans CJK SC" pitchFamily="34" charset="-122"/>
+                <a:cs typeface="Noto Sans CJK SC" pitchFamily="34" charset="-120"/>
+              </a:rPr>
+              <a:t>目占位，非真实文献</a:t>
+            </a:r>
+            <a:endParaRPr lang="zh-CN" sz="1350" dirty="0"/>
+          </a:p>
+        </p:txBody>
+      </p:sp>
+      <p:sp>
+        <p:nvSpPr>
+          <p:cNvPr id="10" name="T48/ref:T1:line"/>
+          <p:cNvSpPr/>
+          <p:nvPr/>
+        </p:nvSpPr>
+        <p:spPr>
+          <a:xfrm>
+            <a:off x="1123950" y="2292286"/>
+            <a:ext cx="7010400" cy="0"/>
+          </a:xfrm>
+          <a:prstGeom prst="line">
+            <a:avLst/>
+          </a:prstGeom>
+          <a:noFill/>
+          <a:ln w="13335">
+            <a:solidFill>
+              <a:srgbClr val="BEC8D4"/>
+            </a:solidFill>
+            <a:prstDash val="solid"/>
+          </a:ln>
+        </p:spPr>
+      </p:sp>
+      <p:sp>
+        <p:nvSpPr>
+          <p:cNvPr id="11" name="T48/ref:T2:id"/>
+          <p:cNvSpPr/>
+          <p:nvPr/>
+        </p:nvSpPr>
+        <p:spPr>
+          <a:xfrm>
+            <a:off x="457200" y="2435161"/>
+            <a:ext cx="552450" cy="304800"/>
           </a:xfrm>
           <a:prstGeom prst="rect">
             <a:avLst/>
@@ -7137,12 +7787,54 @@
           <a:p>
             <a:pPr algn="l" indent="0" marL="0">
               <a:lnSpc>
-                <a:spcPts val="2856"/>
-              </a:lnSpc>
-              <a:buNone/>
-            </a:pPr>
-            <a:r>
-              <a:rPr lang="zh-CN" altLang="en-US" sz="2550" b="1" dirty="0">
+                <a:spcPts val="2112"/>
+              </a:lnSpc>
+              <a:buNone/>
+            </a:pPr>
+            <a:r>
+              <a:rPr lang="zh-CN" altLang="en-US" sz="1650" b="1" dirty="0">
+                <a:solidFill>
+                  <a:srgbClr val="173C70"/>
+                </a:solidFill>
+                <a:latin typeface="Noto Sans CJK SC" pitchFamily="34" charset="0"/>
+                <a:ea typeface="Noto Sans CJK SC" pitchFamily="34" charset="-122"/>
+                <a:cs typeface="Noto Sans CJK SC" pitchFamily="34" charset="-120"/>
+              </a:rPr>
+              <a:t>T2</a:t>
+            </a:r>
+            <a:endParaRPr lang="zh-CN" sz="1650" dirty="0"/>
+          </a:p>
+        </p:txBody>
+      </p:sp>
+      <p:sp>
+        <p:nvSpPr>
+          <p:cNvPr id="12" name="T48/ref:T2:title"/>
+          <p:cNvSpPr/>
+          <p:nvPr/>
+        </p:nvSpPr>
+        <p:spPr>
+          <a:xfrm>
+            <a:off x="1123950" y="2416112"/>
+            <a:ext cx="7010400" cy="274320"/>
+          </a:xfrm>
+          <a:prstGeom prst="rect">
+            <a:avLst/>
+          </a:prstGeom>
+          <a:noFill/>
+          <a:ln/>
+        </p:spPr>
+        <p:txBody>
+          <a:bodyPr wrap="none" lIns="0" tIns="0" rIns="0" bIns="0" rtlCol="0" anchor="t"/>
+          <a:lstStyle/>
+          <a:p>
+            <a:pPr algn="l" indent="0" marL="0">
+              <a:lnSpc>
+                <a:spcPts val="2160"/>
+              </a:lnSpc>
+              <a:buNone/>
+            </a:pPr>
+            <a:r>
+              <a:rPr lang="zh-CN" altLang="en-US" sz="1800" b="1" dirty="0">
                 <a:solidFill>
                   <a:srgbClr val="1C2430"/>
                 </a:solidFill>
@@ -7150,44 +7842,106 @@
                 <a:ea typeface="Noto Sans CJK SC" pitchFamily="34" charset="-122"/>
                 <a:cs typeface="Noto Sans CJK SC" pitchFamily="34" charset="-120"/>
               </a:rPr>
-              <a:t>参考文献与补充说明</a:t>
-            </a:r>
-            <a:endParaRPr lang="zh-CN" sz="2550" dirty="0"/>
-          </a:p>
-        </p:txBody>
-      </p:sp>
-      <p:sp>
-        <p:nvSpPr>
-          <p:cNvPr id="6" name="T48/header-rule"/>
-          <p:cNvSpPr/>
-          <p:nvPr/>
-        </p:nvSpPr>
-        <p:spPr>
-          <a:xfrm>
-            <a:off x="457200" y="876300"/>
-            <a:ext cx="11277600" cy="0"/>
+              <a:t>Full title of a related methods or validation study</a:t>
+            </a:r>
+            <a:endParaRPr lang="zh-CN" sz="1800" dirty="0"/>
+          </a:p>
+        </p:txBody>
+      </p:sp>
+      <p:sp>
+        <p:nvSpPr>
+          <p:cNvPr id="13" name="T48/ref:T2:meta"/>
+          <p:cNvSpPr/>
+          <p:nvPr/>
+        </p:nvSpPr>
+        <p:spPr>
+          <a:xfrm>
+            <a:off x="1123950" y="2757107"/>
+            <a:ext cx="7010400" cy="424815"/>
+          </a:xfrm>
+          <a:prstGeom prst="rect">
+            <a:avLst/>
+          </a:prstGeom>
+          <a:noFill/>
+          <a:ln/>
+        </p:spPr>
+        <p:txBody>
+          <a:bodyPr wrap="none" lIns="0" tIns="0" rIns="0" bIns="0" rtlCol="0" anchor="t"/>
+          <a:lstStyle/>
+          <a:p>
+            <a:pPr algn="l" indent="0" marL="0">
+              <a:lnSpc>
+                <a:spcPts val="1674"/>
+              </a:lnSpc>
+              <a:buNone/>
+            </a:pPr>
+            <a:r>
+              <a:rPr lang="zh-CN" altLang="en-US" sz="1350" dirty="0">
+                <a:solidFill>
+                  <a:srgbClr val="515B68"/>
+                </a:solidFill>
+                <a:latin typeface="Noto Sans CJK SC" pitchFamily="34" charset="0"/>
+                <a:ea typeface="Noto Sans CJK SC" pitchFamily="34" charset="-122"/>
+                <a:cs typeface="Noto Sans CJK SC" pitchFamily="34" charset="-120"/>
+              </a:rPr>
+              <a:t>作者姓名（替换） · 期刊与卷页（替换） · 2026 · DOI: 书目占位；图表均为合成示例 · 书</a:t>
+            </a:r>
+            <a:endParaRPr lang="zh-CN" sz="1350" dirty="0"/>
+          </a:p>
+          <a:p>
+            <a:pPr algn="l" indent="0" marL="0">
+              <a:lnSpc>
+                <a:spcPts val="1674"/>
+              </a:lnSpc>
+              <a:buNone/>
+            </a:pPr>
+            <a:r>
+              <a:rPr lang="zh-CN" altLang="en-US" sz="1350" dirty="0">
+                <a:solidFill>
+                  <a:srgbClr val="515B68"/>
+                </a:solidFill>
+                <a:latin typeface="Noto Sans CJK SC" pitchFamily="34" charset="0"/>
+                <a:ea typeface="Noto Sans CJK SC" pitchFamily="34" charset="-122"/>
+                <a:cs typeface="Noto Sans CJK SC" pitchFamily="34" charset="-120"/>
+              </a:rPr>
+              <a:t>目占位，非真实文献</a:t>
+            </a:r>
+            <a:endParaRPr lang="zh-CN" sz="1350" dirty="0"/>
+          </a:p>
+        </p:txBody>
+      </p:sp>
+      <p:sp>
+        <p:nvSpPr>
+          <p:cNvPr id="14" name="T48/ref:T2:line"/>
+          <p:cNvSpPr/>
+          <p:nvPr/>
+        </p:nvSpPr>
+        <p:spPr>
+          <a:xfrm>
+            <a:off x="1123950" y="3286696"/>
+            <a:ext cx="7010400" cy="0"/>
           </a:xfrm>
           <a:prstGeom prst="line">
             <a:avLst/>
           </a:prstGeom>
           <a:noFill/>
-          <a:ln w="11430">
-            <a:solidFill>
-              <a:srgbClr val="173C70"/>
-            </a:solidFill>
-            <a:prstDash val="solid"/>
-          </a:ln>
-        </p:spPr>
-      </p:sp>
-      <p:sp>
-        <p:nvSpPr>
-          <p:cNvPr id="7" name="T48/ref:T1:id"/>
-          <p:cNvSpPr/>
-          <p:nvPr/>
-        </p:nvSpPr>
-        <p:spPr>
-          <a:xfrm>
-            <a:off x="457200" y="1352550"/>
+          <a:ln w="13335">
+            <a:solidFill>
+              <a:srgbClr val="BEC8D4"/>
+            </a:solidFill>
+            <a:prstDash val="solid"/>
+          </a:ln>
+        </p:spPr>
+      </p:sp>
+      <p:sp>
+        <p:nvSpPr>
+          <p:cNvPr id="15" name="T48/ref:T3:id"/>
+          <p:cNvSpPr/>
+          <p:nvPr/>
+        </p:nvSpPr>
+        <p:spPr>
+          <a:xfrm>
+            <a:off x="457200" y="3429571"/>
             <a:ext cx="552450" cy="304800"/>
           </a:xfrm>
           <a:prstGeom prst="rect">
@@ -7215,7 +7969,7 @@
                 <a:ea typeface="Noto Sans CJK SC" pitchFamily="34" charset="-122"/>
                 <a:cs typeface="Noto Sans CJK SC" pitchFamily="34" charset="-120"/>
               </a:rPr>
-              <a:t>T1</a:t>
+              <a:t>T3</a:t>
             </a:r>
             <a:endParaRPr lang="zh-CN" sz="1650" dirty="0"/>
           </a:p>
@@ -7223,14 +7977,14 @@
       </p:sp>
       <p:sp>
         <p:nvSpPr>
-          <p:cNvPr id="8" name="T48/ref:T1:title"/>
-          <p:cNvSpPr/>
-          <p:nvPr/>
-        </p:nvSpPr>
-        <p:spPr>
-          <a:xfrm>
-            <a:off x="1123950" y="1333500"/>
-            <a:ext cx="7010400" cy="548640"/>
+          <p:cNvPr id="16" name="T48/ref:T3:title"/>
+          <p:cNvSpPr/>
+          <p:nvPr/>
+        </p:nvSpPr>
+        <p:spPr>
+          <a:xfrm>
+            <a:off x="1123950" y="3410521"/>
+            <a:ext cx="7010400" cy="274320"/>
           </a:xfrm>
           <a:prstGeom prst="rect">
             <a:avLst/>
@@ -7257,42 +8011,22 @@
                 <a:ea typeface="Noto Sans CJK SC" pitchFamily="34" charset="-122"/>
                 <a:cs typeface="Noto Sans CJK SC" pitchFamily="34" charset="-120"/>
               </a:rPr>
-              <a:t>Full article title: connecting decision models, experimental</a:t>
+              <a:t>Full title of the source for the supplementary evidence</a:t>
             </a:r>
             <a:endParaRPr lang="zh-CN" sz="1800" dirty="0"/>
           </a:p>
-          <a:p>
-            <a:pPr algn="l" indent="0" marL="0">
-              <a:lnSpc>
-                <a:spcPts val="2160"/>
-              </a:lnSpc>
-              <a:buNone/>
-            </a:pPr>
-            <a:r>
-              <a:rPr lang="zh-CN" altLang="en-US" sz="1800" b="1" dirty="0">
-                <a:solidFill>
-                  <a:srgbClr val="1C2430"/>
-                </a:solidFill>
-                <a:latin typeface="Noto Sans CJK SC" pitchFamily="34" charset="0"/>
-                <a:ea typeface="Noto Sans CJK SC" pitchFamily="34" charset="-122"/>
-                <a:cs typeface="Noto Sans CJK SC" pitchFamily="34" charset="-120"/>
-              </a:rPr>
-              <a:t> evidence and independent validation in crop cultivation</a:t>
-            </a:r>
-            <a:endParaRPr lang="zh-CN" sz="1800" dirty="0"/>
-          </a:p>
-        </p:txBody>
-      </p:sp>
-      <p:sp>
-        <p:nvSpPr>
-          <p:cNvPr id="9" name="T48/ref:T1:meta"/>
-          <p:cNvSpPr/>
-          <p:nvPr/>
-        </p:nvSpPr>
-        <p:spPr>
-          <a:xfrm>
-            <a:off x="1123950" y="1948815"/>
-            <a:ext cx="7010400" cy="212408"/>
+        </p:txBody>
+      </p:sp>
+      <p:sp>
+        <p:nvSpPr>
+          <p:cNvPr id="17" name="T48/ref:T3:meta"/>
+          <p:cNvSpPr/>
+          <p:nvPr/>
+        </p:nvSpPr>
+        <p:spPr>
+          <a:xfrm>
+            <a:off x="1123950" y="3751517"/>
+            <a:ext cx="7010400" cy="424815"/>
           </a:xfrm>
           <a:prstGeom prst="rect">
             <a:avLst/>
@@ -7319,28 +8053,48 @@
                 <a:ea typeface="Noto Sans CJK SC" pitchFamily="34" charset="-122"/>
                 <a:cs typeface="Noto Sans CJK SC" pitchFamily="34" charset="-120"/>
               </a:rPr>
-              <a:t>作者姓名（替换） · 期刊与卷页（替换） · 2026 · DOI: 待替换 · 书目占位，非真实文献</a:t>
+              <a:t>作者姓名（替换） · 期刊与卷页（替换） · 2026 · DOI: 书目占位；图表均为合成示例 · 书</a:t>
             </a:r>
             <a:endParaRPr lang="zh-CN" sz="1350" dirty="0"/>
           </a:p>
-        </p:txBody>
-      </p:sp>
-      <p:sp>
-        <p:nvSpPr>
-          <p:cNvPr id="10" name="T48/ref:T1:line"/>
-          <p:cNvSpPr/>
-          <p:nvPr/>
-        </p:nvSpPr>
-        <p:spPr>
-          <a:xfrm>
-            <a:off x="1123950" y="2265998"/>
-            <a:ext cx="7010400" cy="0"/>
+          <a:p>
+            <a:pPr algn="l" indent="0" marL="0">
+              <a:lnSpc>
+                <a:spcPts val="1674"/>
+              </a:lnSpc>
+              <a:buNone/>
+            </a:pPr>
+            <a:r>
+              <a:rPr lang="zh-CN" altLang="en-US" sz="1350" dirty="0">
+                <a:solidFill>
+                  <a:srgbClr val="515B68"/>
+                </a:solidFill>
+                <a:latin typeface="Noto Sans CJK SC" pitchFamily="34" charset="0"/>
+                <a:ea typeface="Noto Sans CJK SC" pitchFamily="34" charset="-122"/>
+                <a:cs typeface="Noto Sans CJK SC" pitchFamily="34" charset="-120"/>
+              </a:rPr>
+              <a:t>目占位，非真实文献</a:t>
+            </a:r>
+            <a:endParaRPr lang="zh-CN" sz="1350" dirty="0"/>
+          </a:p>
+        </p:txBody>
+      </p:sp>
+      <p:sp>
+        <p:nvSpPr>
+          <p:cNvPr id="18" name="T48/card/region-1/base-rule"/>
+          <p:cNvSpPr/>
+          <p:nvPr/>
+        </p:nvSpPr>
+        <p:spPr>
+          <a:xfrm>
+            <a:off x="8477250" y="3402616"/>
+            <a:ext cx="3257550" cy="0"/>
           </a:xfrm>
           <a:prstGeom prst="line">
             <a:avLst/>
           </a:prstGeom>
           <a:noFill/>
-          <a:ln w="13335">
+          <a:ln w="10478">
             <a:solidFill>
               <a:srgbClr val="BEC8D4"/>
             </a:solidFill>
@@ -7350,318 +8104,20 @@
       </p:sp>
       <p:sp>
         <p:nvSpPr>
-          <p:cNvPr id="11" name="T48/ref:T2:id"/>
-          <p:cNvSpPr/>
-          <p:nvPr/>
-        </p:nvSpPr>
-        <p:spPr>
-          <a:xfrm>
-            <a:off x="457200" y="2408873"/>
-            <a:ext cx="552450" cy="304800"/>
-          </a:xfrm>
-          <a:prstGeom prst="rect">
-            <a:avLst/>
-          </a:prstGeom>
-          <a:noFill/>
-          <a:ln/>
-        </p:spPr>
-        <p:txBody>
-          <a:bodyPr wrap="none" lIns="0" tIns="0" rIns="0" bIns="0" rtlCol="0" anchor="t"/>
-          <a:lstStyle/>
-          <a:p>
-            <a:pPr algn="l" indent="0" marL="0">
-              <a:lnSpc>
-                <a:spcPts val="2112"/>
-              </a:lnSpc>
-              <a:buNone/>
-            </a:pPr>
-            <a:r>
-              <a:rPr lang="zh-CN" altLang="en-US" sz="1650" b="1" dirty="0">
-                <a:solidFill>
-                  <a:srgbClr val="173C70"/>
-                </a:solidFill>
-                <a:latin typeface="Noto Sans CJK SC" pitchFamily="34" charset="0"/>
-                <a:ea typeface="Noto Sans CJK SC" pitchFamily="34" charset="-122"/>
-                <a:cs typeface="Noto Sans CJK SC" pitchFamily="34" charset="-120"/>
-              </a:rPr>
-              <a:t>T2</a:t>
-            </a:r>
-            <a:endParaRPr lang="zh-CN" sz="1650" dirty="0"/>
-          </a:p>
-        </p:txBody>
-      </p:sp>
-      <p:sp>
-        <p:nvSpPr>
-          <p:cNvPr id="12" name="T48/ref:T2:title"/>
-          <p:cNvSpPr/>
-          <p:nvPr/>
-        </p:nvSpPr>
-        <p:spPr>
-          <a:xfrm>
-            <a:off x="1123950" y="2389823"/>
-            <a:ext cx="7010400" cy="274320"/>
-          </a:xfrm>
-          <a:prstGeom prst="rect">
-            <a:avLst/>
-          </a:prstGeom>
-          <a:noFill/>
-          <a:ln/>
-        </p:spPr>
-        <p:txBody>
-          <a:bodyPr wrap="none" lIns="0" tIns="0" rIns="0" bIns="0" rtlCol="0" anchor="t"/>
-          <a:lstStyle/>
-          <a:p>
-            <a:pPr algn="l" indent="0" marL="0">
-              <a:lnSpc>
-                <a:spcPts val="2160"/>
-              </a:lnSpc>
-              <a:buNone/>
-            </a:pPr>
-            <a:r>
-              <a:rPr lang="zh-CN" altLang="en-US" sz="1800" b="1" dirty="0">
-                <a:solidFill>
-                  <a:srgbClr val="1C2430"/>
-                </a:solidFill>
-                <a:latin typeface="Noto Sans CJK SC" pitchFamily="34" charset="0"/>
-                <a:ea typeface="Noto Sans CJK SC" pitchFamily="34" charset="-122"/>
-                <a:cs typeface="Noto Sans CJK SC" pitchFamily="34" charset="-120"/>
-              </a:rPr>
-              <a:t>Full title of a related methods or validation study</a:t>
-            </a:r>
-            <a:endParaRPr lang="zh-CN" sz="1800" dirty="0"/>
-          </a:p>
-        </p:txBody>
-      </p:sp>
-      <p:sp>
-        <p:nvSpPr>
-          <p:cNvPr id="13" name="T48/ref:T2:meta"/>
-          <p:cNvSpPr/>
-          <p:nvPr/>
-        </p:nvSpPr>
-        <p:spPr>
-          <a:xfrm>
-            <a:off x="1123950" y="2730818"/>
-            <a:ext cx="7010400" cy="212408"/>
-          </a:xfrm>
-          <a:prstGeom prst="rect">
-            <a:avLst/>
-          </a:prstGeom>
-          <a:noFill/>
-          <a:ln/>
-        </p:spPr>
-        <p:txBody>
-          <a:bodyPr wrap="none" lIns="0" tIns="0" rIns="0" bIns="0" rtlCol="0" anchor="t"/>
-          <a:lstStyle/>
-          <a:p>
-            <a:pPr algn="l" indent="0" marL="0">
-              <a:lnSpc>
-                <a:spcPts val="1674"/>
-              </a:lnSpc>
-              <a:buNone/>
-            </a:pPr>
-            <a:r>
-              <a:rPr lang="zh-CN" altLang="en-US" sz="1350" dirty="0">
-                <a:solidFill>
-                  <a:srgbClr val="515B68"/>
-                </a:solidFill>
-                <a:latin typeface="Noto Sans CJK SC" pitchFamily="34" charset="0"/>
-                <a:ea typeface="Noto Sans CJK SC" pitchFamily="34" charset="-122"/>
-                <a:cs typeface="Noto Sans CJK SC" pitchFamily="34" charset="-120"/>
-              </a:rPr>
-              <a:t>作者姓名（替换） · 期刊与卷页（替换） · 2026 · DOI: 待替换 · 书目占位，非真实文献</a:t>
-            </a:r>
-            <a:endParaRPr lang="zh-CN" sz="1350" dirty="0"/>
-          </a:p>
-        </p:txBody>
-      </p:sp>
-      <p:sp>
-        <p:nvSpPr>
-          <p:cNvPr id="14" name="T48/ref:T2:line"/>
-          <p:cNvSpPr/>
-          <p:nvPr/>
-        </p:nvSpPr>
-        <p:spPr>
-          <a:xfrm>
-            <a:off x="1123950" y="3048000"/>
-            <a:ext cx="7010400" cy="0"/>
-          </a:xfrm>
-          <a:prstGeom prst="line">
-            <a:avLst/>
-          </a:prstGeom>
-          <a:noFill/>
-          <a:ln w="13335">
-            <a:solidFill>
-              <a:srgbClr val="BEC8D4"/>
-            </a:solidFill>
-            <a:prstDash val="solid"/>
-          </a:ln>
-        </p:spPr>
-      </p:sp>
-      <p:sp>
-        <p:nvSpPr>
-          <p:cNvPr id="15" name="T48/ref:T3:id"/>
-          <p:cNvSpPr/>
-          <p:nvPr/>
-        </p:nvSpPr>
-        <p:spPr>
-          <a:xfrm>
-            <a:off x="457200" y="3190875"/>
-            <a:ext cx="552450" cy="304800"/>
-          </a:xfrm>
-          <a:prstGeom prst="rect">
-            <a:avLst/>
-          </a:prstGeom>
-          <a:noFill/>
-          <a:ln/>
-        </p:spPr>
-        <p:txBody>
-          <a:bodyPr wrap="none" lIns="0" tIns="0" rIns="0" bIns="0" rtlCol="0" anchor="t"/>
-          <a:lstStyle/>
-          <a:p>
-            <a:pPr algn="l" indent="0" marL="0">
-              <a:lnSpc>
-                <a:spcPts val="2112"/>
-              </a:lnSpc>
-              <a:buNone/>
-            </a:pPr>
-            <a:r>
-              <a:rPr lang="zh-CN" altLang="en-US" sz="1650" b="1" dirty="0">
-                <a:solidFill>
-                  <a:srgbClr val="173C70"/>
-                </a:solidFill>
-                <a:latin typeface="Noto Sans CJK SC" pitchFamily="34" charset="0"/>
-                <a:ea typeface="Noto Sans CJK SC" pitchFamily="34" charset="-122"/>
-                <a:cs typeface="Noto Sans CJK SC" pitchFamily="34" charset="-120"/>
-              </a:rPr>
-              <a:t>T3</a:t>
-            </a:r>
-            <a:endParaRPr lang="zh-CN" sz="1650" dirty="0"/>
-          </a:p>
-        </p:txBody>
-      </p:sp>
-      <p:sp>
-        <p:nvSpPr>
-          <p:cNvPr id="16" name="T48/ref:T3:title"/>
-          <p:cNvSpPr/>
-          <p:nvPr/>
-        </p:nvSpPr>
-        <p:spPr>
-          <a:xfrm>
-            <a:off x="1123950" y="3171825"/>
-            <a:ext cx="7010400" cy="274320"/>
-          </a:xfrm>
-          <a:prstGeom prst="rect">
-            <a:avLst/>
-          </a:prstGeom>
-          <a:noFill/>
-          <a:ln/>
-        </p:spPr>
-        <p:txBody>
-          <a:bodyPr wrap="none" lIns="0" tIns="0" rIns="0" bIns="0" rtlCol="0" anchor="t"/>
-          <a:lstStyle/>
-          <a:p>
-            <a:pPr algn="l" indent="0" marL="0">
-              <a:lnSpc>
-                <a:spcPts val="2160"/>
-              </a:lnSpc>
-              <a:buNone/>
-            </a:pPr>
-            <a:r>
-              <a:rPr lang="zh-CN" altLang="en-US" sz="1800" b="1" dirty="0">
-                <a:solidFill>
-                  <a:srgbClr val="1C2430"/>
-                </a:solidFill>
-                <a:latin typeface="Noto Sans CJK SC" pitchFamily="34" charset="0"/>
-                <a:ea typeface="Noto Sans CJK SC" pitchFamily="34" charset="-122"/>
-                <a:cs typeface="Noto Sans CJK SC" pitchFamily="34" charset="-120"/>
-              </a:rPr>
-              <a:t>Full title of the source for the supplementary evidence</a:t>
-            </a:r>
-            <a:endParaRPr lang="zh-CN" sz="1800" dirty="0"/>
-          </a:p>
-        </p:txBody>
-      </p:sp>
-      <p:sp>
-        <p:nvSpPr>
-          <p:cNvPr id="17" name="T48/ref:T3:meta"/>
-          <p:cNvSpPr/>
-          <p:nvPr/>
-        </p:nvSpPr>
-        <p:spPr>
-          <a:xfrm>
-            <a:off x="1123950" y="3512820"/>
-            <a:ext cx="7010400" cy="212408"/>
-          </a:xfrm>
-          <a:prstGeom prst="rect">
-            <a:avLst/>
-          </a:prstGeom>
-          <a:noFill/>
-          <a:ln/>
-        </p:spPr>
-        <p:txBody>
-          <a:bodyPr wrap="none" lIns="0" tIns="0" rIns="0" bIns="0" rtlCol="0" anchor="t"/>
-          <a:lstStyle/>
-          <a:p>
-            <a:pPr algn="l" indent="0" marL="0">
-              <a:lnSpc>
-                <a:spcPts val="1674"/>
-              </a:lnSpc>
-              <a:buNone/>
-            </a:pPr>
-            <a:r>
-              <a:rPr lang="zh-CN" altLang="en-US" sz="1350" dirty="0">
-                <a:solidFill>
-                  <a:srgbClr val="515B68"/>
-                </a:solidFill>
-                <a:latin typeface="Noto Sans CJK SC" pitchFamily="34" charset="0"/>
-                <a:ea typeface="Noto Sans CJK SC" pitchFamily="34" charset="-122"/>
-                <a:cs typeface="Noto Sans CJK SC" pitchFamily="34" charset="-120"/>
-              </a:rPr>
-              <a:t>作者姓名（替换） · 期刊与卷页（替换） · 2026 · DOI: 待替换 · 书目占位，非真实文献</a:t>
-            </a:r>
-            <a:endParaRPr lang="zh-CN" sz="1350" dirty="0"/>
-          </a:p>
-        </p:txBody>
-      </p:sp>
-      <p:sp>
-        <p:nvSpPr>
-          <p:cNvPr id="18" name="T48/card/region-1/base-rule"/>
-          <p:cNvSpPr/>
-          <p:nvPr/>
-        </p:nvSpPr>
-        <p:spPr>
-          <a:xfrm>
-            <a:off x="8477250" y="3505200"/>
-            <a:ext cx="3257550" cy="0"/>
-          </a:xfrm>
-          <a:prstGeom prst="line">
-            <a:avLst/>
-          </a:prstGeom>
-          <a:noFill/>
-          <a:ln w="10478">
-            <a:solidFill>
-              <a:srgbClr val="BEC8D4"/>
-            </a:solidFill>
-            <a:prstDash val="solid"/>
-          </a:ln>
-        </p:spPr>
-      </p:sp>
-      <p:sp>
-        <p:nvSpPr>
           <p:cNvPr id="19" name="T48/card/region-1/side-mark"/>
           <p:cNvSpPr/>
           <p:nvPr/>
         </p:nvSpPr>
         <p:spPr>
           <a:xfrm>
-            <a:off x="8477250" y="1428750"/>
+            <a:off x="8477250" y="1245584"/>
             <a:ext cx="47625" cy="295275"/>
           </a:xfrm>
           <a:prstGeom prst="rect">
             <a:avLst/>
           </a:prstGeom>
           <a:solidFill>
-            <a:srgbClr val="173C70"/>
+            <a:srgbClr val="536A7A"/>
           </a:solidFill>
           <a:ln w="12700">
             <a:solidFill>
@@ -7681,7 +8137,7 @@
         </p:nvSpPr>
         <p:spPr>
           <a:xfrm>
-            <a:off x="8629650" y="1428750"/>
+            <a:off x="8629650" y="1245584"/>
             <a:ext cx="3105150" cy="304800"/>
           </a:xfrm>
           <a:prstGeom prst="rect">
@@ -7696,14 +8152,14 @@
           <a:p>
             <a:pPr algn="l" indent="0" marL="0">
               <a:lnSpc>
-                <a:spcPts val="2070"/>
-              </a:lnSpc>
-              <a:buNone/>
-            </a:pPr>
-            <a:r>
-              <a:rPr lang="zh-CN" altLang="en-US" sz="1800" b="1" dirty="0">
-                <a:solidFill>
-                  <a:srgbClr val="173C70"/>
+                <a:spcPts val="2242"/>
+              </a:lnSpc>
+              <a:buNone/>
+            </a:pPr>
+            <a:r>
+              <a:rPr lang="zh-CN" altLang="en-US" sz="1950" b="1" dirty="0">
+                <a:solidFill>
+                  <a:srgbClr val="536A7A"/>
                 </a:solidFill>
                 <a:latin typeface="Noto Sans CJK SC" pitchFamily="34" charset="0"/>
                 <a:ea typeface="Noto Sans CJK SC" pitchFamily="34" charset="-122"/>
@@ -7711,20 +8167,188 @@
               </a:rPr>
               <a:t>版本与补充材料</a:t>
             </a:r>
+            <a:endParaRPr lang="zh-CN" sz="1950" dirty="0"/>
+          </a:p>
+        </p:txBody>
+      </p:sp>
+      <p:sp>
+        <p:nvSpPr>
+          <p:cNvPr id="21" name="T48/card/region-1/body"/>
+          <p:cNvSpPr/>
+          <p:nvPr/>
+        </p:nvSpPr>
+        <p:spPr>
+          <a:xfrm>
+            <a:off x="8629650" y="1664684"/>
+            <a:ext cx="3105150" cy="1642682"/>
+          </a:xfrm>
+          <a:prstGeom prst="rect">
+            <a:avLst/>
+          </a:prstGeom>
+          <a:noFill/>
+          <a:ln/>
+        </p:spPr>
+        <p:txBody>
+          <a:bodyPr wrap="none" lIns="0" tIns="0" rIns="0" bIns="0" rtlCol="0" anchor="t"/>
+          <a:lstStyle/>
+          <a:p>
+            <a:pPr algn="l" indent="0" marL="0">
+              <a:lnSpc>
+                <a:spcPts val="2232"/>
+              </a:lnSpc>
+              <a:buNone/>
+            </a:pPr>
+            <a:r>
+              <a:rPr lang="zh-CN" altLang="en-US" sz="1800" dirty="0">
+                <a:solidFill>
+                  <a:srgbClr val="1C2430"/>
+                </a:solidFill>
+                <a:latin typeface="Noto Sans CJK SC" pitchFamily="34" charset="0"/>
+                <a:ea typeface="Noto Sans CJK SC" pitchFamily="34" charset="-122"/>
+                <a:cs typeface="Noto Sans CJK SC" pitchFamily="34" charset="-120"/>
+              </a:rPr>
+              <a:t>记录正式稿、作者稿或预印本</a:t>
+            </a:r>
             <a:endParaRPr lang="zh-CN" sz="1800" dirty="0"/>
           </a:p>
-        </p:txBody>
-      </p:sp>
-      <p:sp>
-        <p:nvSpPr>
-          <p:cNvPr id="21" name="T48/card/region-1/body"/>
-          <p:cNvSpPr/>
-          <p:nvPr/>
-        </p:nvSpPr>
-        <p:spPr>
-          <a:xfrm>
-            <a:off x="8629650" y="1847850"/>
-            <a:ext cx="3105150" cy="1562100"/>
+          <a:p>
+            <a:pPr algn="l" indent="0" marL="0">
+              <a:lnSpc>
+                <a:spcPts val="2232"/>
+              </a:lnSpc>
+              <a:buNone/>
+            </a:pPr>
+            <a:r>
+              <a:rPr lang="zh-CN" altLang="en-US" sz="1800" dirty="0">
+                <a:solidFill>
+                  <a:srgbClr val="1C2430"/>
+                </a:solidFill>
+                <a:latin typeface="Noto Sans CJK SC" pitchFamily="34" charset="0"/>
+                <a:ea typeface="Noto Sans CJK SC" pitchFamily="34" charset="-122"/>
+                <a:cs typeface="Noto Sans CJK SC" pitchFamily="34" charset="-120"/>
+              </a:rPr>
+              <a:t>版本</a:t>
+            </a:r>
+            <a:endParaRPr lang="zh-CN" sz="1800" dirty="0"/>
+          </a:p>
+          <a:p>
+            <a:pPr algn="l" indent="0" marL="0">
+              <a:lnSpc>
+                <a:spcPts val="2232"/>
+              </a:lnSpc>
+              <a:buNone/>
+            </a:pPr>
+            <a:r>
+              <a:rPr lang="zh-CN" altLang="en-US" sz="1800" dirty="0">
+                <a:solidFill>
+                  <a:srgbClr val="1C2430"/>
+                </a:solidFill>
+                <a:latin typeface="Noto Sans CJK SC" pitchFamily="34" charset="0"/>
+                <a:ea typeface="Noto Sans CJK SC" pitchFamily="34" charset="-122"/>
+                <a:cs typeface="Noto Sans CJK SC" pitchFamily="34" charset="-120"/>
+              </a:rPr>
+              <a:t>补充材料、代码和数据分别定</a:t>
+            </a:r>
+            <a:endParaRPr lang="zh-CN" sz="1800" dirty="0"/>
+          </a:p>
+          <a:p>
+            <a:pPr algn="l" indent="0" marL="0">
+              <a:lnSpc>
+                <a:spcPts val="2232"/>
+              </a:lnSpc>
+              <a:buNone/>
+            </a:pPr>
+            <a:r>
+              <a:rPr lang="zh-CN" altLang="en-US" sz="1800" dirty="0">
+                <a:solidFill>
+                  <a:srgbClr val="1C2430"/>
+                </a:solidFill>
+                <a:latin typeface="Noto Sans CJK SC" pitchFamily="34" charset="0"/>
+                <a:ea typeface="Noto Sans CJK SC" pitchFamily="34" charset="-122"/>
+                <a:cs typeface="Noto Sans CJK SC" pitchFamily="34" charset="-120"/>
+              </a:rPr>
+              <a:t>位</a:t>
+            </a:r>
+            <a:endParaRPr lang="zh-CN" sz="1800" dirty="0"/>
+          </a:p>
+          <a:p>
+            <a:pPr algn="l" indent="0" marL="0">
+              <a:lnSpc>
+                <a:spcPts val="2232"/>
+              </a:lnSpc>
+              <a:buNone/>
+            </a:pPr>
+            <a:r>
+              <a:rPr lang="zh-CN" altLang="en-US" sz="1800" dirty="0">
+                <a:solidFill>
+                  <a:srgbClr val="1C2430"/>
+                </a:solidFill>
+                <a:latin typeface="Noto Sans CJK SC" pitchFamily="34" charset="0"/>
+                <a:ea typeface="Noto Sans CJK SC" pitchFamily="34" charset="-122"/>
+                <a:cs typeface="Noto Sans CJK SC" pitchFamily="34" charset="-120"/>
+              </a:rPr>
+              <a:t>不要把链接存在当作已读全文</a:t>
+            </a:r>
+            <a:endParaRPr lang="zh-CN" sz="1800" dirty="0"/>
+          </a:p>
+        </p:txBody>
+      </p:sp>
+      <p:sp>
+        <p:nvSpPr>
+          <p:cNvPr id="22" name="T48/card/region-2/heading-rule"/>
+          <p:cNvSpPr/>
+          <p:nvPr/>
+        </p:nvSpPr>
+        <p:spPr>
+          <a:xfrm>
+            <a:off x="8477250" y="4021741"/>
+            <a:ext cx="3257550" cy="0"/>
+          </a:xfrm>
+          <a:prstGeom prst="line">
+            <a:avLst/>
+          </a:prstGeom>
+          <a:noFill/>
+          <a:ln w="9525">
+            <a:solidFill>
+              <a:srgbClr val="BEC8D4"/>
+            </a:solidFill>
+            <a:prstDash val="solid"/>
+          </a:ln>
+        </p:spPr>
+      </p:sp>
+      <p:sp>
+        <p:nvSpPr>
+          <p:cNvPr id="23" name="T48/card/region-2/heading-mark"/>
+          <p:cNvSpPr/>
+          <p:nvPr/>
+        </p:nvSpPr>
+        <p:spPr>
+          <a:xfrm>
+            <a:off x="8477250" y="4021741"/>
+            <a:ext cx="342900" cy="0"/>
+          </a:xfrm>
+          <a:prstGeom prst="line">
+            <a:avLst/>
+          </a:prstGeom>
+          <a:noFill/>
+          <a:ln w="17145">
+            <a:solidFill>
+              <a:srgbClr val="235E96"/>
+            </a:solidFill>
+            <a:prstDash val="solid"/>
+          </a:ln>
+        </p:spPr>
+      </p:sp>
+      <p:sp>
+        <p:nvSpPr>
+          <p:cNvPr id="24" name="T48/card/region-2/title"/>
+          <p:cNvSpPr/>
+          <p:nvPr/>
+        </p:nvSpPr>
+        <p:spPr>
+          <a:xfrm>
+            <a:off x="8477250" y="3678841"/>
+            <a:ext cx="3257550" cy="323850"/>
           </a:xfrm>
           <a:prstGeom prst="rect">
             <a:avLst/>
@@ -7738,162 +8362,14 @@
           <a:p>
             <a:pPr algn="l" indent="0" marL="0">
               <a:lnSpc>
-                <a:spcPts val="2139"/>
-              </a:lnSpc>
-              <a:buNone/>
-            </a:pPr>
-            <a:r>
-              <a:rPr lang="zh-CN" altLang="en-US" sz="1725" dirty="0">
-                <a:solidFill>
-                  <a:srgbClr val="1C2430"/>
-                </a:solidFill>
-                <a:latin typeface="Noto Sans CJK SC" pitchFamily="34" charset="0"/>
-                <a:ea typeface="Noto Sans CJK SC" pitchFamily="34" charset="-122"/>
-                <a:cs typeface="Noto Sans CJK SC" pitchFamily="34" charset="-120"/>
-              </a:rPr>
-              <a:t>记录正式稿、作者稿或预印本版</a:t>
-            </a:r>
-            <a:endParaRPr lang="zh-CN" sz="1725" dirty="0"/>
-          </a:p>
-          <a:p>
-            <a:pPr algn="l" indent="0" marL="0">
-              <a:lnSpc>
-                <a:spcPts val="2139"/>
-              </a:lnSpc>
-              <a:buNone/>
-            </a:pPr>
-            <a:r>
-              <a:rPr lang="zh-CN" altLang="en-US" sz="1725" dirty="0">
-                <a:solidFill>
-                  <a:srgbClr val="1C2430"/>
-                </a:solidFill>
-                <a:latin typeface="Noto Sans CJK SC" pitchFamily="34" charset="0"/>
-                <a:ea typeface="Noto Sans CJK SC" pitchFamily="34" charset="-122"/>
-                <a:cs typeface="Noto Sans CJK SC" pitchFamily="34" charset="-120"/>
-              </a:rPr>
-              <a:t>本</a:t>
-            </a:r>
-            <a:endParaRPr lang="zh-CN" sz="1725" dirty="0"/>
-          </a:p>
-          <a:p>
-            <a:pPr algn="l" indent="0" marL="0">
-              <a:lnSpc>
-                <a:spcPts val="2139"/>
-              </a:lnSpc>
-              <a:buNone/>
-            </a:pPr>
-            <a:r>
-              <a:rPr lang="zh-CN" altLang="en-US" sz="1725" dirty="0">
-                <a:solidFill>
-                  <a:srgbClr val="1C2430"/>
-                </a:solidFill>
-                <a:latin typeface="Noto Sans CJK SC" pitchFamily="34" charset="0"/>
-                <a:ea typeface="Noto Sans CJK SC" pitchFamily="34" charset="-122"/>
-                <a:cs typeface="Noto Sans CJK SC" pitchFamily="34" charset="-120"/>
-              </a:rPr>
-              <a:t>补充材料、代码和数据分别定位</a:t>
-            </a:r>
-            <a:endParaRPr lang="zh-CN" sz="1725" dirty="0"/>
-          </a:p>
-          <a:p>
-            <a:pPr algn="l" indent="0" marL="0">
-              <a:lnSpc>
-                <a:spcPts val="2139"/>
-              </a:lnSpc>
-              <a:buNone/>
-            </a:pPr>
-            <a:r>
-              <a:rPr lang="zh-CN" altLang="en-US" sz="1725" dirty="0">
-                <a:solidFill>
-                  <a:srgbClr val="1C2430"/>
-                </a:solidFill>
-                <a:latin typeface="Noto Sans CJK SC" pitchFamily="34" charset="0"/>
-                <a:ea typeface="Noto Sans CJK SC" pitchFamily="34" charset="-122"/>
-                <a:cs typeface="Noto Sans CJK SC" pitchFamily="34" charset="-120"/>
-              </a:rPr>
-              <a:t>不要把链接存在当作已读全文</a:t>
-            </a:r>
-            <a:endParaRPr lang="zh-CN" sz="1725" dirty="0"/>
-          </a:p>
-        </p:txBody>
-      </p:sp>
-      <p:sp>
-        <p:nvSpPr>
-          <p:cNvPr id="22" name="T48/card/region-2/heading-rule"/>
-          <p:cNvSpPr/>
-          <p:nvPr/>
-        </p:nvSpPr>
-        <p:spPr>
-          <a:xfrm>
-            <a:off x="8477250" y="4114800"/>
-            <a:ext cx="3257550" cy="0"/>
-          </a:xfrm>
-          <a:prstGeom prst="line">
-            <a:avLst/>
-          </a:prstGeom>
-          <a:noFill/>
-          <a:ln w="9525">
-            <a:solidFill>
-              <a:srgbClr val="BEC8D4"/>
-            </a:solidFill>
-            <a:prstDash val="solid"/>
-          </a:ln>
-        </p:spPr>
-      </p:sp>
-      <p:sp>
-        <p:nvSpPr>
-          <p:cNvPr id="23" name="T48/card/region-2/heading-mark"/>
-          <p:cNvSpPr/>
-          <p:nvPr/>
-        </p:nvSpPr>
-        <p:spPr>
-          <a:xfrm>
-            <a:off x="8477250" y="4114800"/>
-            <a:ext cx="342900" cy="0"/>
-          </a:xfrm>
-          <a:prstGeom prst="line">
-            <a:avLst/>
-          </a:prstGeom>
-          <a:noFill/>
-          <a:ln w="17145">
-            <a:solidFill>
-              <a:srgbClr val="173C70"/>
-            </a:solidFill>
-            <a:prstDash val="solid"/>
-          </a:ln>
-        </p:spPr>
-      </p:sp>
-      <p:sp>
-        <p:nvSpPr>
-          <p:cNvPr id="24" name="T48/card/region-2/title"/>
-          <p:cNvSpPr/>
-          <p:nvPr/>
-        </p:nvSpPr>
-        <p:spPr>
-          <a:xfrm>
-            <a:off x="8477250" y="3771900"/>
-            <a:ext cx="3257550" cy="323850"/>
-          </a:xfrm>
-          <a:prstGeom prst="rect">
-            <a:avLst/>
-          </a:prstGeom>
-          <a:noFill/>
-          <a:ln/>
-        </p:spPr>
-        <p:txBody>
-          <a:bodyPr wrap="none" lIns="0" tIns="0" rIns="0" bIns="0" rtlCol="0" anchor="t"/>
-          <a:lstStyle/>
-          <a:p>
-            <a:pPr algn="l" indent="0" marL="0">
-              <a:lnSpc>
-                <a:spcPts val="2156"/>
-              </a:lnSpc>
-              <a:buNone/>
-            </a:pPr>
-            <a:r>
-              <a:rPr lang="zh-CN" altLang="en-US" sz="1875" b="1" dirty="0">
-                <a:solidFill>
-                  <a:srgbClr val="173C70"/>
+                <a:spcPts val="2242"/>
+              </a:lnSpc>
+              <a:buNone/>
+            </a:pPr>
+            <a:r>
+              <a:rPr lang="zh-CN" altLang="en-US" sz="1950" b="1" dirty="0">
+                <a:solidFill>
+                  <a:srgbClr val="235E96"/>
                 </a:solidFill>
                 <a:latin typeface="Noto Sans CJK SC" pitchFamily="34" charset="0"/>
                 <a:ea typeface="Noto Sans CJK SC" pitchFamily="34" charset="-122"/>
@@ -7901,7 +8377,7 @@
               </a:rPr>
               <a:t>图像与数据来源</a:t>
             </a:r>
-            <a:endParaRPr lang="zh-CN" sz="1875" dirty="0"/>
+            <a:endParaRPr lang="zh-CN" sz="1950" dirty="0"/>
           </a:p>
         </p:txBody>
       </p:sp>
@@ -7913,8 +8389,8 @@
         </p:nvSpPr>
         <p:spPr>
           <a:xfrm>
-            <a:off x="8477250" y="4248150"/>
-            <a:ext cx="3257550" cy="1733550"/>
+            <a:off x="8477250" y="4155091"/>
+            <a:ext cx="3257550" cy="1820704"/>
           </a:xfrm>
           <a:prstGeom prst="rect">
             <a:avLst/>
